--- a/반도체_투자_세미나_20260727.pptx
+++ b/반도체_투자_세미나_20260727.pptx
@@ -123,6 +123,663 @@
 </file>
 
 <file path=ppt/charts/chart1.xml><?xml version="1.0" encoding="utf-8"?>
+<c:chartSpace xmlns:c="http://schemas.openxmlformats.org/drawingml/2006/chart" xmlns:a="http://schemas.openxmlformats.org/drawingml/2006/main" xmlns:r="http://schemas.openxmlformats.org/officeDocument/2006/relationships">
+  <c:date1904 val="0"/>
+  <c:roundedCorners val="1"/>
+  <c:chart>
+    <c:autoTitleDeleted val="1"/>
+    <c:plotArea>
+      <c:layout/>
+      <c:lineChart>
+        <c:varyColors val="0"/>
+        <c:ser>
+          <c:idx val="0"/>
+          <c:order val="0"/>
+          <c:tx>
+            <c:strRef>
+              <c:f>Sheet1!$B$1</c:f>
+              <c:strCache>
+                <c:ptCount val="1"/>
+                <c:pt idx="0">
+                  <c:v>미국 Fed</c:v>
+                </c:pt>
+              </c:strCache>
+            </c:strRef>
+          </c:tx>
+          <c:spPr>
+            <a:solidFill>
+              <a:srgbClr val="043B72"/>
+            </a:solidFill>
+            <a:ln w="31750" cap="flat">
+              <a:solidFill>
+                <a:srgbClr val="043B72"/>
+              </a:solidFill>
+              <a:prstDash val="solid"/>
+              <a:round/>
+            </a:ln>
+            <a:effectLst/>
+          </c:spPr>
+          <c:invertIfNegative val="0"/>
+          <c:dLbls>
+            <c:numFmt formatCode="#,##0" sourceLinked="0"/>
+            <c:txPr>
+              <a:bodyPr/>
+              <a:lstStyle/>
+              <a:p>
+                <a:pPr>
+                  <a:defRPr b="0" i="0" strike="noStrike" sz="1200" u="none">
+                    <a:solidFill>
+                      <a:srgbClr val="000000"/>
+                    </a:solidFill>
+                    <a:latin typeface="Arial"/>
+                  </a:defRPr>
+                </a:pPr>
+              </a:p>
+            </c:txPr>
+            <c:showLegendKey val="0"/>
+            <c:showVal val="0"/>
+            <c:showCatName val="0"/>
+            <c:showSerName val="0"/>
+            <c:showPercent val="0"/>
+            <c:showBubbleSize val="0"/>
+            <c:showLeaderLines val="0"/>
+          </c:dLbls>
+          <c:marker>
+            <c:symbol val="circle"/>
+            <c:size val="6"/>
+            <c:spPr>
+              <a:solidFill>
+                <a:srgbClr val="043B72"/>
+              </a:solidFill>
+              <a:ln w="9525" cap="flat">
+                <a:solidFill>
+                  <a:srgbClr val="043B72"/>
+                </a:solidFill>
+                <a:prstDash val="solid"/>
+                <a:round/>
+              </a:ln>
+              <a:effectLst/>
+            </c:spPr>
+          </c:marker>
+          <c:cat>
+            <c:multiLvlStrRef>
+              <c:f>Sheet1!$A$2:$A$6</c:f>
+              <c:multiLvlStrCache>
+                <c:ptCount val="5"/>
+                <c:lvl>
+                  <c:pt idx="0">
+                    <c:v>2024</c:v>
+                  </c:pt>
+                  <c:pt idx="1">
+                    <c:v>2025 상</c:v>
+                  </c:pt>
+                  <c:pt idx="2">
+                    <c:v>2025 하</c:v>
+                  </c:pt>
+                  <c:pt idx="3">
+                    <c:v>2026 상</c:v>
+                  </c:pt>
+                  <c:pt idx="4">
+                    <c:v>현재(7월)</c:v>
+                  </c:pt>
+                </c:lvl>
+              </c:multiLvlStrCache>
+            </c:multiLvlStrRef>
+          </c:cat>
+          <c:val>
+            <c:numRef>
+              <c:f>Sheet1!$B$2:$B$6</c:f>
+              <c:numCache>
+                <c:formatCode>General</c:formatCode>
+                <c:ptCount val="5"/>
+                <c:pt idx="0">
+                  <c:v>5.4</c:v>
+                </c:pt>
+                <c:pt idx="1">
+                  <c:v>4.6</c:v>
+                </c:pt>
+                <c:pt idx="2">
+                  <c:v>4.1</c:v>
+                </c:pt>
+                <c:pt idx="3">
+                  <c:v>3.9</c:v>
+                </c:pt>
+                <c:pt idx="4">
+                  <c:v>3.6</c:v>
+                </c:pt>
+              </c:numCache>
+            </c:numRef>
+          </c:val>
+          <c:smooth val="0"/>
+        </c:ser>
+        <c:ser>
+          <c:idx val="1"/>
+          <c:order val="1"/>
+          <c:tx>
+            <c:strRef>
+              <c:f>Sheet1!$C$1</c:f>
+              <c:strCache>
+                <c:ptCount val="1"/>
+                <c:pt idx="0">
+                  <c:v>한국 BOK</c:v>
+                </c:pt>
+              </c:strCache>
+            </c:strRef>
+          </c:tx>
+          <c:spPr>
+            <a:solidFill>
+              <a:srgbClr val="F58220"/>
+            </a:solidFill>
+            <a:ln w="31750" cap="flat">
+              <a:solidFill>
+                <a:srgbClr val="F58220"/>
+              </a:solidFill>
+              <a:prstDash val="solid"/>
+              <a:round/>
+            </a:ln>
+            <a:effectLst/>
+          </c:spPr>
+          <c:invertIfNegative val="0"/>
+          <c:dLbls>
+            <c:numFmt formatCode="#,##0" sourceLinked="0"/>
+            <c:txPr>
+              <a:bodyPr/>
+              <a:lstStyle/>
+              <a:p>
+                <a:pPr>
+                  <a:defRPr b="0" i="0" strike="noStrike" sz="1200" u="none">
+                    <a:solidFill>
+                      <a:srgbClr val="000000"/>
+                    </a:solidFill>
+                    <a:latin typeface="Arial"/>
+                  </a:defRPr>
+                </a:pPr>
+              </a:p>
+            </c:txPr>
+            <c:showLegendKey val="0"/>
+            <c:showVal val="0"/>
+            <c:showCatName val="0"/>
+            <c:showSerName val="0"/>
+            <c:showPercent val="0"/>
+            <c:showBubbleSize val="0"/>
+            <c:showLeaderLines val="0"/>
+          </c:dLbls>
+          <c:marker>
+            <c:symbol val="circle"/>
+            <c:size val="6"/>
+            <c:spPr>
+              <a:solidFill>
+                <a:srgbClr val="F58220"/>
+              </a:solidFill>
+              <a:ln w="9525" cap="flat">
+                <a:solidFill>
+                  <a:srgbClr val="F58220"/>
+                </a:solidFill>
+                <a:prstDash val="solid"/>
+                <a:round/>
+              </a:ln>
+              <a:effectLst/>
+            </c:spPr>
+          </c:marker>
+          <c:cat>
+            <c:multiLvlStrRef>
+              <c:f>Sheet1!$A$2:$A$6</c:f>
+              <c:multiLvlStrCache>
+                <c:ptCount val="5"/>
+                <c:lvl>
+                  <c:pt idx="0">
+                    <c:v>2024</c:v>
+                  </c:pt>
+                  <c:pt idx="1">
+                    <c:v>2025 상</c:v>
+                  </c:pt>
+                  <c:pt idx="2">
+                    <c:v>2025 하</c:v>
+                  </c:pt>
+                  <c:pt idx="3">
+                    <c:v>2026 상</c:v>
+                  </c:pt>
+                  <c:pt idx="4">
+                    <c:v>현재(7월)</c:v>
+                  </c:pt>
+                </c:lvl>
+              </c:multiLvlStrCache>
+            </c:multiLvlStrRef>
+          </c:cat>
+          <c:val>
+            <c:numRef>
+              <c:f>Sheet1!$C$2:$C$6</c:f>
+              <c:numCache>
+                <c:formatCode>General</c:formatCode>
+                <c:ptCount val="5"/>
+                <c:pt idx="0">
+                  <c:v>3.25</c:v>
+                </c:pt>
+                <c:pt idx="1">
+                  <c:v>3</c:v>
+                </c:pt>
+                <c:pt idx="2">
+                  <c:v>2.75</c:v>
+                </c:pt>
+                <c:pt idx="3">
+                  <c:v>2.5</c:v>
+                </c:pt>
+                <c:pt idx="4">
+                  <c:v>2.75</c:v>
+                </c:pt>
+              </c:numCache>
+            </c:numRef>
+          </c:val>
+          <c:smooth val="0"/>
+        </c:ser>
+        <c:ser>
+          <c:idx val="2"/>
+          <c:order val="2"/>
+          <c:tx>
+            <c:strRef>
+              <c:f>Sheet1!$D$1</c:f>
+              <c:strCache>
+                <c:ptCount val="1"/>
+                <c:pt idx="0">
+                  <c:v>유로존 ECB</c:v>
+                </c:pt>
+              </c:strCache>
+            </c:strRef>
+          </c:tx>
+          <c:spPr>
+            <a:solidFill>
+              <a:srgbClr val="0086B8"/>
+            </a:solidFill>
+            <a:ln w="31750" cap="flat">
+              <a:solidFill>
+                <a:srgbClr val="0086B8"/>
+              </a:solidFill>
+              <a:prstDash val="solid"/>
+              <a:round/>
+            </a:ln>
+            <a:effectLst/>
+          </c:spPr>
+          <c:invertIfNegative val="0"/>
+          <c:dLbls>
+            <c:numFmt formatCode="#,##0" sourceLinked="0"/>
+            <c:txPr>
+              <a:bodyPr/>
+              <a:lstStyle/>
+              <a:p>
+                <a:pPr>
+                  <a:defRPr b="0" i="0" strike="noStrike" sz="1200" u="none">
+                    <a:solidFill>
+                      <a:srgbClr val="000000"/>
+                    </a:solidFill>
+                    <a:latin typeface="Arial"/>
+                  </a:defRPr>
+                </a:pPr>
+              </a:p>
+            </c:txPr>
+            <c:showLegendKey val="0"/>
+            <c:showVal val="0"/>
+            <c:showCatName val="0"/>
+            <c:showSerName val="0"/>
+            <c:showPercent val="0"/>
+            <c:showBubbleSize val="0"/>
+            <c:showLeaderLines val="0"/>
+          </c:dLbls>
+          <c:marker>
+            <c:symbol val="circle"/>
+            <c:size val="6"/>
+            <c:spPr>
+              <a:solidFill>
+                <a:srgbClr val="0086B8"/>
+              </a:solidFill>
+              <a:ln w="9525" cap="flat">
+                <a:solidFill>
+                  <a:srgbClr val="0086B8"/>
+                </a:solidFill>
+                <a:prstDash val="solid"/>
+                <a:round/>
+              </a:ln>
+              <a:effectLst/>
+            </c:spPr>
+          </c:marker>
+          <c:cat>
+            <c:multiLvlStrRef>
+              <c:f>Sheet1!$A$2:$A$6</c:f>
+              <c:multiLvlStrCache>
+                <c:ptCount val="5"/>
+                <c:lvl>
+                  <c:pt idx="0">
+                    <c:v>2024</c:v>
+                  </c:pt>
+                  <c:pt idx="1">
+                    <c:v>2025 상</c:v>
+                  </c:pt>
+                  <c:pt idx="2">
+                    <c:v>2025 하</c:v>
+                  </c:pt>
+                  <c:pt idx="3">
+                    <c:v>2026 상</c:v>
+                  </c:pt>
+                  <c:pt idx="4">
+                    <c:v>현재(7월)</c:v>
+                  </c:pt>
+                </c:lvl>
+              </c:multiLvlStrCache>
+            </c:multiLvlStrRef>
+          </c:cat>
+          <c:val>
+            <c:numRef>
+              <c:f>Sheet1!$D$2:$D$6</c:f>
+              <c:numCache>
+                <c:formatCode>General</c:formatCode>
+                <c:ptCount val="5"/>
+                <c:pt idx="0">
+                  <c:v>3.75</c:v>
+                </c:pt>
+                <c:pt idx="1">
+                  <c:v>3</c:v>
+                </c:pt>
+                <c:pt idx="2">
+                  <c:v>2.5</c:v>
+                </c:pt>
+                <c:pt idx="3">
+                  <c:v>2.25</c:v>
+                </c:pt>
+                <c:pt idx="4">
+                  <c:v>2.25</c:v>
+                </c:pt>
+              </c:numCache>
+            </c:numRef>
+          </c:val>
+          <c:smooth val="0"/>
+        </c:ser>
+        <c:ser>
+          <c:idx val="3"/>
+          <c:order val="3"/>
+          <c:tx>
+            <c:strRef>
+              <c:f>Sheet1!$E$1</c:f>
+              <c:strCache>
+                <c:ptCount val="1"/>
+                <c:pt idx="0">
+                  <c:v>일본 BOJ</c:v>
+                </c:pt>
+              </c:strCache>
+            </c:strRef>
+          </c:tx>
+          <c:spPr>
+            <a:solidFill>
+              <a:srgbClr val="CB6015"/>
+            </a:solidFill>
+            <a:ln w="31750" cap="flat">
+              <a:solidFill>
+                <a:srgbClr val="CB6015"/>
+              </a:solidFill>
+              <a:prstDash val="solid"/>
+              <a:round/>
+            </a:ln>
+            <a:effectLst/>
+          </c:spPr>
+          <c:invertIfNegative val="0"/>
+          <c:dLbls>
+            <c:numFmt formatCode="#,##0" sourceLinked="0"/>
+            <c:txPr>
+              <a:bodyPr/>
+              <a:lstStyle/>
+              <a:p>
+                <a:pPr>
+                  <a:defRPr b="0" i="0" strike="noStrike" sz="1200" u="none">
+                    <a:solidFill>
+                      <a:srgbClr val="000000"/>
+                    </a:solidFill>
+                    <a:latin typeface="Arial"/>
+                  </a:defRPr>
+                </a:pPr>
+              </a:p>
+            </c:txPr>
+            <c:showLegendKey val="0"/>
+            <c:showVal val="0"/>
+            <c:showCatName val="0"/>
+            <c:showSerName val="0"/>
+            <c:showPercent val="0"/>
+            <c:showBubbleSize val="0"/>
+            <c:showLeaderLines val="0"/>
+          </c:dLbls>
+          <c:marker>
+            <c:symbol val="circle"/>
+            <c:size val="6"/>
+            <c:spPr>
+              <a:solidFill>
+                <a:srgbClr val="CB6015"/>
+              </a:solidFill>
+              <a:ln w="9525" cap="flat">
+                <a:solidFill>
+                  <a:srgbClr val="CB6015"/>
+                </a:solidFill>
+                <a:prstDash val="solid"/>
+                <a:round/>
+              </a:ln>
+              <a:effectLst/>
+            </c:spPr>
+          </c:marker>
+          <c:cat>
+            <c:multiLvlStrRef>
+              <c:f>Sheet1!$A$2:$A$6</c:f>
+              <c:multiLvlStrCache>
+                <c:ptCount val="5"/>
+                <c:lvl>
+                  <c:pt idx="0">
+                    <c:v>2024</c:v>
+                  </c:pt>
+                  <c:pt idx="1">
+                    <c:v>2025 상</c:v>
+                  </c:pt>
+                  <c:pt idx="2">
+                    <c:v>2025 하</c:v>
+                  </c:pt>
+                  <c:pt idx="3">
+                    <c:v>2026 상</c:v>
+                  </c:pt>
+                  <c:pt idx="4">
+                    <c:v>현재(7월)</c:v>
+                  </c:pt>
+                </c:lvl>
+              </c:multiLvlStrCache>
+            </c:multiLvlStrRef>
+          </c:cat>
+          <c:val>
+            <c:numRef>
+              <c:f>Sheet1!$E$2:$E$6</c:f>
+              <c:numCache>
+                <c:formatCode>General</c:formatCode>
+                <c:ptCount val="5"/>
+                <c:pt idx="0">
+                  <c:v>0.25</c:v>
+                </c:pt>
+                <c:pt idx="1">
+                  <c:v>0.5</c:v>
+                </c:pt>
+                <c:pt idx="2">
+                  <c:v>0.75</c:v>
+                </c:pt>
+                <c:pt idx="3">
+                  <c:v>0.75</c:v>
+                </c:pt>
+                <c:pt idx="4">
+                  <c:v>1</c:v>
+                </c:pt>
+              </c:numCache>
+            </c:numRef>
+          </c:val>
+          <c:smooth val="0"/>
+        </c:ser>
+        <c:dLbls>
+          <c:numFmt formatCode="#,##0" sourceLinked="0"/>
+          <c:txPr>
+            <a:bodyPr/>
+            <a:lstStyle/>
+            <a:p>
+              <a:pPr>
+                <a:defRPr b="0" i="0" strike="noStrike" sz="1200" u="none">
+                  <a:solidFill>
+                    <a:srgbClr val="000000"/>
+                  </a:solidFill>
+                  <a:latin typeface="Arial"/>
+                </a:defRPr>
+              </a:pPr>
+            </a:p>
+          </c:txPr>
+          <c:showLegendKey val="0"/>
+          <c:showVal val="0"/>
+          <c:showCatName val="0"/>
+          <c:showSerName val="0"/>
+          <c:showPercent val="0"/>
+          <c:showBubbleSize val="0"/>
+          <c:showLeaderLines val="0"/>
+        </c:dLbls>
+        <c:marker val="1"/>
+        <c:axId val="2094734554"/>
+        <c:axId val="2094734552"/>
+        <c:axId val="2094734556"/>
+      </c:lineChart>
+      <c:catAx>
+        <c:axId val="2094734554"/>
+        <c:scaling>
+          <c:orientation val="minMax"/>
+        </c:scaling>
+        <c:delete val="0"/>
+        <c:axPos val="b"/>
+        <c:numFmt formatCode="General" sourceLinked="1"/>
+        <c:majorTickMark val="out"/>
+        <c:minorTickMark val="none"/>
+        <c:tickLblPos val="low"/>
+        <c:spPr>
+          <a:ln w="12700" cap="flat">
+            <a:solidFill>
+              <a:srgbClr val="888888"/>
+            </a:solidFill>
+            <a:prstDash val="solid"/>
+            <a:round/>
+          </a:ln>
+        </c:spPr>
+        <c:txPr>
+          <a:bodyPr/>
+          <a:lstStyle/>
+          <a:p>
+            <a:pPr>
+              <a:defRPr sz="1000" b="0" i="0" u="none" strike="noStrike">
+                <a:solidFill>
+                  <a:srgbClr val="6C6C6C"/>
+                </a:solidFill>
+                <a:latin typeface="Spoqa Han Sans Neo"/>
+              </a:defRPr>
+            </a:pPr>
+            <a:endParaRPr lang="en-US"/>
+          </a:p>
+        </c:txPr>
+        <c:crossAx val="2094734552"/>
+        <c:crosses val="autoZero"/>
+        <c:auto val="1"/>
+        <c:lblAlgn val="ctr"/>
+        <c:noMultiLvlLbl val="1"/>
+      </c:catAx>
+      <c:valAx>
+        <c:axId val="2094734552"/>
+        <c:scaling>
+          <c:orientation val="minMax"/>
+          <c:max val="6"/>
+          <c:min val="0"/>
+        </c:scaling>
+        <c:delete val="0"/>
+        <c:axPos val="l"/>
+        <c:majorGridlines>
+          <c:spPr>
+            <a:ln w="6350" cap="flat">
+              <a:solidFill>
+                <a:srgbClr val="E5E4E1"/>
+              </a:solidFill>
+              <a:prstDash val="solid"/>
+              <a:round/>
+            </a:ln>
+          </c:spPr>
+        </c:majorGridlines>
+        <c:numFmt formatCode="0&quot;%&quot;" sourceLinked="0"/>
+        <c:majorTickMark val="out"/>
+        <c:minorTickMark val="none"/>
+        <c:tickLblPos val="nextTo"/>
+        <c:spPr>
+          <a:ln w="12700" cap="flat">
+            <a:solidFill>
+              <a:srgbClr val="888888"/>
+            </a:solidFill>
+            <a:prstDash val="solid"/>
+            <a:round/>
+          </a:ln>
+        </c:spPr>
+        <c:txPr>
+          <a:bodyPr/>
+          <a:lstStyle/>
+          <a:p>
+            <a:pPr>
+              <a:defRPr sz="1000" b="0" i="0" u="none" strike="noStrike">
+                <a:solidFill>
+                  <a:srgbClr val="6C6C6C"/>
+                </a:solidFill>
+                <a:latin typeface="Spoqa Han Sans Neo"/>
+              </a:defRPr>
+            </a:pPr>
+            <a:endParaRPr lang="en-US"/>
+          </a:p>
+        </c:txPr>
+        <c:crossAx val="2094734554"/>
+        <c:crosses val="autoZero"/>
+        <c:crossBetween val="between"/>
+        <c:majorUnit val="1"/>
+      </c:valAx>
+      <c:spPr>
+        <a:noFill/>
+        <a:ln>
+          <a:noFill/>
+        </a:ln>
+        <a:effectLst/>
+      </c:spPr>
+    </c:plotArea>
+    <c:legend>
+      <c:legendPos val="b"/>
+      <c:overlay val="0"/>
+      <c:txPr>
+        <a:bodyPr/>
+        <a:lstStyle/>
+        <a:p>
+          <a:pPr>
+            <a:defRPr sz="1100">
+              <a:solidFill>
+                <a:srgbClr val="6C6C6C"/>
+              </a:solidFill>
+              <a:latin typeface="Spoqa Han Sans Neo"/>
+              <a:cs typeface="Spoqa Han Sans Neo"/>
+            </a:defRPr>
+          </a:pPr>
+          <a:endParaRPr lang="en-US"/>
+        </a:p>
+      </c:txPr>
+    </c:legend>
+    <c:plotVisOnly val="1"/>
+    <c:dispBlanksAs val="span"/>
+  </c:chart>
+  <c:spPr>
+    <a:noFill/>
+    <a:ln>
+      <a:noFill/>
+    </a:ln>
+    <a:effectLst/>
+  </c:spPr>
+  <c:externalData r:id="rId1">
+    <c:autoUpdate val="0"/>
+  </c:externalData>
+</c:chartSpace>
+</file>
+
+<file path=ppt/charts/chart2.xml><?xml version="1.0" encoding="utf-8"?>
 <c:chartSpace xmlns:c="http://schemas.openxmlformats.org/drawingml/2006/chart" xmlns:a="http://schemas.openxmlformats.org/drawingml/2006/main" xmlns:r="http://schemas.openxmlformats.org/officeDocument/2006/relationships">
   <c:date1904 val="0"/>
   <c:roundedCorners val="1"/>
@@ -404,7 +1061,7 @@
 </c:chartSpace>
 </file>
 
-<file path=ppt/charts/chart2.xml><?xml version="1.0" encoding="utf-8"?>
+<file path=ppt/charts/chart3.xml><?xml version="1.0" encoding="utf-8"?>
 <c:chartSpace xmlns:c="http://schemas.openxmlformats.org/drawingml/2006/chart" xmlns:a="http://schemas.openxmlformats.org/drawingml/2006/main" xmlns:r="http://schemas.openxmlformats.org/officeDocument/2006/relationships">
   <c:date1904 val="0"/>
   <c:roundedCorners val="1"/>
@@ -787,7 +1444,7 @@
 </c:chartSpace>
 </file>
 
-<file path=ppt/charts/chart3.xml><?xml version="1.0" encoding="utf-8"?>
+<file path=ppt/charts/chart4.xml><?xml version="1.0" encoding="utf-8"?>
 <c:chartSpace xmlns:c="http://schemas.openxmlformats.org/drawingml/2006/chart" xmlns:a="http://schemas.openxmlformats.org/drawingml/2006/main" xmlns:r="http://schemas.openxmlformats.org/officeDocument/2006/relationships">
   <c:date1904 val="0"/>
   <c:roundedCorners val="1"/>
@@ -10772,32 +11429,126 @@
                 <a:ea typeface="Spoqa Han Sans Neo" pitchFamily="34" charset="-122"/>
                 <a:cs typeface="Spoqa Han Sans Neo" pitchFamily="34" charset="-120"/>
               </a:rPr>
-              <a:t>주요국 금리, '인상·동결'로 방향 전환</a:t>
+              <a:t>주요국 금리 추이: '인하'에서 '인상·동결'로</a:t>
             </a:r>
             <a:endParaRPr lang="en-US" sz="2900" dirty="0"/>
           </a:p>
         </p:txBody>
       </p:sp>
-      <p:sp>
-        <p:nvSpPr>
-          <p:cNvPr id="5" name="Shape 3"/>
-          <p:cNvSpPr/>
-          <p:nvPr/>
-        </p:nvSpPr>
-        <p:spPr>
-          <a:xfrm>
-            <a:off x="502920" y="1783080"/>
-            <a:ext cx="2697480" cy="2148840"/>
+      <p:graphicFrame>
+        <p:nvGraphicFramePr>
+          <p:cNvPr id="5" name="Chart 0" descr=""/>
+          <p:cNvGraphicFramePr/>
+          <p:nvPr/>
+        </p:nvGraphicFramePr>
+        <p:xfrm>
+          <a:off x="457200" y="1783080"/>
+          <a:ext cx="6903720" cy="3977640"/>
+        </p:xfrm>
+        <a:graphic xmlns:a="http://schemas.openxmlformats.org/drawingml/2006/main">
+          <a:graphicData uri="http://schemas.openxmlformats.org/drawingml/2006/chart">
+            <c:chart xmlns:c="http://schemas.openxmlformats.org/drawingml/2006/chart" r:id="rId1"/>
+          </a:graphicData>
+        </a:graphic>
+      </p:graphicFrame>
+      <p:sp>
+        <p:nvSpPr>
+          <p:cNvPr id="6" name="Text 3"/>
+          <p:cNvSpPr/>
+          <p:nvPr/>
+        </p:nvSpPr>
+        <p:spPr>
+          <a:xfrm>
+            <a:off x="502920" y="5742432"/>
+            <a:ext cx="6858000" cy="274320"/>
+          </a:xfrm>
+          <a:prstGeom prst="rect">
+            <a:avLst/>
+          </a:prstGeom>
+          <a:noFill/>
+          <a:ln/>
+        </p:spPr>
+        <p:txBody>
+          <a:bodyPr wrap="square" lIns="0" tIns="0" rIns="0" bIns="0" rtlCol="0" anchor="ctr"/>
+          <a:lstStyle/>
+          <a:p>
+            <a:pPr indent="0" marL="0">
+              <a:buNone/>
+            </a:pPr>
+            <a:r>
+              <a:rPr lang="en-US" sz="950" dirty="0">
+                <a:solidFill>
+                  <a:srgbClr val="6C6C6C"/>
+                </a:solidFill>
+                <a:latin typeface="Spoqa Han Sans Neo" pitchFamily="34" charset="0"/>
+                <a:ea typeface="Spoqa Han Sans Neo" pitchFamily="34" charset="-122"/>
+                <a:cs typeface="Spoqa Han Sans Neo" pitchFamily="34" charset="-120"/>
+              </a:rPr>
+              <a:t>단위: 정책금리 %  ·  미국은 목표범위 중값 기준</a:t>
+            </a:r>
+            <a:endParaRPr lang="en-US" sz="950" dirty="0"/>
+          </a:p>
+        </p:txBody>
+      </p:sp>
+      <p:sp>
+        <p:nvSpPr>
+          <p:cNvPr id="7" name="Text 4"/>
+          <p:cNvSpPr/>
+          <p:nvPr/>
+        </p:nvSpPr>
+        <p:spPr>
+          <a:xfrm>
+            <a:off x="7498080" y="1783080"/>
+            <a:ext cx="4206240" cy="320040"/>
+          </a:xfrm>
+          <a:prstGeom prst="rect">
+            <a:avLst/>
+          </a:prstGeom>
+          <a:noFill/>
+          <a:ln/>
+        </p:spPr>
+        <p:txBody>
+          <a:bodyPr wrap="square" lIns="0" tIns="0" rIns="0" bIns="0" rtlCol="0" anchor="ctr"/>
+          <a:lstStyle/>
+          <a:p>
+            <a:pPr indent="0" marL="0">
+              <a:buNone/>
+            </a:pPr>
+            <a:r>
+              <a:rPr lang="en-US" sz="1300" b="1" dirty="0">
+                <a:solidFill>
+                  <a:srgbClr val="1A1A1A"/>
+                </a:solidFill>
+                <a:latin typeface="Spoqa Han Sans Neo" pitchFamily="34" charset="0"/>
+                <a:ea typeface="Spoqa Han Sans Neo" pitchFamily="34" charset="-122"/>
+                <a:cs typeface="Spoqa Han Sans Neo" pitchFamily="34" charset="-120"/>
+              </a:rPr>
+              <a:t>현재 정책금리 (2026.7)</a:t>
+            </a:r>
+            <a:endParaRPr lang="en-US" sz="1300" dirty="0"/>
+          </a:p>
+        </p:txBody>
+      </p:sp>
+      <p:sp>
+        <p:nvSpPr>
+          <p:cNvPr id="8" name="Shape 5"/>
+          <p:cNvSpPr/>
+          <p:nvPr/>
+        </p:nvSpPr>
+        <p:spPr>
+          <a:xfrm>
+            <a:off x="7498080" y="2194560"/>
+            <a:ext cx="4187952" cy="658368"/>
           </a:xfrm>
           <a:prstGeom prst="roundRect">
             <a:avLst>
-              <a:gd name="adj" fmla="val 2553"/>
+              <a:gd name="adj" fmla="val 6944"/>
             </a:avLst>
           </a:prstGeom>
           <a:solidFill>
             <a:srgbClr val="F7F8FA"/>
           </a:solidFill>
-          <a:ln w="12700">
+          <a:ln w="9525">
             <a:solidFill>
               <a:srgbClr val="CDCECB"/>
             </a:solidFill>
@@ -10807,97 +11558,17 @@
       </p:sp>
       <p:sp>
         <p:nvSpPr>
-          <p:cNvPr id="6" name="Text 4"/>
-          <p:cNvSpPr/>
-          <p:nvPr/>
-        </p:nvSpPr>
-        <p:spPr>
-          <a:xfrm>
-            <a:off x="704088" y="1938528"/>
-            <a:ext cx="2331720" cy="502920"/>
-          </a:xfrm>
-          <a:prstGeom prst="rect">
-            <a:avLst/>
-          </a:prstGeom>
-          <a:noFill/>
-          <a:ln/>
-        </p:spPr>
-        <p:txBody>
-          <a:bodyPr wrap="square" lIns="0" tIns="0" rIns="0" bIns="0" rtlCol="0" anchor="ctr"/>
-          <a:lstStyle/>
-          <a:p>
-            <a:pPr indent="0" marL="0">
-              <a:buNone/>
-            </a:pPr>
-            <a:r>
-              <a:rPr lang="en-US" sz="1250" b="1" dirty="0">
-                <a:solidFill>
-                  <a:srgbClr val="6C6C6C"/>
-                </a:solidFill>
-                <a:latin typeface="Spoqa Han Sans Neo" pitchFamily="34" charset="0"/>
-                <a:ea typeface="Spoqa Han Sans Neo" pitchFamily="34" charset="-122"/>
-                <a:cs typeface="Spoqa Han Sans Neo" pitchFamily="34" charset="-120"/>
-              </a:rPr>
-              <a:t>한국은행 (BOK)</a:t>
-            </a:r>
-            <a:endParaRPr lang="en-US" sz="1250" dirty="0"/>
-          </a:p>
-        </p:txBody>
-      </p:sp>
-      <p:sp>
-        <p:nvSpPr>
-          <p:cNvPr id="7" name="Text 5"/>
-          <p:cNvSpPr/>
-          <p:nvPr/>
-        </p:nvSpPr>
-        <p:spPr>
-          <a:xfrm>
-            <a:off x="685800" y="2395728"/>
-            <a:ext cx="2377440" cy="640080"/>
-          </a:xfrm>
-          <a:prstGeom prst="rect">
-            <a:avLst/>
-          </a:prstGeom>
-          <a:noFill/>
-          <a:ln/>
-        </p:spPr>
-        <p:txBody>
-          <a:bodyPr wrap="square" lIns="0" tIns="0" rIns="0" bIns="0" rtlCol="0" anchor="ctr"/>
-          <a:lstStyle/>
-          <a:p>
-            <a:pPr indent="0" marL="0">
-              <a:buNone/>
-            </a:pPr>
-            <a:r>
-              <a:rPr lang="en-US" sz="2600" b="1" dirty="0">
-                <a:solidFill>
-                  <a:srgbClr val="F58220"/>
-                </a:solidFill>
-                <a:latin typeface="Spoqa Han Sans Neo" pitchFamily="34" charset="0"/>
-                <a:ea typeface="Spoqa Han Sans Neo" pitchFamily="34" charset="-122"/>
-                <a:cs typeface="Spoqa Han Sans Neo" pitchFamily="34" charset="-120"/>
-              </a:rPr>
-              <a:t>2.75%</a:t>
-            </a:r>
-            <a:endParaRPr lang="en-US" sz="2600" dirty="0"/>
-          </a:p>
-        </p:txBody>
-      </p:sp>
-      <p:sp>
-        <p:nvSpPr>
-          <p:cNvPr id="8" name="Shape 6"/>
-          <p:cNvSpPr/>
-          <p:nvPr/>
-        </p:nvSpPr>
-        <p:spPr>
-          <a:xfrm>
-            <a:off x="704088" y="3063240"/>
-            <a:ext cx="1234440" cy="329184"/>
-          </a:xfrm>
-          <a:prstGeom prst="roundRect">
-            <a:avLst>
-              <a:gd name="adj" fmla="val 11111"/>
-            </a:avLst>
+          <p:cNvPr id="9" name="Shape 6"/>
+          <p:cNvSpPr/>
+          <p:nvPr/>
+        </p:nvSpPr>
+        <p:spPr>
+          <a:xfrm>
+            <a:off x="7680960" y="2395728"/>
+            <a:ext cx="146304" cy="256032"/>
+          </a:xfrm>
+          <a:prstGeom prst="rect">
+            <a:avLst/>
           </a:prstGeom>
           <a:solidFill>
             <a:srgbClr val="F58220"/>
@@ -10907,14 +11578,92 @@
       </p:sp>
       <p:sp>
         <p:nvSpPr>
-          <p:cNvPr id="9" name="Text 7"/>
-          <p:cNvSpPr/>
-          <p:nvPr/>
-        </p:nvSpPr>
-        <p:spPr>
-          <a:xfrm>
-            <a:off x="704088" y="3063240"/>
-            <a:ext cx="1234440" cy="329184"/>
+          <p:cNvPr id="10" name="Text 7"/>
+          <p:cNvSpPr/>
+          <p:nvPr/>
+        </p:nvSpPr>
+        <p:spPr>
+          <a:xfrm>
+            <a:off x="7973568" y="2194560"/>
+            <a:ext cx="1645920" cy="658368"/>
+          </a:xfrm>
+          <a:prstGeom prst="rect">
+            <a:avLst/>
+          </a:prstGeom>
+          <a:noFill/>
+          <a:ln/>
+        </p:spPr>
+        <p:txBody>
+          <a:bodyPr wrap="square" lIns="0" tIns="0" rIns="0" bIns="0" rtlCol="0" anchor="ctr"/>
+          <a:lstStyle/>
+          <a:p>
+            <a:pPr indent="0" marL="0">
+              <a:buNone/>
+            </a:pPr>
+            <a:r>
+              <a:rPr lang="en-US" sz="1300" b="1" dirty="0">
+                <a:solidFill>
+                  <a:srgbClr val="1A1A1A"/>
+                </a:solidFill>
+                <a:latin typeface="Spoqa Han Sans Neo" pitchFamily="34" charset="0"/>
+                <a:ea typeface="Spoqa Han Sans Neo" pitchFamily="34" charset="-122"/>
+                <a:cs typeface="Spoqa Han Sans Neo" pitchFamily="34" charset="-120"/>
+              </a:rPr>
+              <a:t>한국 BOK</a:t>
+            </a:r>
+            <a:endParaRPr lang="en-US" sz="1300" dirty="0"/>
+          </a:p>
+        </p:txBody>
+      </p:sp>
+      <p:sp>
+        <p:nvSpPr>
+          <p:cNvPr id="11" name="Text 8"/>
+          <p:cNvSpPr/>
+          <p:nvPr/>
+        </p:nvSpPr>
+        <p:spPr>
+          <a:xfrm>
+            <a:off x="9646920" y="2194560"/>
+            <a:ext cx="1417320" cy="658368"/>
+          </a:xfrm>
+          <a:prstGeom prst="rect">
+            <a:avLst/>
+          </a:prstGeom>
+          <a:noFill/>
+          <a:ln/>
+        </p:spPr>
+        <p:txBody>
+          <a:bodyPr wrap="square" lIns="0" tIns="0" rIns="0" bIns="0" rtlCol="0" anchor="ctr"/>
+          <a:lstStyle/>
+          <a:p>
+            <a:pPr algn="r" indent="0" marL="0">
+              <a:buNone/>
+            </a:pPr>
+            <a:r>
+              <a:rPr lang="en-US" sz="1700" b="1" dirty="0">
+                <a:solidFill>
+                  <a:srgbClr val="F58220"/>
+                </a:solidFill>
+                <a:latin typeface="Spoqa Han Sans Neo" pitchFamily="34" charset="0"/>
+                <a:ea typeface="Spoqa Han Sans Neo" pitchFamily="34" charset="-122"/>
+                <a:cs typeface="Spoqa Han Sans Neo" pitchFamily="34" charset="-120"/>
+              </a:rPr>
+              <a:t>2.75%</a:t>
+            </a:r>
+            <a:endParaRPr lang="en-US" sz="1700" dirty="0"/>
+          </a:p>
+        </p:txBody>
+      </p:sp>
+      <p:sp>
+        <p:nvSpPr>
+          <p:cNvPr id="12" name="Text 9"/>
+          <p:cNvSpPr/>
+          <p:nvPr/>
+        </p:nvSpPr>
+        <p:spPr>
+          <a:xfrm>
+            <a:off x="11155680" y="2194560"/>
+            <a:ext cx="411480" cy="658368"/>
           </a:xfrm>
           <a:prstGeom prst="rect">
             <a:avLst/>
@@ -10930,102 +11679,40 @@
               <a:buNone/>
             </a:pPr>
             <a:r>
-              <a:rPr lang="en-US" sz="1100" b="1" dirty="0">
-                <a:solidFill>
-                  <a:srgbClr val="FFFFFF"/>
-                </a:solidFill>
-                <a:latin typeface="Spoqa Han Sans Neo" pitchFamily="34" charset="0"/>
-                <a:ea typeface="Spoqa Han Sans Neo" pitchFamily="34" charset="-122"/>
-                <a:cs typeface="Spoqa Han Sans Neo" pitchFamily="34" charset="-120"/>
-              </a:rPr>
-              <a:t>▲ 인상</a:t>
-            </a:r>
-            <a:endParaRPr lang="en-US" sz="1100" dirty="0"/>
-          </a:p>
-        </p:txBody>
-      </p:sp>
-      <p:sp>
-        <p:nvSpPr>
-          <p:cNvPr id="10" name="Text 8"/>
-          <p:cNvSpPr/>
-          <p:nvPr/>
-        </p:nvSpPr>
-        <p:spPr>
-          <a:xfrm>
-            <a:off x="704088" y="3456432"/>
-            <a:ext cx="2331720" cy="457200"/>
-          </a:xfrm>
-          <a:prstGeom prst="rect">
-            <a:avLst/>
-          </a:prstGeom>
-          <a:noFill/>
-          <a:ln/>
-        </p:spPr>
-        <p:txBody>
-          <a:bodyPr wrap="square" lIns="0" tIns="0" rIns="0" bIns="0" rtlCol="0" anchor="ctr"/>
-          <a:lstStyle/>
-          <a:p>
-            <a:pPr indent="0" marL="0">
-              <a:lnSpc>
-                <a:spcPts val="1200"/>
-              </a:lnSpc>
-              <a:buNone/>
-            </a:pPr>
-            <a:r>
-              <a:rPr lang="en-US" sz="1000" dirty="0">
-                <a:solidFill>
-                  <a:srgbClr val="3D3D3D"/>
-                </a:solidFill>
-                <a:latin typeface="Spoqa Han Sans Neo" pitchFamily="34" charset="0"/>
-                <a:ea typeface="Spoqa Han Sans Neo" pitchFamily="34" charset="-122"/>
-                <a:cs typeface="Spoqa Han Sans Neo" pitchFamily="34" charset="-120"/>
-              </a:rPr>
-              <a:t>7/16 +0.25%p (3년 반 만)</a:t>
-            </a:r>
-            <a:endParaRPr lang="en-US" sz="1000" dirty="0"/>
-          </a:p>
-          <a:p>
-            <a:pPr indent="0" marL="0">
-              <a:lnSpc>
-                <a:spcPts val="1200"/>
-              </a:lnSpc>
-              <a:buNone/>
-            </a:pPr>
-            <a:r>
-              <a:rPr lang="en-US" sz="1000" dirty="0">
-                <a:solidFill>
-                  <a:srgbClr val="3D3D3D"/>
-                </a:solidFill>
-                <a:latin typeface="Spoqa Han Sans Neo" pitchFamily="34" charset="0"/>
-                <a:ea typeface="Spoqa Han Sans Neo" pitchFamily="34" charset="-122"/>
-                <a:cs typeface="Spoqa Han Sans Neo" pitchFamily="34" charset="-120"/>
-              </a:rPr>
-              <a:t>8월 추가·연말 3.0% 관측</a:t>
-            </a:r>
-            <a:endParaRPr lang="en-US" sz="1000" dirty="0"/>
-          </a:p>
-        </p:txBody>
-      </p:sp>
-      <p:sp>
-        <p:nvSpPr>
-          <p:cNvPr id="11" name="Shape 9"/>
-          <p:cNvSpPr/>
-          <p:nvPr/>
-        </p:nvSpPr>
-        <p:spPr>
-          <a:xfrm>
-            <a:off x="3328416" y="1783080"/>
-            <a:ext cx="2697480" cy="2148840"/>
+              <a:rPr lang="en-US" sz="1400" b="1" dirty="0">
+                <a:solidFill>
+                  <a:srgbClr val="F58220"/>
+                </a:solidFill>
+                <a:latin typeface="Spoqa Han Sans Neo" pitchFamily="34" charset="0"/>
+                <a:ea typeface="Spoqa Han Sans Neo" pitchFamily="34" charset="-122"/>
+                <a:cs typeface="Spoqa Han Sans Neo" pitchFamily="34" charset="-120"/>
+              </a:rPr>
+              <a:t>▲</a:t>
+            </a:r>
+            <a:endParaRPr lang="en-US" sz="1400" dirty="0"/>
+          </a:p>
+        </p:txBody>
+      </p:sp>
+      <p:sp>
+        <p:nvSpPr>
+          <p:cNvPr id="13" name="Shape 10"/>
+          <p:cNvSpPr/>
+          <p:nvPr/>
+        </p:nvSpPr>
+        <p:spPr>
+          <a:xfrm>
+            <a:off x="7498080" y="2926080"/>
+            <a:ext cx="4187952" cy="658368"/>
           </a:xfrm>
           <a:prstGeom prst="roundRect">
             <a:avLst>
-              <a:gd name="adj" fmla="val 2553"/>
+              <a:gd name="adj" fmla="val 6944"/>
             </a:avLst>
           </a:prstGeom>
           <a:solidFill>
             <a:srgbClr val="F7F8FA"/>
           </a:solidFill>
-          <a:ln w="12700">
+          <a:ln w="9525">
             <a:solidFill>
               <a:srgbClr val="CDCECB"/>
             </a:solidFill>
@@ -11035,97 +11722,17 @@
       </p:sp>
       <p:sp>
         <p:nvSpPr>
-          <p:cNvPr id="12" name="Text 10"/>
-          <p:cNvSpPr/>
-          <p:nvPr/>
-        </p:nvSpPr>
-        <p:spPr>
-          <a:xfrm>
-            <a:off x="3529584" y="1938528"/>
-            <a:ext cx="2331720" cy="502920"/>
-          </a:xfrm>
-          <a:prstGeom prst="rect">
-            <a:avLst/>
-          </a:prstGeom>
-          <a:noFill/>
-          <a:ln/>
-        </p:spPr>
-        <p:txBody>
-          <a:bodyPr wrap="square" lIns="0" tIns="0" rIns="0" bIns="0" rtlCol="0" anchor="ctr"/>
-          <a:lstStyle/>
-          <a:p>
-            <a:pPr indent="0" marL="0">
-              <a:buNone/>
-            </a:pPr>
-            <a:r>
-              <a:rPr lang="en-US" sz="1250" b="1" dirty="0">
-                <a:solidFill>
-                  <a:srgbClr val="6C6C6C"/>
-                </a:solidFill>
-                <a:latin typeface="Spoqa Han Sans Neo" pitchFamily="34" charset="0"/>
-                <a:ea typeface="Spoqa Han Sans Neo" pitchFamily="34" charset="-122"/>
-                <a:cs typeface="Spoqa Han Sans Neo" pitchFamily="34" charset="-120"/>
-              </a:rPr>
-              <a:t>미 연준 (Fed)</a:t>
-            </a:r>
-            <a:endParaRPr lang="en-US" sz="1250" dirty="0"/>
-          </a:p>
-        </p:txBody>
-      </p:sp>
-      <p:sp>
-        <p:nvSpPr>
-          <p:cNvPr id="13" name="Text 11"/>
-          <p:cNvSpPr/>
-          <p:nvPr/>
-        </p:nvSpPr>
-        <p:spPr>
-          <a:xfrm>
-            <a:off x="3511296" y="2395728"/>
-            <a:ext cx="2377440" cy="640080"/>
-          </a:xfrm>
-          <a:prstGeom prst="rect">
-            <a:avLst/>
-          </a:prstGeom>
-          <a:noFill/>
-          <a:ln/>
-        </p:spPr>
-        <p:txBody>
-          <a:bodyPr wrap="square" lIns="0" tIns="0" rIns="0" bIns="0" rtlCol="0" anchor="ctr"/>
-          <a:lstStyle/>
-          <a:p>
-            <a:pPr indent="0" marL="0">
-              <a:buNone/>
-            </a:pPr>
-            <a:r>
-              <a:rPr lang="en-US" sz="2600" b="1" dirty="0">
-                <a:solidFill>
-                  <a:srgbClr val="043B72"/>
-                </a:solidFill>
-                <a:latin typeface="Spoqa Han Sans Neo" pitchFamily="34" charset="0"/>
-                <a:ea typeface="Spoqa Han Sans Neo" pitchFamily="34" charset="-122"/>
-                <a:cs typeface="Spoqa Han Sans Neo" pitchFamily="34" charset="-120"/>
-              </a:rPr>
-              <a:t>3.50~3.75%</a:t>
-            </a:r>
-            <a:endParaRPr lang="en-US" sz="2600" dirty="0"/>
-          </a:p>
-        </p:txBody>
-      </p:sp>
-      <p:sp>
-        <p:nvSpPr>
-          <p:cNvPr id="14" name="Shape 12"/>
-          <p:cNvSpPr/>
-          <p:nvPr/>
-        </p:nvSpPr>
-        <p:spPr>
-          <a:xfrm>
-            <a:off x="3529584" y="3063240"/>
-            <a:ext cx="1234440" cy="329184"/>
-          </a:xfrm>
-          <a:prstGeom prst="roundRect">
-            <a:avLst>
-              <a:gd name="adj" fmla="val 11111"/>
-            </a:avLst>
+          <p:cNvPr id="14" name="Shape 11"/>
+          <p:cNvSpPr/>
+          <p:nvPr/>
+        </p:nvSpPr>
+        <p:spPr>
+          <a:xfrm>
+            <a:off x="7680960" y="3127248"/>
+            <a:ext cx="146304" cy="256032"/>
+          </a:xfrm>
+          <a:prstGeom prst="rect">
+            <a:avLst/>
           </a:prstGeom>
           <a:solidFill>
             <a:srgbClr val="043B72"/>
@@ -11135,14 +11742,92 @@
       </p:sp>
       <p:sp>
         <p:nvSpPr>
-          <p:cNvPr id="15" name="Text 13"/>
-          <p:cNvSpPr/>
-          <p:nvPr/>
-        </p:nvSpPr>
-        <p:spPr>
-          <a:xfrm>
-            <a:off x="3529584" y="3063240"/>
-            <a:ext cx="1234440" cy="329184"/>
+          <p:cNvPr id="15" name="Text 12"/>
+          <p:cNvSpPr/>
+          <p:nvPr/>
+        </p:nvSpPr>
+        <p:spPr>
+          <a:xfrm>
+            <a:off x="7973568" y="2926080"/>
+            <a:ext cx="1645920" cy="658368"/>
+          </a:xfrm>
+          <a:prstGeom prst="rect">
+            <a:avLst/>
+          </a:prstGeom>
+          <a:noFill/>
+          <a:ln/>
+        </p:spPr>
+        <p:txBody>
+          <a:bodyPr wrap="square" lIns="0" tIns="0" rIns="0" bIns="0" rtlCol="0" anchor="ctr"/>
+          <a:lstStyle/>
+          <a:p>
+            <a:pPr indent="0" marL="0">
+              <a:buNone/>
+            </a:pPr>
+            <a:r>
+              <a:rPr lang="en-US" sz="1300" b="1" dirty="0">
+                <a:solidFill>
+                  <a:srgbClr val="1A1A1A"/>
+                </a:solidFill>
+                <a:latin typeface="Spoqa Han Sans Neo" pitchFamily="34" charset="0"/>
+                <a:ea typeface="Spoqa Han Sans Neo" pitchFamily="34" charset="-122"/>
+                <a:cs typeface="Spoqa Han Sans Neo" pitchFamily="34" charset="-120"/>
+              </a:rPr>
+              <a:t>미국 Fed</a:t>
+            </a:r>
+            <a:endParaRPr lang="en-US" sz="1300" dirty="0"/>
+          </a:p>
+        </p:txBody>
+      </p:sp>
+      <p:sp>
+        <p:nvSpPr>
+          <p:cNvPr id="16" name="Text 13"/>
+          <p:cNvSpPr/>
+          <p:nvPr/>
+        </p:nvSpPr>
+        <p:spPr>
+          <a:xfrm>
+            <a:off x="9646920" y="2926080"/>
+            <a:ext cx="1417320" cy="658368"/>
+          </a:xfrm>
+          <a:prstGeom prst="rect">
+            <a:avLst/>
+          </a:prstGeom>
+          <a:noFill/>
+          <a:ln/>
+        </p:spPr>
+        <p:txBody>
+          <a:bodyPr wrap="square" lIns="0" tIns="0" rIns="0" bIns="0" rtlCol="0" anchor="ctr"/>
+          <a:lstStyle/>
+          <a:p>
+            <a:pPr algn="r" indent="0" marL="0">
+              <a:buNone/>
+            </a:pPr>
+            <a:r>
+              <a:rPr lang="en-US" sz="1700" b="1" dirty="0">
+                <a:solidFill>
+                  <a:srgbClr val="043B72"/>
+                </a:solidFill>
+                <a:latin typeface="Spoqa Han Sans Neo" pitchFamily="34" charset="0"/>
+                <a:ea typeface="Spoqa Han Sans Neo" pitchFamily="34" charset="-122"/>
+                <a:cs typeface="Spoqa Han Sans Neo" pitchFamily="34" charset="-120"/>
+              </a:rPr>
+              <a:t>3.63%</a:t>
+            </a:r>
+            <a:endParaRPr lang="en-US" sz="1700" dirty="0"/>
+          </a:p>
+        </p:txBody>
+      </p:sp>
+      <p:sp>
+        <p:nvSpPr>
+          <p:cNvPr id="17" name="Text 14"/>
+          <p:cNvSpPr/>
+          <p:nvPr/>
+        </p:nvSpPr>
+        <p:spPr>
+          <a:xfrm>
+            <a:off x="11155680" y="2926080"/>
+            <a:ext cx="411480" cy="658368"/>
           </a:xfrm>
           <a:prstGeom prst="rect">
             <a:avLst/>
@@ -11158,102 +11843,40 @@
               <a:buNone/>
             </a:pPr>
             <a:r>
-              <a:rPr lang="en-US" sz="1100" b="1" dirty="0">
-                <a:solidFill>
-                  <a:srgbClr val="FFFFFF"/>
-                </a:solidFill>
-                <a:latin typeface="Spoqa Han Sans Neo" pitchFamily="34" charset="0"/>
-                <a:ea typeface="Spoqa Han Sans Neo" pitchFamily="34" charset="-122"/>
-                <a:cs typeface="Spoqa Han Sans Neo" pitchFamily="34" charset="-120"/>
-              </a:rPr>
-              <a:t>= 동결</a:t>
-            </a:r>
-            <a:endParaRPr lang="en-US" sz="1100" dirty="0"/>
-          </a:p>
-        </p:txBody>
-      </p:sp>
-      <p:sp>
-        <p:nvSpPr>
-          <p:cNvPr id="16" name="Text 14"/>
-          <p:cNvSpPr/>
-          <p:nvPr/>
-        </p:nvSpPr>
-        <p:spPr>
-          <a:xfrm>
-            <a:off x="3529584" y="3456432"/>
-            <a:ext cx="2331720" cy="457200"/>
-          </a:xfrm>
-          <a:prstGeom prst="rect">
-            <a:avLst/>
-          </a:prstGeom>
-          <a:noFill/>
-          <a:ln/>
-        </p:spPr>
-        <p:txBody>
-          <a:bodyPr wrap="square" lIns="0" tIns="0" rIns="0" bIns="0" rtlCol="0" anchor="ctr"/>
-          <a:lstStyle/>
-          <a:p>
-            <a:pPr indent="0" marL="0">
-              <a:lnSpc>
-                <a:spcPts val="1200"/>
-              </a:lnSpc>
-              <a:buNone/>
-            </a:pPr>
-            <a:r>
-              <a:rPr lang="en-US" sz="1000" dirty="0">
-                <a:solidFill>
-                  <a:srgbClr val="3D3D3D"/>
-                </a:solidFill>
-                <a:latin typeface="Spoqa Han Sans Neo" pitchFamily="34" charset="0"/>
-                <a:ea typeface="Spoqa Han Sans Neo" pitchFamily="34" charset="-122"/>
-                <a:cs typeface="Spoqa Han Sans Neo" pitchFamily="34" charset="-120"/>
-              </a:rPr>
-              <a:t>7/29 FOMC 동결 전망</a:t>
-            </a:r>
-            <a:endParaRPr lang="en-US" sz="1000" dirty="0"/>
-          </a:p>
-          <a:p>
-            <a:pPr indent="0" marL="0">
-              <a:lnSpc>
-                <a:spcPts val="1200"/>
-              </a:lnSpc>
-              <a:buNone/>
-            </a:pPr>
-            <a:r>
-              <a:rPr lang="en-US" sz="1000" dirty="0">
-                <a:solidFill>
-                  <a:srgbClr val="3D3D3D"/>
-                </a:solidFill>
-                <a:latin typeface="Spoqa Han Sans Neo" pitchFamily="34" charset="0"/>
-                <a:ea typeface="Spoqa Han Sans Neo" pitchFamily="34" charset="-122"/>
-                <a:cs typeface="Spoqa Han Sans Neo" pitchFamily="34" charset="-120"/>
-              </a:rPr>
-              <a:t>유가 급등에 연내 인상론</a:t>
-            </a:r>
-            <a:endParaRPr lang="en-US" sz="1000" dirty="0"/>
-          </a:p>
-        </p:txBody>
-      </p:sp>
-      <p:sp>
-        <p:nvSpPr>
-          <p:cNvPr id="17" name="Shape 15"/>
-          <p:cNvSpPr/>
-          <p:nvPr/>
-        </p:nvSpPr>
-        <p:spPr>
-          <a:xfrm>
-            <a:off x="6153912" y="1783080"/>
-            <a:ext cx="2697480" cy="2148840"/>
+              <a:rPr lang="en-US" sz="1400" b="1" dirty="0">
+                <a:solidFill>
+                  <a:srgbClr val="043B72"/>
+                </a:solidFill>
+                <a:latin typeface="Spoqa Han Sans Neo" pitchFamily="34" charset="0"/>
+                <a:ea typeface="Spoqa Han Sans Neo" pitchFamily="34" charset="-122"/>
+                <a:cs typeface="Spoqa Han Sans Neo" pitchFamily="34" charset="-120"/>
+              </a:rPr>
+              <a:t>=</a:t>
+            </a:r>
+            <a:endParaRPr lang="en-US" sz="1400" dirty="0"/>
+          </a:p>
+        </p:txBody>
+      </p:sp>
+      <p:sp>
+        <p:nvSpPr>
+          <p:cNvPr id="18" name="Shape 15"/>
+          <p:cNvSpPr/>
+          <p:nvPr/>
+        </p:nvSpPr>
+        <p:spPr>
+          <a:xfrm>
+            <a:off x="7498080" y="3657600"/>
+            <a:ext cx="4187952" cy="658368"/>
           </a:xfrm>
           <a:prstGeom prst="roundRect">
             <a:avLst>
-              <a:gd name="adj" fmla="val 2553"/>
+              <a:gd name="adj" fmla="val 6944"/>
             </a:avLst>
           </a:prstGeom>
           <a:solidFill>
             <a:srgbClr val="F7F8FA"/>
           </a:solidFill>
-          <a:ln w="12700">
+          <a:ln w="9525">
             <a:solidFill>
               <a:srgbClr val="CDCECB"/>
             </a:solidFill>
@@ -11263,97 +11886,17 @@
       </p:sp>
       <p:sp>
         <p:nvSpPr>
-          <p:cNvPr id="18" name="Text 16"/>
-          <p:cNvSpPr/>
-          <p:nvPr/>
-        </p:nvSpPr>
-        <p:spPr>
-          <a:xfrm>
-            <a:off x="6355080" y="1938528"/>
-            <a:ext cx="2331720" cy="502920"/>
-          </a:xfrm>
-          <a:prstGeom prst="rect">
-            <a:avLst/>
-          </a:prstGeom>
-          <a:noFill/>
-          <a:ln/>
-        </p:spPr>
-        <p:txBody>
-          <a:bodyPr wrap="square" lIns="0" tIns="0" rIns="0" bIns="0" rtlCol="0" anchor="ctr"/>
-          <a:lstStyle/>
-          <a:p>
-            <a:pPr indent="0" marL="0">
-              <a:buNone/>
-            </a:pPr>
-            <a:r>
-              <a:rPr lang="en-US" sz="1250" b="1" dirty="0">
-                <a:solidFill>
-                  <a:srgbClr val="6C6C6C"/>
-                </a:solidFill>
-                <a:latin typeface="Spoqa Han Sans Neo" pitchFamily="34" charset="0"/>
-                <a:ea typeface="Spoqa Han Sans Neo" pitchFamily="34" charset="-122"/>
-                <a:cs typeface="Spoqa Han Sans Neo" pitchFamily="34" charset="-120"/>
-              </a:rPr>
-              <a:t>유럽 ECB</a:t>
-            </a:r>
-            <a:endParaRPr lang="en-US" sz="1250" dirty="0"/>
-          </a:p>
-        </p:txBody>
-      </p:sp>
-      <p:sp>
-        <p:nvSpPr>
-          <p:cNvPr id="19" name="Text 17"/>
-          <p:cNvSpPr/>
-          <p:nvPr/>
-        </p:nvSpPr>
-        <p:spPr>
-          <a:xfrm>
-            <a:off x="6336792" y="2395728"/>
-            <a:ext cx="2377440" cy="640080"/>
-          </a:xfrm>
-          <a:prstGeom prst="rect">
-            <a:avLst/>
-          </a:prstGeom>
-          <a:noFill/>
-          <a:ln/>
-        </p:spPr>
-        <p:txBody>
-          <a:bodyPr wrap="square" lIns="0" tIns="0" rIns="0" bIns="0" rtlCol="0" anchor="ctr"/>
-          <a:lstStyle/>
-          <a:p>
-            <a:pPr indent="0" marL="0">
-              <a:buNone/>
-            </a:pPr>
-            <a:r>
-              <a:rPr lang="en-US" sz="2600" b="1" dirty="0">
-                <a:solidFill>
-                  <a:srgbClr val="0086B8"/>
-                </a:solidFill>
-                <a:latin typeface="Spoqa Han Sans Neo" pitchFamily="34" charset="0"/>
-                <a:ea typeface="Spoqa Han Sans Neo" pitchFamily="34" charset="-122"/>
-                <a:cs typeface="Spoqa Han Sans Neo" pitchFamily="34" charset="-120"/>
-              </a:rPr>
-              <a:t>2.25%</a:t>
-            </a:r>
-            <a:endParaRPr lang="en-US" sz="2600" dirty="0"/>
-          </a:p>
-        </p:txBody>
-      </p:sp>
-      <p:sp>
-        <p:nvSpPr>
-          <p:cNvPr id="20" name="Shape 18"/>
-          <p:cNvSpPr/>
-          <p:nvPr/>
-        </p:nvSpPr>
-        <p:spPr>
-          <a:xfrm>
-            <a:off x="6355080" y="3063240"/>
-            <a:ext cx="1234440" cy="329184"/>
-          </a:xfrm>
-          <a:prstGeom prst="roundRect">
-            <a:avLst>
-              <a:gd name="adj" fmla="val 11111"/>
-            </a:avLst>
+          <p:cNvPr id="19" name="Shape 16"/>
+          <p:cNvSpPr/>
+          <p:nvPr/>
+        </p:nvSpPr>
+        <p:spPr>
+          <a:xfrm>
+            <a:off x="7680960" y="3858768"/>
+            <a:ext cx="146304" cy="256032"/>
+          </a:xfrm>
+          <a:prstGeom prst="rect">
+            <a:avLst/>
           </a:prstGeom>
           <a:solidFill>
             <a:srgbClr val="0086B8"/>
@@ -11363,14 +11906,92 @@
       </p:sp>
       <p:sp>
         <p:nvSpPr>
-          <p:cNvPr id="21" name="Text 19"/>
-          <p:cNvSpPr/>
-          <p:nvPr/>
-        </p:nvSpPr>
-        <p:spPr>
-          <a:xfrm>
-            <a:off x="6355080" y="3063240"/>
-            <a:ext cx="1234440" cy="329184"/>
+          <p:cNvPr id="20" name="Text 17"/>
+          <p:cNvSpPr/>
+          <p:nvPr/>
+        </p:nvSpPr>
+        <p:spPr>
+          <a:xfrm>
+            <a:off x="7973568" y="3657600"/>
+            <a:ext cx="1645920" cy="658368"/>
+          </a:xfrm>
+          <a:prstGeom prst="rect">
+            <a:avLst/>
+          </a:prstGeom>
+          <a:noFill/>
+          <a:ln/>
+        </p:spPr>
+        <p:txBody>
+          <a:bodyPr wrap="square" lIns="0" tIns="0" rIns="0" bIns="0" rtlCol="0" anchor="ctr"/>
+          <a:lstStyle/>
+          <a:p>
+            <a:pPr indent="0" marL="0">
+              <a:buNone/>
+            </a:pPr>
+            <a:r>
+              <a:rPr lang="en-US" sz="1300" b="1" dirty="0">
+                <a:solidFill>
+                  <a:srgbClr val="1A1A1A"/>
+                </a:solidFill>
+                <a:latin typeface="Spoqa Han Sans Neo" pitchFamily="34" charset="0"/>
+                <a:ea typeface="Spoqa Han Sans Neo" pitchFamily="34" charset="-122"/>
+                <a:cs typeface="Spoqa Han Sans Neo" pitchFamily="34" charset="-120"/>
+              </a:rPr>
+              <a:t>유로존 ECB</a:t>
+            </a:r>
+            <a:endParaRPr lang="en-US" sz="1300" dirty="0"/>
+          </a:p>
+        </p:txBody>
+      </p:sp>
+      <p:sp>
+        <p:nvSpPr>
+          <p:cNvPr id="21" name="Text 18"/>
+          <p:cNvSpPr/>
+          <p:nvPr/>
+        </p:nvSpPr>
+        <p:spPr>
+          <a:xfrm>
+            <a:off x="9646920" y="3657600"/>
+            <a:ext cx="1417320" cy="658368"/>
+          </a:xfrm>
+          <a:prstGeom prst="rect">
+            <a:avLst/>
+          </a:prstGeom>
+          <a:noFill/>
+          <a:ln/>
+        </p:spPr>
+        <p:txBody>
+          <a:bodyPr wrap="square" lIns="0" tIns="0" rIns="0" bIns="0" rtlCol="0" anchor="ctr"/>
+          <a:lstStyle/>
+          <a:p>
+            <a:pPr algn="r" indent="0" marL="0">
+              <a:buNone/>
+            </a:pPr>
+            <a:r>
+              <a:rPr lang="en-US" sz="1700" b="1" dirty="0">
+                <a:solidFill>
+                  <a:srgbClr val="0086B8"/>
+                </a:solidFill>
+                <a:latin typeface="Spoqa Han Sans Neo" pitchFamily="34" charset="0"/>
+                <a:ea typeface="Spoqa Han Sans Neo" pitchFamily="34" charset="-122"/>
+                <a:cs typeface="Spoqa Han Sans Neo" pitchFamily="34" charset="-120"/>
+              </a:rPr>
+              <a:t>2.25%</a:t>
+            </a:r>
+            <a:endParaRPr lang="en-US" sz="1700" dirty="0"/>
+          </a:p>
+        </p:txBody>
+      </p:sp>
+      <p:sp>
+        <p:nvSpPr>
+          <p:cNvPr id="22" name="Text 19"/>
+          <p:cNvSpPr/>
+          <p:nvPr/>
+        </p:nvSpPr>
+        <p:spPr>
+          <a:xfrm>
+            <a:off x="11155680" y="3657600"/>
+            <a:ext cx="411480" cy="658368"/>
           </a:xfrm>
           <a:prstGeom prst="rect">
             <a:avLst/>
@@ -11386,102 +12007,40 @@
               <a:buNone/>
             </a:pPr>
             <a:r>
-              <a:rPr lang="en-US" sz="1100" b="1" dirty="0">
-                <a:solidFill>
-                  <a:srgbClr val="FFFFFF"/>
-                </a:solidFill>
-                <a:latin typeface="Spoqa Han Sans Neo" pitchFamily="34" charset="0"/>
-                <a:ea typeface="Spoqa Han Sans Neo" pitchFamily="34" charset="-122"/>
-                <a:cs typeface="Spoqa Han Sans Neo" pitchFamily="34" charset="-120"/>
-              </a:rPr>
-              <a:t>= 동결</a:t>
-            </a:r>
-            <a:endParaRPr lang="en-US" sz="1100" dirty="0"/>
-          </a:p>
-        </p:txBody>
-      </p:sp>
-      <p:sp>
-        <p:nvSpPr>
-          <p:cNvPr id="22" name="Text 20"/>
-          <p:cNvSpPr/>
-          <p:nvPr/>
-        </p:nvSpPr>
-        <p:spPr>
-          <a:xfrm>
-            <a:off x="6355080" y="3456432"/>
-            <a:ext cx="2331720" cy="457200"/>
-          </a:xfrm>
-          <a:prstGeom prst="rect">
-            <a:avLst/>
-          </a:prstGeom>
-          <a:noFill/>
-          <a:ln/>
-        </p:spPr>
-        <p:txBody>
-          <a:bodyPr wrap="square" lIns="0" tIns="0" rIns="0" bIns="0" rtlCol="0" anchor="ctr"/>
-          <a:lstStyle/>
-          <a:p>
-            <a:pPr indent="0" marL="0">
-              <a:lnSpc>
-                <a:spcPts val="1200"/>
-              </a:lnSpc>
-              <a:buNone/>
-            </a:pPr>
-            <a:r>
-              <a:rPr lang="en-US" sz="1000" dirty="0">
-                <a:solidFill>
-                  <a:srgbClr val="3D3D3D"/>
-                </a:solidFill>
-                <a:latin typeface="Spoqa Han Sans Neo" pitchFamily="34" charset="0"/>
-                <a:ea typeface="Spoqa Han Sans Neo" pitchFamily="34" charset="-122"/>
-                <a:cs typeface="Spoqa Han Sans Neo" pitchFamily="34" charset="-120"/>
-              </a:rPr>
-              <a:t>7월 동결 (예금금리)</a:t>
-            </a:r>
-            <a:endParaRPr lang="en-US" sz="1000" dirty="0"/>
-          </a:p>
-          <a:p>
-            <a:pPr indent="0" marL="0">
-              <a:lnSpc>
-                <a:spcPts val="1200"/>
-              </a:lnSpc>
-              <a:buNone/>
-            </a:pPr>
-            <a:r>
-              <a:rPr lang="en-US" sz="1000" dirty="0">
-                <a:solidFill>
-                  <a:srgbClr val="3D3D3D"/>
-                </a:solidFill>
-                <a:latin typeface="Spoqa Han Sans Neo" pitchFamily="34" charset="0"/>
-                <a:ea typeface="Spoqa Han Sans Neo" pitchFamily="34" charset="-122"/>
-                <a:cs typeface="Spoqa Han Sans Neo" pitchFamily="34" charset="-120"/>
-              </a:rPr>
-              <a:t>에너지 불확실성 관망</a:t>
-            </a:r>
-            <a:endParaRPr lang="en-US" sz="1000" dirty="0"/>
-          </a:p>
-        </p:txBody>
-      </p:sp>
-      <p:sp>
-        <p:nvSpPr>
-          <p:cNvPr id="23" name="Shape 21"/>
-          <p:cNvSpPr/>
-          <p:nvPr/>
-        </p:nvSpPr>
-        <p:spPr>
-          <a:xfrm>
-            <a:off x="8979408" y="1783080"/>
-            <a:ext cx="2697480" cy="2148840"/>
+              <a:rPr lang="en-US" sz="1400" b="1" dirty="0">
+                <a:solidFill>
+                  <a:srgbClr val="0086B8"/>
+                </a:solidFill>
+                <a:latin typeface="Spoqa Han Sans Neo" pitchFamily="34" charset="0"/>
+                <a:ea typeface="Spoqa Han Sans Neo" pitchFamily="34" charset="-122"/>
+                <a:cs typeface="Spoqa Han Sans Neo" pitchFamily="34" charset="-120"/>
+              </a:rPr>
+              <a:t>=</a:t>
+            </a:r>
+            <a:endParaRPr lang="en-US" sz="1400" dirty="0"/>
+          </a:p>
+        </p:txBody>
+      </p:sp>
+      <p:sp>
+        <p:nvSpPr>
+          <p:cNvPr id="23" name="Shape 20"/>
+          <p:cNvSpPr/>
+          <p:nvPr/>
+        </p:nvSpPr>
+        <p:spPr>
+          <a:xfrm>
+            <a:off x="7498080" y="4389120"/>
+            <a:ext cx="4187952" cy="658368"/>
           </a:xfrm>
           <a:prstGeom prst="roundRect">
             <a:avLst>
-              <a:gd name="adj" fmla="val 2553"/>
+              <a:gd name="adj" fmla="val 6944"/>
             </a:avLst>
           </a:prstGeom>
           <a:solidFill>
             <a:srgbClr val="F7F8FA"/>
           </a:solidFill>
-          <a:ln w="12700">
+          <a:ln w="9525">
             <a:solidFill>
               <a:srgbClr val="CDCECB"/>
             </a:solidFill>
@@ -11491,97 +12050,17 @@
       </p:sp>
       <p:sp>
         <p:nvSpPr>
-          <p:cNvPr id="24" name="Text 22"/>
-          <p:cNvSpPr/>
-          <p:nvPr/>
-        </p:nvSpPr>
-        <p:spPr>
-          <a:xfrm>
-            <a:off x="9180576" y="1938528"/>
-            <a:ext cx="2331720" cy="502920"/>
-          </a:xfrm>
-          <a:prstGeom prst="rect">
-            <a:avLst/>
-          </a:prstGeom>
-          <a:noFill/>
-          <a:ln/>
-        </p:spPr>
-        <p:txBody>
-          <a:bodyPr wrap="square" lIns="0" tIns="0" rIns="0" bIns="0" rtlCol="0" anchor="ctr"/>
-          <a:lstStyle/>
-          <a:p>
-            <a:pPr indent="0" marL="0">
-              <a:buNone/>
-            </a:pPr>
-            <a:r>
-              <a:rPr lang="en-US" sz="1250" b="1" dirty="0">
-                <a:solidFill>
-                  <a:srgbClr val="6C6C6C"/>
-                </a:solidFill>
-                <a:latin typeface="Spoqa Han Sans Neo" pitchFamily="34" charset="0"/>
-                <a:ea typeface="Spoqa Han Sans Neo" pitchFamily="34" charset="-122"/>
-                <a:cs typeface="Spoqa Han Sans Neo" pitchFamily="34" charset="-120"/>
-              </a:rPr>
-              <a:t>일본 (BOJ)</a:t>
-            </a:r>
-            <a:endParaRPr lang="en-US" sz="1250" dirty="0"/>
-          </a:p>
-        </p:txBody>
-      </p:sp>
-      <p:sp>
-        <p:nvSpPr>
-          <p:cNvPr id="25" name="Text 23"/>
-          <p:cNvSpPr/>
-          <p:nvPr/>
-        </p:nvSpPr>
-        <p:spPr>
-          <a:xfrm>
-            <a:off x="9162288" y="2395728"/>
-            <a:ext cx="2377440" cy="640080"/>
-          </a:xfrm>
-          <a:prstGeom prst="rect">
-            <a:avLst/>
-          </a:prstGeom>
-          <a:noFill/>
-          <a:ln/>
-        </p:spPr>
-        <p:txBody>
-          <a:bodyPr wrap="square" lIns="0" tIns="0" rIns="0" bIns="0" rtlCol="0" anchor="ctr"/>
-          <a:lstStyle/>
-          <a:p>
-            <a:pPr indent="0" marL="0">
-              <a:buNone/>
-            </a:pPr>
-            <a:r>
-              <a:rPr lang="en-US" sz="2600" b="1" dirty="0">
-                <a:solidFill>
-                  <a:srgbClr val="CB6015"/>
-                </a:solidFill>
-                <a:latin typeface="Spoqa Han Sans Neo" pitchFamily="34" charset="0"/>
-                <a:ea typeface="Spoqa Han Sans Neo" pitchFamily="34" charset="-122"/>
-                <a:cs typeface="Spoqa Han Sans Neo" pitchFamily="34" charset="-120"/>
-              </a:rPr>
-              <a:t>1.00%</a:t>
-            </a:r>
-            <a:endParaRPr lang="en-US" sz="2600" dirty="0"/>
-          </a:p>
-        </p:txBody>
-      </p:sp>
-      <p:sp>
-        <p:nvSpPr>
-          <p:cNvPr id="26" name="Shape 24"/>
-          <p:cNvSpPr/>
-          <p:nvPr/>
-        </p:nvSpPr>
-        <p:spPr>
-          <a:xfrm>
-            <a:off x="9180576" y="3063240"/>
-            <a:ext cx="1234440" cy="329184"/>
-          </a:xfrm>
-          <a:prstGeom prst="roundRect">
-            <a:avLst>
-              <a:gd name="adj" fmla="val 11111"/>
-            </a:avLst>
+          <p:cNvPr id="24" name="Shape 21"/>
+          <p:cNvSpPr/>
+          <p:nvPr/>
+        </p:nvSpPr>
+        <p:spPr>
+          <a:xfrm>
+            <a:off x="7680960" y="4590288"/>
+            <a:ext cx="146304" cy="256032"/>
+          </a:xfrm>
+          <a:prstGeom prst="rect">
+            <a:avLst/>
           </a:prstGeom>
           <a:solidFill>
             <a:srgbClr val="CB6015"/>
@@ -11591,14 +12070,92 @@
       </p:sp>
       <p:sp>
         <p:nvSpPr>
-          <p:cNvPr id="27" name="Text 25"/>
-          <p:cNvSpPr/>
-          <p:nvPr/>
-        </p:nvSpPr>
-        <p:spPr>
-          <a:xfrm>
-            <a:off x="9180576" y="3063240"/>
-            <a:ext cx="1234440" cy="329184"/>
+          <p:cNvPr id="25" name="Text 22"/>
+          <p:cNvSpPr/>
+          <p:nvPr/>
+        </p:nvSpPr>
+        <p:spPr>
+          <a:xfrm>
+            <a:off x="7973568" y="4389120"/>
+            <a:ext cx="1645920" cy="658368"/>
+          </a:xfrm>
+          <a:prstGeom prst="rect">
+            <a:avLst/>
+          </a:prstGeom>
+          <a:noFill/>
+          <a:ln/>
+        </p:spPr>
+        <p:txBody>
+          <a:bodyPr wrap="square" lIns="0" tIns="0" rIns="0" bIns="0" rtlCol="0" anchor="ctr"/>
+          <a:lstStyle/>
+          <a:p>
+            <a:pPr indent="0" marL="0">
+              <a:buNone/>
+            </a:pPr>
+            <a:r>
+              <a:rPr lang="en-US" sz="1300" b="1" dirty="0">
+                <a:solidFill>
+                  <a:srgbClr val="1A1A1A"/>
+                </a:solidFill>
+                <a:latin typeface="Spoqa Han Sans Neo" pitchFamily="34" charset="0"/>
+                <a:ea typeface="Spoqa Han Sans Neo" pitchFamily="34" charset="-122"/>
+                <a:cs typeface="Spoqa Han Sans Neo" pitchFamily="34" charset="-120"/>
+              </a:rPr>
+              <a:t>일본 BOJ</a:t>
+            </a:r>
+            <a:endParaRPr lang="en-US" sz="1300" dirty="0"/>
+          </a:p>
+        </p:txBody>
+      </p:sp>
+      <p:sp>
+        <p:nvSpPr>
+          <p:cNvPr id="26" name="Text 23"/>
+          <p:cNvSpPr/>
+          <p:nvPr/>
+        </p:nvSpPr>
+        <p:spPr>
+          <a:xfrm>
+            <a:off x="9646920" y="4389120"/>
+            <a:ext cx="1417320" cy="658368"/>
+          </a:xfrm>
+          <a:prstGeom prst="rect">
+            <a:avLst/>
+          </a:prstGeom>
+          <a:noFill/>
+          <a:ln/>
+        </p:spPr>
+        <p:txBody>
+          <a:bodyPr wrap="square" lIns="0" tIns="0" rIns="0" bIns="0" rtlCol="0" anchor="ctr"/>
+          <a:lstStyle/>
+          <a:p>
+            <a:pPr algn="r" indent="0" marL="0">
+              <a:buNone/>
+            </a:pPr>
+            <a:r>
+              <a:rPr lang="en-US" sz="1700" b="1" dirty="0">
+                <a:solidFill>
+                  <a:srgbClr val="CB6015"/>
+                </a:solidFill>
+                <a:latin typeface="Spoqa Han Sans Neo" pitchFamily="34" charset="0"/>
+                <a:ea typeface="Spoqa Han Sans Neo" pitchFamily="34" charset="-122"/>
+                <a:cs typeface="Spoqa Han Sans Neo" pitchFamily="34" charset="-120"/>
+              </a:rPr>
+              <a:t>1.00%</a:t>
+            </a:r>
+            <a:endParaRPr lang="en-US" sz="1700" dirty="0"/>
+          </a:p>
+        </p:txBody>
+      </p:sp>
+      <p:sp>
+        <p:nvSpPr>
+          <p:cNvPr id="27" name="Text 24"/>
+          <p:cNvSpPr/>
+          <p:nvPr/>
+        </p:nvSpPr>
+        <p:spPr>
+          <a:xfrm>
+            <a:off x="11155680" y="4389120"/>
+            <a:ext cx="411480" cy="658368"/>
           </a:xfrm>
           <a:prstGeom prst="rect">
             <a:avLst/>
@@ -11614,204 +12171,34 @@
               <a:buNone/>
             </a:pPr>
             <a:r>
-              <a:rPr lang="en-US" sz="1100" b="1" dirty="0">
-                <a:solidFill>
-                  <a:srgbClr val="FFFFFF"/>
-                </a:solidFill>
-                <a:latin typeface="Spoqa Han Sans Neo" pitchFamily="34" charset="0"/>
-                <a:ea typeface="Spoqa Han Sans Neo" pitchFamily="34" charset="-122"/>
-                <a:cs typeface="Spoqa Han Sans Neo" pitchFamily="34" charset="-120"/>
-              </a:rPr>
-              <a:t>▲ 인상</a:t>
-            </a:r>
-            <a:endParaRPr lang="en-US" sz="1100" dirty="0"/>
-          </a:p>
-        </p:txBody>
-      </p:sp>
-      <p:sp>
-        <p:nvSpPr>
-          <p:cNvPr id="28" name="Text 26"/>
-          <p:cNvSpPr/>
-          <p:nvPr/>
-        </p:nvSpPr>
-        <p:spPr>
-          <a:xfrm>
-            <a:off x="9180576" y="3456432"/>
-            <a:ext cx="2331720" cy="457200"/>
-          </a:xfrm>
-          <a:prstGeom prst="rect">
-            <a:avLst/>
-          </a:prstGeom>
-          <a:noFill/>
-          <a:ln/>
-        </p:spPr>
-        <p:txBody>
-          <a:bodyPr wrap="square" lIns="0" tIns="0" rIns="0" bIns="0" rtlCol="0" anchor="ctr"/>
-          <a:lstStyle/>
-          <a:p>
-            <a:pPr indent="0" marL="0">
-              <a:lnSpc>
-                <a:spcPts val="1200"/>
-              </a:lnSpc>
-              <a:buNone/>
-            </a:pPr>
-            <a:r>
-              <a:rPr lang="en-US" sz="1000" dirty="0">
-                <a:solidFill>
-                  <a:srgbClr val="3D3D3D"/>
-                </a:solidFill>
-                <a:latin typeface="Spoqa Han Sans Neo" pitchFamily="34" charset="0"/>
-                <a:ea typeface="Spoqa Han Sans Neo" pitchFamily="34" charset="-122"/>
-                <a:cs typeface="Spoqa Han Sans Neo" pitchFamily="34" charset="-120"/>
-              </a:rPr>
-              <a:t>6월 인상 (0.75→1.0)</a:t>
-            </a:r>
-            <a:endParaRPr lang="en-US" sz="1000" dirty="0"/>
-          </a:p>
-          <a:p>
-            <a:pPr indent="0" marL="0">
-              <a:lnSpc>
-                <a:spcPts val="1200"/>
-              </a:lnSpc>
-              <a:buNone/>
-            </a:pPr>
-            <a:r>
-              <a:rPr lang="en-US" sz="1000" dirty="0">
-                <a:solidFill>
-                  <a:srgbClr val="3D3D3D"/>
-                </a:solidFill>
-                <a:latin typeface="Spoqa Han Sans Neo" pitchFamily="34" charset="0"/>
-                <a:ea typeface="Spoqa Han Sans Neo" pitchFamily="34" charset="-122"/>
-                <a:cs typeface="Spoqa Han Sans Neo" pitchFamily="34" charset="-120"/>
-              </a:rPr>
-              <a:t>1995년 이후 최고</a:t>
-            </a:r>
-            <a:endParaRPr lang="en-US" sz="1000" dirty="0"/>
-          </a:p>
-        </p:txBody>
-      </p:sp>
-      <p:sp>
-        <p:nvSpPr>
-          <p:cNvPr id="29" name="Shape 27"/>
-          <p:cNvSpPr/>
-          <p:nvPr/>
-        </p:nvSpPr>
-        <p:spPr>
-          <a:xfrm>
-            <a:off x="502920" y="4114800"/>
-            <a:ext cx="5486400" cy="1737360"/>
+              <a:rPr lang="en-US" sz="1400" b="1" dirty="0">
+                <a:solidFill>
+                  <a:srgbClr val="CB6015"/>
+                </a:solidFill>
+                <a:latin typeface="Spoqa Han Sans Neo" pitchFamily="34" charset="0"/>
+                <a:ea typeface="Spoqa Han Sans Neo" pitchFamily="34" charset="-122"/>
+                <a:cs typeface="Spoqa Han Sans Neo" pitchFamily="34" charset="-120"/>
+              </a:rPr>
+              <a:t>▲</a:t>
+            </a:r>
+            <a:endParaRPr lang="en-US" sz="1400" dirty="0"/>
+          </a:p>
+        </p:txBody>
+      </p:sp>
+      <p:sp>
+        <p:nvSpPr>
+          <p:cNvPr id="28" name="Shape 25"/>
+          <p:cNvSpPr/>
+          <p:nvPr/>
+        </p:nvSpPr>
+        <p:spPr>
+          <a:xfrm>
+            <a:off x="7498080" y="5138928"/>
+            <a:ext cx="4187952" cy="868680"/>
           </a:xfrm>
           <a:prstGeom prst="roundRect">
             <a:avLst>
-              <a:gd name="adj" fmla="val 3158"/>
-            </a:avLst>
-          </a:prstGeom>
-          <a:solidFill>
-            <a:srgbClr val="FFFFFF"/>
-          </a:solidFill>
-          <a:ln w="12700">
-            <a:solidFill>
-              <a:srgbClr val="CDCECB"/>
-            </a:solidFill>
-            <a:prstDash val="solid"/>
-          </a:ln>
-        </p:spPr>
-      </p:sp>
-      <p:sp>
-        <p:nvSpPr>
-          <p:cNvPr id="30" name="Text 28"/>
-          <p:cNvSpPr/>
-          <p:nvPr/>
-        </p:nvSpPr>
-        <p:spPr>
-          <a:xfrm>
-            <a:off x="731520" y="4251960"/>
-            <a:ext cx="5029200" cy="320040"/>
-          </a:xfrm>
-          <a:prstGeom prst="rect">
-            <a:avLst/>
-          </a:prstGeom>
-          <a:noFill/>
-          <a:ln/>
-        </p:spPr>
-        <p:txBody>
-          <a:bodyPr wrap="square" lIns="0" tIns="0" rIns="0" bIns="0" rtlCol="0" anchor="ctr"/>
-          <a:lstStyle/>
-          <a:p>
-            <a:pPr indent="0" marL="0">
-              <a:buNone/>
-            </a:pPr>
-            <a:r>
-              <a:rPr lang="en-US" sz="1400" b="1" dirty="0">
-                <a:solidFill>
-                  <a:srgbClr val="043B72"/>
-                </a:solidFill>
-                <a:latin typeface="Spoqa Han Sans Neo" pitchFamily="34" charset="0"/>
-                <a:ea typeface="Spoqa Han Sans Neo" pitchFamily="34" charset="-122"/>
-                <a:cs typeface="Spoqa Han Sans Neo" pitchFamily="34" charset="-120"/>
-              </a:rPr>
-              <a:t>반도체엔 왜 중요한가 (쉽게)</a:t>
-            </a:r>
-            <a:endParaRPr lang="en-US" sz="1400" dirty="0"/>
-          </a:p>
-        </p:txBody>
-      </p:sp>
-      <p:sp>
-        <p:nvSpPr>
-          <p:cNvPr id="31" name="Text 29"/>
-          <p:cNvSpPr/>
-          <p:nvPr/>
-        </p:nvSpPr>
-        <p:spPr>
-          <a:xfrm>
-            <a:off x="731520" y="4617720"/>
-            <a:ext cx="5029200" cy="1143000"/>
-          </a:xfrm>
-          <a:prstGeom prst="rect">
-            <a:avLst/>
-          </a:prstGeom>
-          <a:noFill/>
-          <a:ln/>
-        </p:spPr>
-        <p:txBody>
-          <a:bodyPr wrap="square" lIns="0" tIns="0" rIns="0" bIns="0" rtlCol="0" anchor="ctr"/>
-          <a:lstStyle/>
-          <a:p>
-            <a:pPr indent="0" marL="0">
-              <a:lnSpc>
-                <a:spcPts val="1800"/>
-              </a:lnSpc>
-              <a:buNone/>
-            </a:pPr>
-            <a:r>
-              <a:rPr lang="en-US" sz="1300" dirty="0">
-                <a:solidFill>
-                  <a:srgbClr val="3D3D3D"/>
-                </a:solidFill>
-                <a:latin typeface="Spoqa Han Sans Neo" pitchFamily="34" charset="0"/>
-                <a:ea typeface="Spoqa Han Sans Neo" pitchFamily="34" charset="-122"/>
-                <a:cs typeface="Spoqa Han Sans Neo" pitchFamily="34" charset="-120"/>
-              </a:rPr>
-              <a:t>금리가 오르면, 먼 미래의 이익을 현재 가치로 계산할 때 더 많이 깎입니다(할인율↑). → 성장주인 반도체엔 '역풍'.</a:t>
-            </a:r>
-            <a:endParaRPr lang="en-US" sz="1300" dirty="0"/>
-          </a:p>
-        </p:txBody>
-      </p:sp>
-      <p:sp>
-        <p:nvSpPr>
-          <p:cNvPr id="32" name="Shape 30"/>
-          <p:cNvSpPr/>
-          <p:nvPr/>
-        </p:nvSpPr>
-        <p:spPr>
-          <a:xfrm>
-            <a:off x="6199632" y="4114800"/>
-            <a:ext cx="5486400" cy="1737360"/>
-          </a:xfrm>
-          <a:prstGeom prst="roundRect">
-            <a:avLst>
-              <a:gd name="adj" fmla="val 3158"/>
+              <a:gd name="adj" fmla="val 5263"/>
             </a:avLst>
           </a:prstGeom>
           <a:solidFill>
@@ -11819,7 +12206,7 @@
               <a:alpha val="10000"/>
             </a:srgbClr>
           </a:solidFill>
-          <a:ln w="15875">
+          <a:ln w="12700">
             <a:solidFill>
               <a:srgbClr val="F58220"/>
             </a:solidFill>
@@ -11829,30 +12216,30 @@
       </p:sp>
       <p:sp>
         <p:nvSpPr>
-          <p:cNvPr id="33" name="Text 31"/>
-          <p:cNvSpPr/>
-          <p:nvPr/>
-        </p:nvSpPr>
-        <p:spPr>
-          <a:xfrm>
-            <a:off x="6428232" y="4251960"/>
-            <a:ext cx="5029200" cy="320040"/>
-          </a:xfrm>
-          <a:prstGeom prst="rect">
-            <a:avLst/>
-          </a:prstGeom>
-          <a:noFill/>
-          <a:ln/>
-        </p:spPr>
-        <p:txBody>
-          <a:bodyPr wrap="square" lIns="0" tIns="0" rIns="0" bIns="0" rtlCol="0" anchor="ctr"/>
-          <a:lstStyle/>
-          <a:p>
-            <a:pPr indent="0" marL="0">
-              <a:buNone/>
-            </a:pPr>
-            <a:r>
-              <a:rPr lang="en-US" sz="1400" b="1" dirty="0">
+          <p:cNvPr id="29" name="Text 26"/>
+          <p:cNvSpPr/>
+          <p:nvPr/>
+        </p:nvSpPr>
+        <p:spPr>
+          <a:xfrm>
+            <a:off x="7699248" y="5230368"/>
+            <a:ext cx="3840480" cy="274320"/>
+          </a:xfrm>
+          <a:prstGeom prst="rect">
+            <a:avLst/>
+          </a:prstGeom>
+          <a:noFill/>
+          <a:ln/>
+        </p:spPr>
+        <p:txBody>
+          <a:bodyPr wrap="square" lIns="0" tIns="0" rIns="0" bIns="0" rtlCol="0" anchor="ctr"/>
+          <a:lstStyle/>
+          <a:p>
+            <a:pPr indent="0" marL="0">
+              <a:buNone/>
+            </a:pPr>
+            <a:r>
+              <a:rPr lang="en-US" sz="1150" b="1" dirty="0">
                 <a:solidFill>
                   <a:srgbClr val="CB6015"/>
                 </a:solidFill>
@@ -11860,22 +12247,22 @@
                 <a:ea typeface="Spoqa Han Sans Neo" pitchFamily="34" charset="-122"/>
                 <a:cs typeface="Spoqa Han Sans Neo" pitchFamily="34" charset="-120"/>
               </a:rPr>
-              <a:t>방향 전환: '인하 기대' 후퇴</a:t>
-            </a:r>
-            <a:endParaRPr lang="en-US" sz="1400" dirty="0"/>
-          </a:p>
-        </p:txBody>
-      </p:sp>
-      <p:sp>
-        <p:nvSpPr>
-          <p:cNvPr id="34" name="Text 32"/>
-          <p:cNvSpPr/>
-          <p:nvPr/>
-        </p:nvSpPr>
-        <p:spPr>
-          <a:xfrm>
-            <a:off x="6428232" y="4617720"/>
-            <a:ext cx="5029200" cy="1143000"/>
+              <a:t>왜 중요한가 (쉽게)</a:t>
+            </a:r>
+            <a:endParaRPr lang="en-US" sz="1150" dirty="0"/>
+          </a:p>
+        </p:txBody>
+      </p:sp>
+      <p:sp>
+        <p:nvSpPr>
+          <p:cNvPr id="30" name="Text 27"/>
+          <p:cNvSpPr/>
+          <p:nvPr/>
+        </p:nvSpPr>
+        <p:spPr>
+          <a:xfrm>
+            <a:off x="7699248" y="5486400"/>
+            <a:ext cx="3840480" cy="457200"/>
           </a:xfrm>
           <a:prstGeom prst="rect">
             <a:avLst/>
@@ -11889,12 +12276,12 @@
           <a:p>
             <a:pPr indent="0" marL="0">
               <a:lnSpc>
-                <a:spcPts val="1800"/>
+                <a:spcPts val="1300"/>
               </a:lnSpc>
               <a:buNone/>
             </a:pPr>
             <a:r>
-              <a:rPr lang="en-US" sz="1300" dirty="0">
+              <a:rPr lang="en-US" sz="1100" dirty="0">
                 <a:solidFill>
                   <a:srgbClr val="3D3D3D"/>
                 </a:solidFill>
@@ -11902,15 +12289,15 @@
                 <a:ea typeface="Spoqa Han Sans Neo" pitchFamily="34" charset="-122"/>
                 <a:cs typeface="Spoqa Han Sans Neo" pitchFamily="34" charset="-120"/>
               </a:rPr>
-              <a:t>유가·물가로 완화→긴축·동결 전환. 다만 이번엔 AI 실적이라는 '순풍'이 맞서는 구도 — 금리와 실적을 함께 볼 것.</a:t>
-            </a:r>
-            <a:endParaRPr lang="en-US" sz="1300" dirty="0"/>
-          </a:p>
-        </p:txBody>
-      </p:sp>
-      <p:sp>
-        <p:nvSpPr>
-          <p:cNvPr id="35" name="Text 33"/>
+              <a:t>금리↑ → 성장주 '할인율'↑ = 역풍.  단, AI 실적이 '순풍'.</a:t>
+            </a:r>
+            <a:endParaRPr lang="en-US" sz="1100" dirty="0"/>
+          </a:p>
+        </p:txBody>
+      </p:sp>
+      <p:sp>
+        <p:nvSpPr>
+          <p:cNvPr id="31" name="Text 28"/>
           <p:cNvSpPr/>
           <p:nvPr/>
         </p:nvSpPr>
@@ -11941,7 +12328,7 @@
                 <a:ea typeface="Spoqa Han Sans Neo" pitchFamily="34" charset="-122"/>
                 <a:cs typeface="Spoqa Han Sans Neo" pitchFamily="34" charset="-120"/>
               </a:rPr>
-              <a:t>자료: 한국은행, Fed, ECB, BOJ, KB증권 (2026.07). 정책금리·전망 기준.</a:t>
+              <a:t>자료: 한국은행, Fed, ECB, BOJ, KB증권 (2026.07). 정책금리·추정 기준.</a:t>
             </a:r>
             <a:endParaRPr lang="en-US" sz="850" dirty="0"/>
           </a:p>
@@ -11949,7 +12336,7 @@
       </p:sp>
       <p:sp>
         <p:nvSpPr>
-          <p:cNvPr id="36" name="Text 34"/>
+          <p:cNvPr id="32" name="Text 29"/>
           <p:cNvSpPr/>
           <p:nvPr/>
         </p:nvSpPr>

--- a/반도체_투자_세미나_20260727.pptx
+++ b/반도체_투자_세미나_20260727.pptx
@@ -11498,34 +11498,34 @@
         </p:nvSpPr>
         <p:spPr>
           <a:xfrm>
-            <a:off x="7498080" y="1783080"/>
-            <a:ext cx="4206240" cy="320040"/>
-          </a:xfrm>
-          <a:prstGeom prst="rect">
-            <a:avLst/>
-          </a:prstGeom>
-          <a:noFill/>
-          <a:ln/>
-        </p:spPr>
-        <p:txBody>
-          <a:bodyPr wrap="square" lIns="0" tIns="0" rIns="0" bIns="0" rtlCol="0" anchor="ctr"/>
-          <a:lstStyle/>
-          <a:p>
-            <a:pPr indent="0" marL="0">
-              <a:buNone/>
-            </a:pPr>
-            <a:r>
-              <a:rPr lang="en-US" sz="1300" b="1" dirty="0">
-                <a:solidFill>
-                  <a:srgbClr val="1A1A1A"/>
-                </a:solidFill>
-                <a:latin typeface="Spoqa Han Sans Neo" pitchFamily="34" charset="0"/>
-                <a:ea typeface="Spoqa Han Sans Neo" pitchFamily="34" charset="-122"/>
-                <a:cs typeface="Spoqa Han Sans Neo" pitchFamily="34" charset="-120"/>
-              </a:rPr>
-              <a:t>현재 정책금리 (2026.7)</a:t>
-            </a:r>
-            <a:endParaRPr lang="en-US" sz="1300" dirty="0"/>
+            <a:off x="7498080" y="1719072"/>
+            <a:ext cx="4206240" cy="292608"/>
+          </a:xfrm>
+          <a:prstGeom prst="rect">
+            <a:avLst/>
+          </a:prstGeom>
+          <a:noFill/>
+          <a:ln/>
+        </p:spPr>
+        <p:txBody>
+          <a:bodyPr wrap="square" lIns="0" tIns="0" rIns="0" bIns="0" rtlCol="0" anchor="ctr"/>
+          <a:lstStyle/>
+          <a:p>
+            <a:pPr indent="0" marL="0">
+              <a:buNone/>
+            </a:pPr>
+            <a:r>
+              <a:rPr lang="en-US" sz="1200" b="1" dirty="0">
+                <a:solidFill>
+                  <a:srgbClr val="6C6C6C"/>
+                </a:solidFill>
+                <a:latin typeface="Spoqa Han Sans Neo" pitchFamily="34" charset="0"/>
+                <a:ea typeface="Spoqa Han Sans Neo" pitchFamily="34" charset="-122"/>
+                <a:cs typeface="Spoqa Han Sans Neo" pitchFamily="34" charset="-120"/>
+              </a:rPr>
+              <a:t>정책금리 (2026.7)</a:t>
+            </a:r>
+            <a:endParaRPr lang="en-US" sz="1200" dirty="0"/>
           </a:p>
         </p:txBody>
       </p:sp>
@@ -11537,12 +11537,12 @@
         </p:nvSpPr>
         <p:spPr>
           <a:xfrm>
-            <a:off x="7498080" y="2194560"/>
-            <a:ext cx="4187952" cy="658368"/>
+            <a:off x="7498080" y="2029968"/>
+            <a:ext cx="4187952" cy="438912"/>
           </a:xfrm>
           <a:prstGeom prst="roundRect">
             <a:avLst>
-              <a:gd name="adj" fmla="val 6944"/>
+              <a:gd name="adj" fmla="val 8333"/>
             </a:avLst>
           </a:prstGeom>
           <a:solidFill>
@@ -11564,8 +11564,8 @@
         </p:nvSpPr>
         <p:spPr>
           <a:xfrm>
-            <a:off x="7680960" y="2395728"/>
-            <a:ext cx="146304" cy="256032"/>
+            <a:off x="7662672" y="2157984"/>
+            <a:ext cx="128016" cy="182880"/>
           </a:xfrm>
           <a:prstGeom prst="rect">
             <a:avLst/>
@@ -11584,24 +11584,24 @@
         </p:nvSpPr>
         <p:spPr>
           <a:xfrm>
-            <a:off x="7973568" y="2194560"/>
-            <a:ext cx="1645920" cy="658368"/>
-          </a:xfrm>
-          <a:prstGeom prst="rect">
-            <a:avLst/>
-          </a:prstGeom>
-          <a:noFill/>
-          <a:ln/>
-        </p:spPr>
-        <p:txBody>
-          <a:bodyPr wrap="square" lIns="0" tIns="0" rIns="0" bIns="0" rtlCol="0" anchor="ctr"/>
-          <a:lstStyle/>
-          <a:p>
-            <a:pPr indent="0" marL="0">
-              <a:buNone/>
-            </a:pPr>
-            <a:r>
-              <a:rPr lang="en-US" sz="1300" b="1" dirty="0">
+            <a:off x="7918704" y="2029968"/>
+            <a:ext cx="1737360" cy="438912"/>
+          </a:xfrm>
+          <a:prstGeom prst="rect">
+            <a:avLst/>
+          </a:prstGeom>
+          <a:noFill/>
+          <a:ln/>
+        </p:spPr>
+        <p:txBody>
+          <a:bodyPr wrap="square" lIns="0" tIns="0" rIns="0" bIns="0" rtlCol="0" anchor="ctr"/>
+          <a:lstStyle/>
+          <a:p>
+            <a:pPr indent="0" marL="0">
+              <a:buNone/>
+            </a:pPr>
+            <a:r>
+              <a:rPr lang="en-US" sz="1200" b="1" dirty="0">
                 <a:solidFill>
                   <a:srgbClr val="1A1A1A"/>
                 </a:solidFill>
@@ -11611,7 +11611,7 @@
               </a:rPr>
               <a:t>한국 BOK</a:t>
             </a:r>
-            <a:endParaRPr lang="en-US" sz="1300" dirty="0"/>
+            <a:endParaRPr lang="en-US" sz="1200" dirty="0"/>
           </a:p>
         </p:txBody>
       </p:sp>
@@ -11623,8 +11623,8 @@
         </p:nvSpPr>
         <p:spPr>
           <a:xfrm>
-            <a:off x="9646920" y="2194560"/>
-            <a:ext cx="1417320" cy="658368"/>
+            <a:off x="9692640" y="2029968"/>
+            <a:ext cx="1371600" cy="438912"/>
           </a:xfrm>
           <a:prstGeom prst="rect">
             <a:avLst/>
@@ -11640,7 +11640,7 @@
               <a:buNone/>
             </a:pPr>
             <a:r>
-              <a:rPr lang="en-US" sz="1700" b="1" dirty="0">
+              <a:rPr lang="en-US" sz="1500" b="1" dirty="0">
                 <a:solidFill>
                   <a:srgbClr val="F58220"/>
                 </a:solidFill>
@@ -11650,7 +11650,7 @@
               </a:rPr>
               <a:t>2.75%</a:t>
             </a:r>
-            <a:endParaRPr lang="en-US" sz="1700" dirty="0"/>
+            <a:endParaRPr lang="en-US" sz="1500" dirty="0"/>
           </a:p>
         </p:txBody>
       </p:sp>
@@ -11662,8 +11662,8 @@
         </p:nvSpPr>
         <p:spPr>
           <a:xfrm>
-            <a:off x="11155680" y="2194560"/>
-            <a:ext cx="411480" cy="658368"/>
+            <a:off x="11201400" y="2029968"/>
+            <a:ext cx="365760" cy="438912"/>
           </a:xfrm>
           <a:prstGeom prst="rect">
             <a:avLst/>
@@ -11679,7 +11679,7 @@
               <a:buNone/>
             </a:pPr>
             <a:r>
-              <a:rPr lang="en-US" sz="1400" b="1" dirty="0">
+              <a:rPr lang="en-US" sz="1200" b="1" dirty="0">
                 <a:solidFill>
                   <a:srgbClr val="F58220"/>
                 </a:solidFill>
@@ -11689,7 +11689,7 @@
               </a:rPr>
               <a:t>▲</a:t>
             </a:r>
-            <a:endParaRPr lang="en-US" sz="1400" dirty="0"/>
+            <a:endParaRPr lang="en-US" sz="1200" dirty="0"/>
           </a:p>
         </p:txBody>
       </p:sp>
@@ -11701,12 +11701,12 @@
         </p:nvSpPr>
         <p:spPr>
           <a:xfrm>
-            <a:off x="7498080" y="2926080"/>
-            <a:ext cx="4187952" cy="658368"/>
+            <a:off x="7498080" y="2532888"/>
+            <a:ext cx="4187952" cy="438912"/>
           </a:xfrm>
           <a:prstGeom prst="roundRect">
             <a:avLst>
-              <a:gd name="adj" fmla="val 6944"/>
+              <a:gd name="adj" fmla="val 8333"/>
             </a:avLst>
           </a:prstGeom>
           <a:solidFill>
@@ -11728,8 +11728,8 @@
         </p:nvSpPr>
         <p:spPr>
           <a:xfrm>
-            <a:off x="7680960" y="3127248"/>
-            <a:ext cx="146304" cy="256032"/>
+            <a:off x="7662672" y="2660904"/>
+            <a:ext cx="128016" cy="182880"/>
           </a:xfrm>
           <a:prstGeom prst="rect">
             <a:avLst/>
@@ -11748,24 +11748,24 @@
         </p:nvSpPr>
         <p:spPr>
           <a:xfrm>
-            <a:off x="7973568" y="2926080"/>
-            <a:ext cx="1645920" cy="658368"/>
-          </a:xfrm>
-          <a:prstGeom prst="rect">
-            <a:avLst/>
-          </a:prstGeom>
-          <a:noFill/>
-          <a:ln/>
-        </p:spPr>
-        <p:txBody>
-          <a:bodyPr wrap="square" lIns="0" tIns="0" rIns="0" bIns="0" rtlCol="0" anchor="ctr"/>
-          <a:lstStyle/>
-          <a:p>
-            <a:pPr indent="0" marL="0">
-              <a:buNone/>
-            </a:pPr>
-            <a:r>
-              <a:rPr lang="en-US" sz="1300" b="1" dirty="0">
+            <a:off x="7918704" y="2532888"/>
+            <a:ext cx="1737360" cy="438912"/>
+          </a:xfrm>
+          <a:prstGeom prst="rect">
+            <a:avLst/>
+          </a:prstGeom>
+          <a:noFill/>
+          <a:ln/>
+        </p:spPr>
+        <p:txBody>
+          <a:bodyPr wrap="square" lIns="0" tIns="0" rIns="0" bIns="0" rtlCol="0" anchor="ctr"/>
+          <a:lstStyle/>
+          <a:p>
+            <a:pPr indent="0" marL="0">
+              <a:buNone/>
+            </a:pPr>
+            <a:r>
+              <a:rPr lang="en-US" sz="1200" b="1" dirty="0">
                 <a:solidFill>
                   <a:srgbClr val="1A1A1A"/>
                 </a:solidFill>
@@ -11775,7 +11775,7 @@
               </a:rPr>
               <a:t>미국 Fed</a:t>
             </a:r>
-            <a:endParaRPr lang="en-US" sz="1300" dirty="0"/>
+            <a:endParaRPr lang="en-US" sz="1200" dirty="0"/>
           </a:p>
         </p:txBody>
       </p:sp>
@@ -11787,8 +11787,8 @@
         </p:nvSpPr>
         <p:spPr>
           <a:xfrm>
-            <a:off x="9646920" y="2926080"/>
-            <a:ext cx="1417320" cy="658368"/>
+            <a:off x="9692640" y="2532888"/>
+            <a:ext cx="1371600" cy="438912"/>
           </a:xfrm>
           <a:prstGeom prst="rect">
             <a:avLst/>
@@ -11804,7 +11804,7 @@
               <a:buNone/>
             </a:pPr>
             <a:r>
-              <a:rPr lang="en-US" sz="1700" b="1" dirty="0">
+              <a:rPr lang="en-US" sz="1500" b="1" dirty="0">
                 <a:solidFill>
                   <a:srgbClr val="043B72"/>
                 </a:solidFill>
@@ -11814,7 +11814,7 @@
               </a:rPr>
               <a:t>3.63%</a:t>
             </a:r>
-            <a:endParaRPr lang="en-US" sz="1700" dirty="0"/>
+            <a:endParaRPr lang="en-US" sz="1500" dirty="0"/>
           </a:p>
         </p:txBody>
       </p:sp>
@@ -11826,8 +11826,8 @@
         </p:nvSpPr>
         <p:spPr>
           <a:xfrm>
-            <a:off x="11155680" y="2926080"/>
-            <a:ext cx="411480" cy="658368"/>
+            <a:off x="11201400" y="2532888"/>
+            <a:ext cx="365760" cy="438912"/>
           </a:xfrm>
           <a:prstGeom prst="rect">
             <a:avLst/>
@@ -11843,7 +11843,7 @@
               <a:buNone/>
             </a:pPr>
             <a:r>
-              <a:rPr lang="en-US" sz="1400" b="1" dirty="0">
+              <a:rPr lang="en-US" sz="1200" b="1" dirty="0">
                 <a:solidFill>
                   <a:srgbClr val="043B72"/>
                 </a:solidFill>
@@ -11853,7 +11853,7 @@
               </a:rPr>
               <a:t>=</a:t>
             </a:r>
-            <a:endParaRPr lang="en-US" sz="1400" dirty="0"/>
+            <a:endParaRPr lang="en-US" sz="1200" dirty="0"/>
           </a:p>
         </p:txBody>
       </p:sp>
@@ -11865,12 +11865,12 @@
         </p:nvSpPr>
         <p:spPr>
           <a:xfrm>
-            <a:off x="7498080" y="3657600"/>
-            <a:ext cx="4187952" cy="658368"/>
+            <a:off x="7498080" y="3035808"/>
+            <a:ext cx="4187952" cy="438912"/>
           </a:xfrm>
           <a:prstGeom prst="roundRect">
             <a:avLst>
-              <a:gd name="adj" fmla="val 6944"/>
+              <a:gd name="adj" fmla="val 8333"/>
             </a:avLst>
           </a:prstGeom>
           <a:solidFill>
@@ -11892,8 +11892,8 @@
         </p:nvSpPr>
         <p:spPr>
           <a:xfrm>
-            <a:off x="7680960" y="3858768"/>
-            <a:ext cx="146304" cy="256032"/>
+            <a:off x="7662672" y="3163824"/>
+            <a:ext cx="128016" cy="182880"/>
           </a:xfrm>
           <a:prstGeom prst="rect">
             <a:avLst/>
@@ -11912,24 +11912,24 @@
         </p:nvSpPr>
         <p:spPr>
           <a:xfrm>
-            <a:off x="7973568" y="3657600"/>
-            <a:ext cx="1645920" cy="658368"/>
-          </a:xfrm>
-          <a:prstGeom prst="rect">
-            <a:avLst/>
-          </a:prstGeom>
-          <a:noFill/>
-          <a:ln/>
-        </p:spPr>
-        <p:txBody>
-          <a:bodyPr wrap="square" lIns="0" tIns="0" rIns="0" bIns="0" rtlCol="0" anchor="ctr"/>
-          <a:lstStyle/>
-          <a:p>
-            <a:pPr indent="0" marL="0">
-              <a:buNone/>
-            </a:pPr>
-            <a:r>
-              <a:rPr lang="en-US" sz="1300" b="1" dirty="0">
+            <a:off x="7918704" y="3035808"/>
+            <a:ext cx="1737360" cy="438912"/>
+          </a:xfrm>
+          <a:prstGeom prst="rect">
+            <a:avLst/>
+          </a:prstGeom>
+          <a:noFill/>
+          <a:ln/>
+        </p:spPr>
+        <p:txBody>
+          <a:bodyPr wrap="square" lIns="0" tIns="0" rIns="0" bIns="0" rtlCol="0" anchor="ctr"/>
+          <a:lstStyle/>
+          <a:p>
+            <a:pPr indent="0" marL="0">
+              <a:buNone/>
+            </a:pPr>
+            <a:r>
+              <a:rPr lang="en-US" sz="1200" b="1" dirty="0">
                 <a:solidFill>
                   <a:srgbClr val="1A1A1A"/>
                 </a:solidFill>
@@ -11939,7 +11939,7 @@
               </a:rPr>
               <a:t>유로존 ECB</a:t>
             </a:r>
-            <a:endParaRPr lang="en-US" sz="1300" dirty="0"/>
+            <a:endParaRPr lang="en-US" sz="1200" dirty="0"/>
           </a:p>
         </p:txBody>
       </p:sp>
@@ -11951,8 +11951,8 @@
         </p:nvSpPr>
         <p:spPr>
           <a:xfrm>
-            <a:off x="9646920" y="3657600"/>
-            <a:ext cx="1417320" cy="658368"/>
+            <a:off x="9692640" y="3035808"/>
+            <a:ext cx="1371600" cy="438912"/>
           </a:xfrm>
           <a:prstGeom prst="rect">
             <a:avLst/>
@@ -11968,7 +11968,7 @@
               <a:buNone/>
             </a:pPr>
             <a:r>
-              <a:rPr lang="en-US" sz="1700" b="1" dirty="0">
+              <a:rPr lang="en-US" sz="1500" b="1" dirty="0">
                 <a:solidFill>
                   <a:srgbClr val="0086B8"/>
                 </a:solidFill>
@@ -11978,7 +11978,7 @@
               </a:rPr>
               <a:t>2.25%</a:t>
             </a:r>
-            <a:endParaRPr lang="en-US" sz="1700" dirty="0"/>
+            <a:endParaRPr lang="en-US" sz="1500" dirty="0"/>
           </a:p>
         </p:txBody>
       </p:sp>
@@ -11990,8 +11990,8 @@
         </p:nvSpPr>
         <p:spPr>
           <a:xfrm>
-            <a:off x="11155680" y="3657600"/>
-            <a:ext cx="411480" cy="658368"/>
+            <a:off x="11201400" y="3035808"/>
+            <a:ext cx="365760" cy="438912"/>
           </a:xfrm>
           <a:prstGeom prst="rect">
             <a:avLst/>
@@ -12007,7 +12007,7 @@
               <a:buNone/>
             </a:pPr>
             <a:r>
-              <a:rPr lang="en-US" sz="1400" b="1" dirty="0">
+              <a:rPr lang="en-US" sz="1200" b="1" dirty="0">
                 <a:solidFill>
                   <a:srgbClr val="0086B8"/>
                 </a:solidFill>
@@ -12017,7 +12017,7 @@
               </a:rPr>
               <a:t>=</a:t>
             </a:r>
-            <a:endParaRPr lang="en-US" sz="1400" dirty="0"/>
+            <a:endParaRPr lang="en-US" sz="1200" dirty="0"/>
           </a:p>
         </p:txBody>
       </p:sp>
@@ -12029,12 +12029,12 @@
         </p:nvSpPr>
         <p:spPr>
           <a:xfrm>
-            <a:off x="7498080" y="4389120"/>
-            <a:ext cx="4187952" cy="658368"/>
+            <a:off x="7498080" y="3538728"/>
+            <a:ext cx="4187952" cy="438912"/>
           </a:xfrm>
           <a:prstGeom prst="roundRect">
             <a:avLst>
-              <a:gd name="adj" fmla="val 6944"/>
+              <a:gd name="adj" fmla="val 8333"/>
             </a:avLst>
           </a:prstGeom>
           <a:solidFill>
@@ -12056,8 +12056,8 @@
         </p:nvSpPr>
         <p:spPr>
           <a:xfrm>
-            <a:off x="7680960" y="4590288"/>
-            <a:ext cx="146304" cy="256032"/>
+            <a:off x="7662672" y="3666744"/>
+            <a:ext cx="128016" cy="182880"/>
           </a:xfrm>
           <a:prstGeom prst="rect">
             <a:avLst/>
@@ -12076,24 +12076,24 @@
         </p:nvSpPr>
         <p:spPr>
           <a:xfrm>
-            <a:off x="7973568" y="4389120"/>
-            <a:ext cx="1645920" cy="658368"/>
-          </a:xfrm>
-          <a:prstGeom prst="rect">
-            <a:avLst/>
-          </a:prstGeom>
-          <a:noFill/>
-          <a:ln/>
-        </p:spPr>
-        <p:txBody>
-          <a:bodyPr wrap="square" lIns="0" tIns="0" rIns="0" bIns="0" rtlCol="0" anchor="ctr"/>
-          <a:lstStyle/>
-          <a:p>
-            <a:pPr indent="0" marL="0">
-              <a:buNone/>
-            </a:pPr>
-            <a:r>
-              <a:rPr lang="en-US" sz="1300" b="1" dirty="0">
+            <a:off x="7918704" y="3538728"/>
+            <a:ext cx="1737360" cy="438912"/>
+          </a:xfrm>
+          <a:prstGeom prst="rect">
+            <a:avLst/>
+          </a:prstGeom>
+          <a:noFill/>
+          <a:ln/>
+        </p:spPr>
+        <p:txBody>
+          <a:bodyPr wrap="square" lIns="0" tIns="0" rIns="0" bIns="0" rtlCol="0" anchor="ctr"/>
+          <a:lstStyle/>
+          <a:p>
+            <a:pPr indent="0" marL="0">
+              <a:buNone/>
+            </a:pPr>
+            <a:r>
+              <a:rPr lang="en-US" sz="1200" b="1" dirty="0">
                 <a:solidFill>
                   <a:srgbClr val="1A1A1A"/>
                 </a:solidFill>
@@ -12103,7 +12103,7 @@
               </a:rPr>
               <a:t>일본 BOJ</a:t>
             </a:r>
-            <a:endParaRPr lang="en-US" sz="1300" dirty="0"/>
+            <a:endParaRPr lang="en-US" sz="1200" dirty="0"/>
           </a:p>
         </p:txBody>
       </p:sp>
@@ -12115,8 +12115,8 @@
         </p:nvSpPr>
         <p:spPr>
           <a:xfrm>
-            <a:off x="9646920" y="4389120"/>
-            <a:ext cx="1417320" cy="658368"/>
+            <a:off x="9692640" y="3538728"/>
+            <a:ext cx="1371600" cy="438912"/>
           </a:xfrm>
           <a:prstGeom prst="rect">
             <a:avLst/>
@@ -12132,7 +12132,7 @@
               <a:buNone/>
             </a:pPr>
             <a:r>
-              <a:rPr lang="en-US" sz="1700" b="1" dirty="0">
+              <a:rPr lang="en-US" sz="1500" b="1" dirty="0">
                 <a:solidFill>
                   <a:srgbClr val="CB6015"/>
                 </a:solidFill>
@@ -12142,7 +12142,7 @@
               </a:rPr>
               <a:t>1.00%</a:t>
             </a:r>
-            <a:endParaRPr lang="en-US" sz="1700" dirty="0"/>
+            <a:endParaRPr lang="en-US" sz="1500" dirty="0"/>
           </a:p>
         </p:txBody>
       </p:sp>
@@ -12154,8 +12154,8 @@
         </p:nvSpPr>
         <p:spPr>
           <a:xfrm>
-            <a:off x="11155680" y="4389120"/>
-            <a:ext cx="411480" cy="658368"/>
+            <a:off x="11201400" y="3538728"/>
+            <a:ext cx="365760" cy="438912"/>
           </a:xfrm>
           <a:prstGeom prst="rect">
             <a:avLst/>
@@ -12171,7 +12171,7 @@
               <a:buNone/>
             </a:pPr>
             <a:r>
-              <a:rPr lang="en-US" sz="1400" b="1" dirty="0">
+              <a:rPr lang="en-US" sz="1200" b="1" dirty="0">
                 <a:solidFill>
                   <a:srgbClr val="CB6015"/>
                 </a:solidFill>
@@ -12181,24 +12181,351 @@
               </a:rPr>
               <a:t>▲</a:t>
             </a:r>
-            <a:endParaRPr lang="en-US" sz="1400" dirty="0"/>
-          </a:p>
-        </p:txBody>
-      </p:sp>
-      <p:sp>
-        <p:nvSpPr>
-          <p:cNvPr id="28" name="Shape 25"/>
-          <p:cNvSpPr/>
-          <p:nvPr/>
-        </p:nvSpPr>
-        <p:spPr>
-          <a:xfrm>
-            <a:off x="7498080" y="5138928"/>
-            <a:ext cx="4187952" cy="868680"/>
+            <a:endParaRPr lang="en-US" sz="1200" dirty="0"/>
+          </a:p>
+        </p:txBody>
+      </p:sp>
+      <p:sp>
+        <p:nvSpPr>
+          <p:cNvPr id="28" name="Text 25"/>
+          <p:cNvSpPr/>
+          <p:nvPr/>
+        </p:nvSpPr>
+        <p:spPr>
+          <a:xfrm>
+            <a:off x="7498080" y="4114800"/>
+            <a:ext cx="4206240" cy="292608"/>
+          </a:xfrm>
+          <a:prstGeom prst="rect">
+            <a:avLst/>
+          </a:prstGeom>
+          <a:noFill/>
+          <a:ln/>
+        </p:spPr>
+        <p:txBody>
+          <a:bodyPr wrap="square" lIns="0" tIns="0" rIns="0" bIns="0" rtlCol="0" anchor="ctr"/>
+          <a:lstStyle/>
+          <a:p>
+            <a:pPr indent="0" marL="0">
+              <a:buNone/>
+            </a:pPr>
+            <a:r>
+              <a:rPr lang="en-US" sz="1200" b="1" dirty="0">
+                <a:solidFill>
+                  <a:srgbClr val="6C6C6C"/>
+                </a:solidFill>
+                <a:latin typeface="Spoqa Han Sans Neo" pitchFamily="34" charset="0"/>
+                <a:ea typeface="Spoqa Han Sans Neo" pitchFamily="34" charset="-122"/>
+                <a:cs typeface="Spoqa Han Sans Neo" pitchFamily="34" charset="-120"/>
+              </a:rPr>
+              <a:t>시장금리 — 국채 10년물</a:t>
+            </a:r>
+            <a:endParaRPr lang="en-US" sz="1200" dirty="0"/>
+          </a:p>
+        </p:txBody>
+      </p:sp>
+      <p:sp>
+        <p:nvSpPr>
+          <p:cNvPr id="29" name="Shape 26"/>
+          <p:cNvSpPr/>
+          <p:nvPr/>
+        </p:nvSpPr>
+        <p:spPr>
+          <a:xfrm>
+            <a:off x="7498080" y="4434840"/>
+            <a:ext cx="4187952" cy="566928"/>
           </a:xfrm>
           <a:prstGeom prst="roundRect">
             <a:avLst>
-              <a:gd name="adj" fmla="val 5263"/>
+              <a:gd name="adj" fmla="val 6452"/>
+            </a:avLst>
+          </a:prstGeom>
+          <a:solidFill>
+            <a:srgbClr val="FFFFFF"/>
+          </a:solidFill>
+          <a:ln w="12700">
+            <a:solidFill>
+              <a:srgbClr val="CDCECB"/>
+            </a:solidFill>
+            <a:prstDash val="solid"/>
+          </a:ln>
+        </p:spPr>
+      </p:sp>
+      <p:sp>
+        <p:nvSpPr>
+          <p:cNvPr id="30" name="Text 27"/>
+          <p:cNvSpPr/>
+          <p:nvPr/>
+        </p:nvSpPr>
+        <p:spPr>
+          <a:xfrm>
+            <a:off x="7680960" y="4507992"/>
+            <a:ext cx="2286000" cy="274320"/>
+          </a:xfrm>
+          <a:prstGeom prst="rect">
+            <a:avLst/>
+          </a:prstGeom>
+          <a:noFill/>
+          <a:ln/>
+        </p:spPr>
+        <p:txBody>
+          <a:bodyPr wrap="square" lIns="0" tIns="0" rIns="0" bIns="0" rtlCol="0" anchor="ctr"/>
+          <a:lstStyle/>
+          <a:p>
+            <a:pPr indent="0" marL="0">
+              <a:buNone/>
+            </a:pPr>
+            <a:r>
+              <a:rPr lang="en-US" sz="1250" b="1" dirty="0">
+                <a:solidFill>
+                  <a:srgbClr val="1A1A1A"/>
+                </a:solidFill>
+                <a:latin typeface="Spoqa Han Sans Neo" pitchFamily="34" charset="0"/>
+                <a:ea typeface="Spoqa Han Sans Neo" pitchFamily="34" charset="-122"/>
+                <a:cs typeface="Spoqa Han Sans Neo" pitchFamily="34" charset="-120"/>
+              </a:rPr>
+              <a:t>한국 국고채</a:t>
+            </a:r>
+            <a:endParaRPr lang="en-US" sz="1250" dirty="0"/>
+          </a:p>
+        </p:txBody>
+      </p:sp>
+      <p:sp>
+        <p:nvSpPr>
+          <p:cNvPr id="31" name="Text 28"/>
+          <p:cNvSpPr/>
+          <p:nvPr/>
+        </p:nvSpPr>
+        <p:spPr>
+          <a:xfrm>
+            <a:off x="7680960" y="4754880"/>
+            <a:ext cx="2286000" cy="219456"/>
+          </a:xfrm>
+          <a:prstGeom prst="rect">
+            <a:avLst/>
+          </a:prstGeom>
+          <a:noFill/>
+          <a:ln/>
+        </p:spPr>
+        <p:txBody>
+          <a:bodyPr wrap="square" lIns="0" tIns="0" rIns="0" bIns="0" rtlCol="0" anchor="ctr"/>
+          <a:lstStyle/>
+          <a:p>
+            <a:pPr indent="0" marL="0">
+              <a:buNone/>
+            </a:pPr>
+            <a:r>
+              <a:rPr lang="en-US" sz="900" dirty="0">
+                <a:solidFill>
+                  <a:srgbClr val="6C6C6C"/>
+                </a:solidFill>
+                <a:latin typeface="Spoqa Han Sans Neo" pitchFamily="34" charset="0"/>
+                <a:ea typeface="Spoqa Han Sans Neo" pitchFamily="34" charset="-122"/>
+                <a:cs typeface="Spoqa Han Sans Neo" pitchFamily="34" charset="-120"/>
+              </a:rPr>
+              <a:t>3년 3.76% · 3년來 최고</a:t>
+            </a:r>
+            <a:endParaRPr lang="en-US" sz="900" dirty="0"/>
+          </a:p>
+        </p:txBody>
+      </p:sp>
+      <p:sp>
+        <p:nvSpPr>
+          <p:cNvPr id="32" name="Text 29"/>
+          <p:cNvSpPr/>
+          <p:nvPr/>
+        </p:nvSpPr>
+        <p:spPr>
+          <a:xfrm>
+            <a:off x="9966960" y="4434840"/>
+            <a:ext cx="1554480" cy="566928"/>
+          </a:xfrm>
+          <a:prstGeom prst="rect">
+            <a:avLst/>
+          </a:prstGeom>
+          <a:noFill/>
+          <a:ln/>
+        </p:spPr>
+        <p:txBody>
+          <a:bodyPr wrap="square" lIns="0" tIns="0" rIns="0" bIns="0" rtlCol="0" anchor="ctr"/>
+          <a:lstStyle/>
+          <a:p>
+            <a:pPr algn="r" indent="0" marL="0">
+              <a:buNone/>
+            </a:pPr>
+            <a:r>
+              <a:rPr lang="en-US" sz="1800" b="1" dirty="0">
+                <a:solidFill>
+                  <a:srgbClr val="F58220"/>
+                </a:solidFill>
+                <a:latin typeface="Spoqa Han Sans Neo" pitchFamily="34" charset="0"/>
+                <a:ea typeface="Spoqa Han Sans Neo" pitchFamily="34" charset="-122"/>
+                <a:cs typeface="Spoqa Han Sans Neo" pitchFamily="34" charset="-120"/>
+              </a:rPr>
+              <a:t>4.40%</a:t>
+            </a:r>
+            <a:endParaRPr lang="en-US" sz="1800" dirty="0"/>
+          </a:p>
+        </p:txBody>
+      </p:sp>
+      <p:sp>
+        <p:nvSpPr>
+          <p:cNvPr id="33" name="Shape 30"/>
+          <p:cNvSpPr/>
+          <p:nvPr/>
+        </p:nvSpPr>
+        <p:spPr>
+          <a:xfrm>
+            <a:off x="7498080" y="5093208"/>
+            <a:ext cx="4187952" cy="566928"/>
+          </a:xfrm>
+          <a:prstGeom prst="roundRect">
+            <a:avLst>
+              <a:gd name="adj" fmla="val 6452"/>
+            </a:avLst>
+          </a:prstGeom>
+          <a:solidFill>
+            <a:srgbClr val="FFFFFF"/>
+          </a:solidFill>
+          <a:ln w="12700">
+            <a:solidFill>
+              <a:srgbClr val="CDCECB"/>
+            </a:solidFill>
+            <a:prstDash val="solid"/>
+          </a:ln>
+        </p:spPr>
+      </p:sp>
+      <p:sp>
+        <p:nvSpPr>
+          <p:cNvPr id="34" name="Text 31"/>
+          <p:cNvSpPr/>
+          <p:nvPr/>
+        </p:nvSpPr>
+        <p:spPr>
+          <a:xfrm>
+            <a:off x="7680960" y="5166360"/>
+            <a:ext cx="2286000" cy="274320"/>
+          </a:xfrm>
+          <a:prstGeom prst="rect">
+            <a:avLst/>
+          </a:prstGeom>
+          <a:noFill/>
+          <a:ln/>
+        </p:spPr>
+        <p:txBody>
+          <a:bodyPr wrap="square" lIns="0" tIns="0" rIns="0" bIns="0" rtlCol="0" anchor="ctr"/>
+          <a:lstStyle/>
+          <a:p>
+            <a:pPr indent="0" marL="0">
+              <a:buNone/>
+            </a:pPr>
+            <a:r>
+              <a:rPr lang="en-US" sz="1250" b="1" dirty="0">
+                <a:solidFill>
+                  <a:srgbClr val="1A1A1A"/>
+                </a:solidFill>
+                <a:latin typeface="Spoqa Han Sans Neo" pitchFamily="34" charset="0"/>
+                <a:ea typeface="Spoqa Han Sans Neo" pitchFamily="34" charset="-122"/>
+                <a:cs typeface="Spoqa Han Sans Neo" pitchFamily="34" charset="-120"/>
+              </a:rPr>
+              <a:t>미국 국채</a:t>
+            </a:r>
+            <a:endParaRPr lang="en-US" sz="1250" dirty="0"/>
+          </a:p>
+        </p:txBody>
+      </p:sp>
+      <p:sp>
+        <p:nvSpPr>
+          <p:cNvPr id="35" name="Text 32"/>
+          <p:cNvSpPr/>
+          <p:nvPr/>
+        </p:nvSpPr>
+        <p:spPr>
+          <a:xfrm>
+            <a:off x="7680960" y="5413248"/>
+            <a:ext cx="2286000" cy="219456"/>
+          </a:xfrm>
+          <a:prstGeom prst="rect">
+            <a:avLst/>
+          </a:prstGeom>
+          <a:noFill/>
+          <a:ln/>
+        </p:spPr>
+        <p:txBody>
+          <a:bodyPr wrap="square" lIns="0" tIns="0" rIns="0" bIns="0" rtlCol="0" anchor="ctr"/>
+          <a:lstStyle/>
+          <a:p>
+            <a:pPr indent="0" marL="0">
+              <a:buNone/>
+            </a:pPr>
+            <a:r>
+              <a:rPr lang="en-US" sz="900" dirty="0">
+                <a:solidFill>
+                  <a:srgbClr val="6C6C6C"/>
+                </a:solidFill>
+                <a:latin typeface="Spoqa Han Sans Neo" pitchFamily="34" charset="0"/>
+                <a:ea typeface="Spoqa Han Sans Neo" pitchFamily="34" charset="-122"/>
+                <a:cs typeface="Spoqa Han Sans Neo" pitchFamily="34" charset="-120"/>
+              </a:rPr>
+              <a:t>2년 4.33%</a:t>
+            </a:r>
+            <a:endParaRPr lang="en-US" sz="900" dirty="0"/>
+          </a:p>
+        </p:txBody>
+      </p:sp>
+      <p:sp>
+        <p:nvSpPr>
+          <p:cNvPr id="36" name="Text 33"/>
+          <p:cNvSpPr/>
+          <p:nvPr/>
+        </p:nvSpPr>
+        <p:spPr>
+          <a:xfrm>
+            <a:off x="9966960" y="5093208"/>
+            <a:ext cx="1554480" cy="566928"/>
+          </a:xfrm>
+          <a:prstGeom prst="rect">
+            <a:avLst/>
+          </a:prstGeom>
+          <a:noFill/>
+          <a:ln/>
+        </p:spPr>
+        <p:txBody>
+          <a:bodyPr wrap="square" lIns="0" tIns="0" rIns="0" bIns="0" rtlCol="0" anchor="ctr"/>
+          <a:lstStyle/>
+          <a:p>
+            <a:pPr algn="r" indent="0" marL="0">
+              <a:buNone/>
+            </a:pPr>
+            <a:r>
+              <a:rPr lang="en-US" sz="1800" b="1" dirty="0">
+                <a:solidFill>
+                  <a:srgbClr val="043B72"/>
+                </a:solidFill>
+                <a:latin typeface="Spoqa Han Sans Neo" pitchFamily="34" charset="0"/>
+                <a:ea typeface="Spoqa Han Sans Neo" pitchFamily="34" charset="-122"/>
+                <a:cs typeface="Spoqa Han Sans Neo" pitchFamily="34" charset="-120"/>
+              </a:rPr>
+              <a:t>4.69%</a:t>
+            </a:r>
+            <a:endParaRPr lang="en-US" sz="1800" dirty="0"/>
+          </a:p>
+        </p:txBody>
+      </p:sp>
+      <p:sp>
+        <p:nvSpPr>
+          <p:cNvPr id="37" name="Shape 34"/>
+          <p:cNvSpPr/>
+          <p:nvPr/>
+        </p:nvSpPr>
+        <p:spPr>
+          <a:xfrm>
+            <a:off x="7498080" y="5806440"/>
+            <a:ext cx="4187952" cy="411480"/>
+          </a:xfrm>
+          <a:prstGeom prst="roundRect">
+            <a:avLst>
+              <a:gd name="adj" fmla="val 8889"/>
             </a:avLst>
           </a:prstGeom>
           <a:solidFill>
@@ -12216,30 +12543,30 @@
       </p:sp>
       <p:sp>
         <p:nvSpPr>
-          <p:cNvPr id="29" name="Text 26"/>
-          <p:cNvSpPr/>
-          <p:nvPr/>
-        </p:nvSpPr>
-        <p:spPr>
-          <a:xfrm>
-            <a:off x="7699248" y="5230368"/>
-            <a:ext cx="3840480" cy="274320"/>
-          </a:xfrm>
-          <a:prstGeom prst="rect">
-            <a:avLst/>
-          </a:prstGeom>
-          <a:noFill/>
-          <a:ln/>
-        </p:spPr>
-        <p:txBody>
-          <a:bodyPr wrap="square" lIns="0" tIns="0" rIns="0" bIns="0" rtlCol="0" anchor="ctr"/>
-          <a:lstStyle/>
-          <a:p>
-            <a:pPr indent="0" marL="0">
-              <a:buNone/>
-            </a:pPr>
-            <a:r>
-              <a:rPr lang="en-US" sz="1150" b="1" dirty="0">
+          <p:cNvPr id="38" name="Text 35"/>
+          <p:cNvSpPr/>
+          <p:nvPr/>
+        </p:nvSpPr>
+        <p:spPr>
+          <a:xfrm>
+            <a:off x="7635240" y="5806440"/>
+            <a:ext cx="3931920" cy="411480"/>
+          </a:xfrm>
+          <a:prstGeom prst="rect">
+            <a:avLst/>
+          </a:prstGeom>
+          <a:noFill/>
+          <a:ln/>
+        </p:spPr>
+        <p:txBody>
+          <a:bodyPr wrap="square" lIns="0" tIns="0" rIns="0" bIns="0" rtlCol="0" anchor="ctr"/>
+          <a:lstStyle/>
+          <a:p>
+            <a:pPr indent="0" marL="0">
+              <a:buNone/>
+            </a:pPr>
+            <a:r>
+              <a:rPr lang="en-US" sz="1050" b="1" dirty="0">
                 <a:solidFill>
                   <a:srgbClr val="CB6015"/>
                 </a:solidFill>
@@ -12247,57 +12574,15 @@
                 <a:ea typeface="Spoqa Han Sans Neo" pitchFamily="34" charset="-122"/>
                 <a:cs typeface="Spoqa Han Sans Neo" pitchFamily="34" charset="-120"/>
               </a:rPr>
-              <a:t>왜 중요한가 (쉽게)</a:t>
-            </a:r>
-            <a:endParaRPr lang="en-US" sz="1150" dirty="0"/>
-          </a:p>
-        </p:txBody>
-      </p:sp>
-      <p:sp>
-        <p:nvSpPr>
-          <p:cNvPr id="30" name="Text 27"/>
-          <p:cNvSpPr/>
-          <p:nvPr/>
-        </p:nvSpPr>
-        <p:spPr>
-          <a:xfrm>
-            <a:off x="7699248" y="5486400"/>
-            <a:ext cx="3840480" cy="457200"/>
-          </a:xfrm>
-          <a:prstGeom prst="rect">
-            <a:avLst/>
-          </a:prstGeom>
-          <a:noFill/>
-          <a:ln/>
-        </p:spPr>
-        <p:txBody>
-          <a:bodyPr wrap="square" lIns="0" tIns="0" rIns="0" bIns="0" rtlCol="0" anchor="ctr"/>
-          <a:lstStyle/>
-          <a:p>
-            <a:pPr indent="0" marL="0">
-              <a:lnSpc>
-                <a:spcPts val="1300"/>
-              </a:lnSpc>
-              <a:buNone/>
-            </a:pPr>
-            <a:r>
-              <a:rPr lang="en-US" sz="1100" dirty="0">
-                <a:solidFill>
-                  <a:srgbClr val="3D3D3D"/>
-                </a:solidFill>
-                <a:latin typeface="Spoqa Han Sans Neo" pitchFamily="34" charset="0"/>
-                <a:ea typeface="Spoqa Han Sans Neo" pitchFamily="34" charset="-122"/>
-                <a:cs typeface="Spoqa Han Sans Neo" pitchFamily="34" charset="-120"/>
-              </a:rPr>
-              <a:t>금리↑ → 성장주 '할인율'↑ = 역풍.  단, AI 실적이 '순풍'.</a:t>
-            </a:r>
-            <a:endParaRPr lang="en-US" sz="1100" dirty="0"/>
-          </a:p>
-        </p:txBody>
-      </p:sp>
-      <p:sp>
-        <p:nvSpPr>
-          <p:cNvPr id="31" name="Text 28"/>
+              <a:t>금리↑ = 성장주 할인율↑(역풍) · AI 실적 = 순풍</a:t>
+            </a:r>
+            <a:endParaRPr lang="en-US" sz="1050" dirty="0"/>
+          </a:p>
+        </p:txBody>
+      </p:sp>
+      <p:sp>
+        <p:nvSpPr>
+          <p:cNvPr id="39" name="Text 36"/>
           <p:cNvSpPr/>
           <p:nvPr/>
         </p:nvSpPr>
@@ -12328,7 +12613,7 @@
                 <a:ea typeface="Spoqa Han Sans Neo" pitchFamily="34" charset="-122"/>
                 <a:cs typeface="Spoqa Han Sans Neo" pitchFamily="34" charset="-120"/>
               </a:rPr>
-              <a:t>자료: 한국은행, Fed, ECB, BOJ, KB증권 (2026.07). 정책금리·추정 기준.</a:t>
+              <a:t>자료: 한국은행·Fed·ECB·BOJ(정책금리), TradingEconomics·Advisor Perspectives(국채금리), 2026.07. 시장금리는 7월 중순~하순치.</a:t>
             </a:r>
             <a:endParaRPr lang="en-US" sz="850" dirty="0"/>
           </a:p>
@@ -12336,7 +12621,7 @@
       </p:sp>
       <p:sp>
         <p:nvSpPr>
-          <p:cNvPr id="32" name="Text 29"/>
+          <p:cNvPr id="40" name="Text 37"/>
           <p:cNvSpPr/>
           <p:nvPr/>
         </p:nvSpPr>

--- a/반도체_투자_세미나_20260727.pptx
+++ b/반도체_투자_세미나_20260727.pptx
@@ -11515,7 +11515,46 @@
               <a:buNone/>
             </a:pPr>
             <a:r>
-              <a:rPr lang="en-US" sz="1200" b="1" dirty="0">
+              <a:rPr lang="en-US" sz="1250" b="1" dirty="0">
+                <a:solidFill>
+                  <a:srgbClr val="1A1A1A"/>
+                </a:solidFill>
+                <a:latin typeface="Spoqa Han Sans Neo" pitchFamily="34" charset="0"/>
+                <a:ea typeface="Spoqa Han Sans Neo" pitchFamily="34" charset="-122"/>
+                <a:cs typeface="Spoqa Han Sans Neo" pitchFamily="34" charset="-120"/>
+              </a:rPr>
+              <a:t>정책금리 vs 시장금리 (2026.7)</a:t>
+            </a:r>
+            <a:endParaRPr lang="en-US" sz="1250" dirty="0"/>
+          </a:p>
+        </p:txBody>
+      </p:sp>
+      <p:sp>
+        <p:nvSpPr>
+          <p:cNvPr id="8" name="Text 5"/>
+          <p:cNvSpPr/>
+          <p:nvPr/>
+        </p:nvSpPr>
+        <p:spPr>
+          <a:xfrm>
+            <a:off x="7680960" y="2084832"/>
+            <a:ext cx="1280160" cy="274320"/>
+          </a:xfrm>
+          <a:prstGeom prst="rect">
+            <a:avLst/>
+          </a:prstGeom>
+          <a:noFill/>
+          <a:ln/>
+        </p:spPr>
+        <p:txBody>
+          <a:bodyPr wrap="square" lIns="0" tIns="0" rIns="0" bIns="0" rtlCol="0" anchor="ctr"/>
+          <a:lstStyle/>
+          <a:p>
+            <a:pPr indent="0" marL="0">
+              <a:buNone/>
+            </a:pPr>
+            <a:r>
+              <a:rPr lang="en-US" sz="1000" b="1" dirty="0">
                 <a:solidFill>
                   <a:srgbClr val="6C6C6C"/>
                 </a:solidFill>
@@ -11523,26 +11562,104 @@
                 <a:ea typeface="Spoqa Han Sans Neo" pitchFamily="34" charset="-122"/>
                 <a:cs typeface="Spoqa Han Sans Neo" pitchFamily="34" charset="-120"/>
               </a:rPr>
-              <a:t>정책금리 (2026.7)</a:t>
-            </a:r>
-            <a:endParaRPr lang="en-US" sz="1200" dirty="0"/>
-          </a:p>
-        </p:txBody>
-      </p:sp>
-      <p:sp>
-        <p:nvSpPr>
-          <p:cNvPr id="8" name="Shape 5"/>
-          <p:cNvSpPr/>
-          <p:nvPr/>
-        </p:nvSpPr>
-        <p:spPr>
-          <a:xfrm>
-            <a:off x="7498080" y="2029968"/>
-            <a:ext cx="4187952" cy="438912"/>
+              <a:t>국가</a:t>
+            </a:r>
+            <a:endParaRPr lang="en-US" sz="1000" dirty="0"/>
+          </a:p>
+        </p:txBody>
+      </p:sp>
+      <p:sp>
+        <p:nvSpPr>
+          <p:cNvPr id="9" name="Text 6"/>
+          <p:cNvSpPr/>
+          <p:nvPr/>
+        </p:nvSpPr>
+        <p:spPr>
+          <a:xfrm>
+            <a:off x="9006840" y="2084832"/>
+            <a:ext cx="1188720" cy="274320"/>
+          </a:xfrm>
+          <a:prstGeom prst="rect">
+            <a:avLst/>
+          </a:prstGeom>
+          <a:noFill/>
+          <a:ln/>
+        </p:spPr>
+        <p:txBody>
+          <a:bodyPr wrap="square" lIns="0" tIns="0" rIns="0" bIns="0" rtlCol="0" anchor="ctr"/>
+          <a:lstStyle/>
+          <a:p>
+            <a:pPr algn="ctr" indent="0" marL="0">
+              <a:buNone/>
+            </a:pPr>
+            <a:r>
+              <a:rPr lang="en-US" sz="1000" b="1" dirty="0">
+                <a:solidFill>
+                  <a:srgbClr val="043B72"/>
+                </a:solidFill>
+                <a:latin typeface="Spoqa Han Sans Neo" pitchFamily="34" charset="0"/>
+                <a:ea typeface="Spoqa Han Sans Neo" pitchFamily="34" charset="-122"/>
+                <a:cs typeface="Spoqa Han Sans Neo" pitchFamily="34" charset="-120"/>
+              </a:rPr>
+              <a:t>정책금리</a:t>
+            </a:r>
+            <a:endParaRPr lang="en-US" sz="1000" dirty="0"/>
+          </a:p>
+        </p:txBody>
+      </p:sp>
+      <p:sp>
+        <p:nvSpPr>
+          <p:cNvPr id="10" name="Text 7"/>
+          <p:cNvSpPr/>
+          <p:nvPr/>
+        </p:nvSpPr>
+        <p:spPr>
+          <a:xfrm>
+            <a:off x="10287000" y="2084832"/>
+            <a:ext cx="1280160" cy="274320"/>
+          </a:xfrm>
+          <a:prstGeom prst="rect">
+            <a:avLst/>
+          </a:prstGeom>
+          <a:noFill/>
+          <a:ln/>
+        </p:spPr>
+        <p:txBody>
+          <a:bodyPr wrap="square" lIns="0" tIns="0" rIns="0" bIns="0" rtlCol="0" anchor="ctr"/>
+          <a:lstStyle/>
+          <a:p>
+            <a:pPr algn="ctr" indent="0" marL="0">
+              <a:buNone/>
+            </a:pPr>
+            <a:r>
+              <a:rPr lang="en-US" sz="1000" b="1" dirty="0">
+                <a:solidFill>
+                  <a:srgbClr val="F58220"/>
+                </a:solidFill>
+                <a:latin typeface="Spoqa Han Sans Neo" pitchFamily="34" charset="0"/>
+                <a:ea typeface="Spoqa Han Sans Neo" pitchFamily="34" charset="-122"/>
+                <a:cs typeface="Spoqa Han Sans Neo" pitchFamily="34" charset="-120"/>
+              </a:rPr>
+              <a:t>시장(국채10Y)</a:t>
+            </a:r>
+            <a:endParaRPr lang="en-US" sz="1000" dirty="0"/>
+          </a:p>
+        </p:txBody>
+      </p:sp>
+      <p:sp>
+        <p:nvSpPr>
+          <p:cNvPr id="11" name="Shape 8"/>
+          <p:cNvSpPr/>
+          <p:nvPr/>
+        </p:nvSpPr>
+        <p:spPr>
+          <a:xfrm>
+            <a:off x="7498080" y="2395728"/>
+            <a:ext cx="4187952" cy="566928"/>
           </a:xfrm>
           <a:prstGeom prst="roundRect">
             <a:avLst>
-              <a:gd name="adj" fmla="val 8333"/>
+              <a:gd name="adj" fmla="val 6452"/>
             </a:avLst>
           </a:prstGeom>
           <a:solidFill>
@@ -11558,50 +11675,30 @@
       </p:sp>
       <p:sp>
         <p:nvSpPr>
-          <p:cNvPr id="9" name="Shape 6"/>
-          <p:cNvSpPr/>
-          <p:nvPr/>
-        </p:nvSpPr>
-        <p:spPr>
-          <a:xfrm>
-            <a:off x="7662672" y="2157984"/>
-            <a:ext cx="128016" cy="182880"/>
-          </a:xfrm>
-          <a:prstGeom prst="rect">
-            <a:avLst/>
-          </a:prstGeom>
-          <a:solidFill>
-            <a:srgbClr val="F58220"/>
-          </a:solidFill>
-          <a:ln/>
-        </p:spPr>
-      </p:sp>
-      <p:sp>
-        <p:nvSpPr>
-          <p:cNvPr id="10" name="Text 7"/>
-          <p:cNvSpPr/>
-          <p:nvPr/>
-        </p:nvSpPr>
-        <p:spPr>
-          <a:xfrm>
-            <a:off x="7918704" y="2029968"/>
-            <a:ext cx="1737360" cy="438912"/>
-          </a:xfrm>
-          <a:prstGeom prst="rect">
-            <a:avLst/>
-          </a:prstGeom>
-          <a:noFill/>
-          <a:ln/>
-        </p:spPr>
-        <p:txBody>
-          <a:bodyPr wrap="square" lIns="0" tIns="0" rIns="0" bIns="0" rtlCol="0" anchor="ctr"/>
-          <a:lstStyle/>
-          <a:p>
-            <a:pPr indent="0" marL="0">
-              <a:buNone/>
-            </a:pPr>
-            <a:r>
-              <a:rPr lang="en-US" sz="1200" b="1" dirty="0">
+          <p:cNvPr id="12" name="Text 9"/>
+          <p:cNvSpPr/>
+          <p:nvPr/>
+        </p:nvSpPr>
+        <p:spPr>
+          <a:xfrm>
+            <a:off x="7680960" y="2395728"/>
+            <a:ext cx="1371600" cy="566928"/>
+          </a:xfrm>
+          <a:prstGeom prst="rect">
+            <a:avLst/>
+          </a:prstGeom>
+          <a:noFill/>
+          <a:ln/>
+        </p:spPr>
+        <p:txBody>
+          <a:bodyPr wrap="square" lIns="0" tIns="0" rIns="0" bIns="0" rtlCol="0" anchor="ctr"/>
+          <a:lstStyle/>
+          <a:p>
+            <a:pPr indent="0" marL="0">
+              <a:buNone/>
+            </a:pPr>
+            <a:r>
+              <a:rPr lang="en-US" sz="1300" b="1" dirty="0">
                 <a:solidFill>
                   <a:srgbClr val="1A1A1A"/>
                 </a:solidFill>
@@ -11609,46 +11706,85 @@
                 <a:ea typeface="Spoqa Han Sans Neo" pitchFamily="34" charset="-122"/>
                 <a:cs typeface="Spoqa Han Sans Neo" pitchFamily="34" charset="-120"/>
               </a:rPr>
-              <a:t>한국 BOK</a:t>
-            </a:r>
-            <a:endParaRPr lang="en-US" sz="1200" dirty="0"/>
-          </a:p>
-        </p:txBody>
-      </p:sp>
-      <p:sp>
-        <p:nvSpPr>
-          <p:cNvPr id="11" name="Text 8"/>
-          <p:cNvSpPr/>
-          <p:nvPr/>
-        </p:nvSpPr>
-        <p:spPr>
-          <a:xfrm>
-            <a:off x="9692640" y="2029968"/>
-            <a:ext cx="1371600" cy="438912"/>
-          </a:xfrm>
-          <a:prstGeom prst="rect">
-            <a:avLst/>
-          </a:prstGeom>
-          <a:noFill/>
-          <a:ln/>
-        </p:spPr>
-        <p:txBody>
-          <a:bodyPr wrap="square" lIns="0" tIns="0" rIns="0" bIns="0" rtlCol="0" anchor="ctr"/>
-          <a:lstStyle/>
-          <a:p>
-            <a:pPr algn="r" indent="0" marL="0">
+              <a:t>한국</a:t>
+            </a:r>
+            <a:endParaRPr lang="en-US" sz="1300" dirty="0"/>
+          </a:p>
+        </p:txBody>
+      </p:sp>
+      <p:sp>
+        <p:nvSpPr>
+          <p:cNvPr id="13" name="Text 10"/>
+          <p:cNvSpPr/>
+          <p:nvPr/>
+        </p:nvSpPr>
+        <p:spPr>
+          <a:xfrm>
+            <a:off x="8961120" y="2395728"/>
+            <a:ext cx="1234440" cy="566928"/>
+          </a:xfrm>
+          <a:prstGeom prst="rect">
+            <a:avLst/>
+          </a:prstGeom>
+          <a:noFill/>
+          <a:ln/>
+        </p:spPr>
+        <p:txBody>
+          <a:bodyPr wrap="square" lIns="0" tIns="0" rIns="0" bIns="0" rtlCol="0" anchor="ctr"/>
+          <a:lstStyle/>
+          <a:p>
+            <a:pPr algn="ctr" indent="0" marL="0">
               <a:buNone/>
             </a:pPr>
             <a:r>
               <a:rPr lang="en-US" sz="1500" b="1" dirty="0">
                 <a:solidFill>
+                  <a:srgbClr val="043B72"/>
+                </a:solidFill>
+                <a:latin typeface="Spoqa Han Sans Neo" pitchFamily="34" charset="0"/>
+                <a:ea typeface="Spoqa Han Sans Neo" pitchFamily="34" charset="-122"/>
+                <a:cs typeface="Spoqa Han Sans Neo" pitchFamily="34" charset="-120"/>
+              </a:rPr>
+              <a:t>2.75%</a:t>
+            </a:r>
+            <a:endParaRPr lang="en-US" sz="1500" dirty="0"/>
+          </a:p>
+        </p:txBody>
+      </p:sp>
+      <p:sp>
+        <p:nvSpPr>
+          <p:cNvPr id="14" name="Text 11"/>
+          <p:cNvSpPr/>
+          <p:nvPr/>
+        </p:nvSpPr>
+        <p:spPr>
+          <a:xfrm>
+            <a:off x="10241280" y="2395728"/>
+            <a:ext cx="1325880" cy="566928"/>
+          </a:xfrm>
+          <a:prstGeom prst="rect">
+            <a:avLst/>
+          </a:prstGeom>
+          <a:noFill/>
+          <a:ln/>
+        </p:spPr>
+        <p:txBody>
+          <a:bodyPr wrap="square" lIns="0" tIns="0" rIns="0" bIns="0" rtlCol="0" anchor="ctr"/>
+          <a:lstStyle/>
+          <a:p>
+            <a:pPr algn="ctr" indent="0" marL="0">
+              <a:buNone/>
+            </a:pPr>
+            <a:r>
+              <a:rPr lang="en-US" sz="1500" b="1" dirty="0">
+                <a:solidFill>
                   <a:srgbClr val="F58220"/>
                 </a:solidFill>
                 <a:latin typeface="Spoqa Han Sans Neo" pitchFamily="34" charset="0"/>
                 <a:ea typeface="Spoqa Han Sans Neo" pitchFamily="34" charset="-122"/>
                 <a:cs typeface="Spoqa Han Sans Neo" pitchFamily="34" charset="-120"/>
               </a:rPr>
-              <a:t>2.75%</a:t>
+              <a:t>4.40%</a:t>
             </a:r>
             <a:endParaRPr lang="en-US" sz="1500" dirty="0"/>
           </a:p>
@@ -11656,57 +11792,162 @@
       </p:sp>
       <p:sp>
         <p:nvSpPr>
-          <p:cNvPr id="12" name="Text 9"/>
-          <p:cNvSpPr/>
-          <p:nvPr/>
-        </p:nvSpPr>
-        <p:spPr>
-          <a:xfrm>
-            <a:off x="11201400" y="2029968"/>
-            <a:ext cx="365760" cy="438912"/>
-          </a:xfrm>
-          <a:prstGeom prst="rect">
-            <a:avLst/>
-          </a:prstGeom>
-          <a:noFill/>
-          <a:ln/>
-        </p:spPr>
-        <p:txBody>
-          <a:bodyPr wrap="square" lIns="0" tIns="0" rIns="0" bIns="0" rtlCol="0" anchor="ctr"/>
-          <a:lstStyle/>
-          <a:p>
-            <a:pPr algn="ctr" indent="0" marL="0">
-              <a:buNone/>
-            </a:pPr>
-            <a:r>
-              <a:rPr lang="en-US" sz="1200" b="1" dirty="0">
-                <a:solidFill>
-                  <a:srgbClr val="F58220"/>
-                </a:solidFill>
-                <a:latin typeface="Spoqa Han Sans Neo" pitchFamily="34" charset="0"/>
-                <a:ea typeface="Spoqa Han Sans Neo" pitchFamily="34" charset="-122"/>
-                <a:cs typeface="Spoqa Han Sans Neo" pitchFamily="34" charset="-120"/>
-              </a:rPr>
-              <a:t>▲</a:t>
-            </a:r>
-            <a:endParaRPr lang="en-US" sz="1200" dirty="0"/>
-          </a:p>
-        </p:txBody>
-      </p:sp>
-      <p:sp>
-        <p:nvSpPr>
-          <p:cNvPr id="13" name="Shape 10"/>
-          <p:cNvSpPr/>
-          <p:nvPr/>
-        </p:nvSpPr>
-        <p:spPr>
-          <a:xfrm>
-            <a:off x="7498080" y="2532888"/>
-            <a:ext cx="4187952" cy="438912"/>
+          <p:cNvPr id="15" name="Shape 12"/>
+          <p:cNvSpPr/>
+          <p:nvPr/>
+        </p:nvSpPr>
+        <p:spPr>
+          <a:xfrm>
+            <a:off x="7498080" y="3035808"/>
+            <a:ext cx="4187952" cy="566928"/>
           </a:xfrm>
           <a:prstGeom prst="roundRect">
             <a:avLst>
-              <a:gd name="adj" fmla="val 8333"/>
+              <a:gd name="adj" fmla="val 6452"/>
+            </a:avLst>
+          </a:prstGeom>
+          <a:solidFill>
+            <a:srgbClr val="FFFFFF"/>
+          </a:solidFill>
+          <a:ln w="9525">
+            <a:solidFill>
+              <a:srgbClr val="CDCECB"/>
+            </a:solidFill>
+            <a:prstDash val="solid"/>
+          </a:ln>
+        </p:spPr>
+      </p:sp>
+      <p:sp>
+        <p:nvSpPr>
+          <p:cNvPr id="16" name="Text 13"/>
+          <p:cNvSpPr/>
+          <p:nvPr/>
+        </p:nvSpPr>
+        <p:spPr>
+          <a:xfrm>
+            <a:off x="7680960" y="3035808"/>
+            <a:ext cx="1371600" cy="566928"/>
+          </a:xfrm>
+          <a:prstGeom prst="rect">
+            <a:avLst/>
+          </a:prstGeom>
+          <a:noFill/>
+          <a:ln/>
+        </p:spPr>
+        <p:txBody>
+          <a:bodyPr wrap="square" lIns="0" tIns="0" rIns="0" bIns="0" rtlCol="0" anchor="ctr"/>
+          <a:lstStyle/>
+          <a:p>
+            <a:pPr indent="0" marL="0">
+              <a:buNone/>
+            </a:pPr>
+            <a:r>
+              <a:rPr lang="en-US" sz="1300" b="1" dirty="0">
+                <a:solidFill>
+                  <a:srgbClr val="1A1A1A"/>
+                </a:solidFill>
+                <a:latin typeface="Spoqa Han Sans Neo" pitchFamily="34" charset="0"/>
+                <a:ea typeface="Spoqa Han Sans Neo" pitchFamily="34" charset="-122"/>
+                <a:cs typeface="Spoqa Han Sans Neo" pitchFamily="34" charset="-120"/>
+              </a:rPr>
+              <a:t>미국</a:t>
+            </a:r>
+            <a:endParaRPr lang="en-US" sz="1300" dirty="0"/>
+          </a:p>
+        </p:txBody>
+      </p:sp>
+      <p:sp>
+        <p:nvSpPr>
+          <p:cNvPr id="17" name="Text 14"/>
+          <p:cNvSpPr/>
+          <p:nvPr/>
+        </p:nvSpPr>
+        <p:spPr>
+          <a:xfrm>
+            <a:off x="8961120" y="3035808"/>
+            <a:ext cx="1234440" cy="566928"/>
+          </a:xfrm>
+          <a:prstGeom prst="rect">
+            <a:avLst/>
+          </a:prstGeom>
+          <a:noFill/>
+          <a:ln/>
+        </p:spPr>
+        <p:txBody>
+          <a:bodyPr wrap="square" lIns="0" tIns="0" rIns="0" bIns="0" rtlCol="0" anchor="ctr"/>
+          <a:lstStyle/>
+          <a:p>
+            <a:pPr algn="ctr" indent="0" marL="0">
+              <a:buNone/>
+            </a:pPr>
+            <a:r>
+              <a:rPr lang="en-US" sz="1500" b="1" dirty="0">
+                <a:solidFill>
+                  <a:srgbClr val="043B72"/>
+                </a:solidFill>
+                <a:latin typeface="Spoqa Han Sans Neo" pitchFamily="34" charset="0"/>
+                <a:ea typeface="Spoqa Han Sans Neo" pitchFamily="34" charset="-122"/>
+                <a:cs typeface="Spoqa Han Sans Neo" pitchFamily="34" charset="-120"/>
+              </a:rPr>
+              <a:t>3.63%</a:t>
+            </a:r>
+            <a:endParaRPr lang="en-US" sz="1500" dirty="0"/>
+          </a:p>
+        </p:txBody>
+      </p:sp>
+      <p:sp>
+        <p:nvSpPr>
+          <p:cNvPr id="18" name="Text 15"/>
+          <p:cNvSpPr/>
+          <p:nvPr/>
+        </p:nvSpPr>
+        <p:spPr>
+          <a:xfrm>
+            <a:off x="10241280" y="3035808"/>
+            <a:ext cx="1325880" cy="566928"/>
+          </a:xfrm>
+          <a:prstGeom prst="rect">
+            <a:avLst/>
+          </a:prstGeom>
+          <a:noFill/>
+          <a:ln/>
+        </p:spPr>
+        <p:txBody>
+          <a:bodyPr wrap="square" lIns="0" tIns="0" rIns="0" bIns="0" rtlCol="0" anchor="ctr"/>
+          <a:lstStyle/>
+          <a:p>
+            <a:pPr algn="ctr" indent="0" marL="0">
+              <a:buNone/>
+            </a:pPr>
+            <a:r>
+              <a:rPr lang="en-US" sz="1500" b="1" dirty="0">
+                <a:solidFill>
+                  <a:srgbClr val="F58220"/>
+                </a:solidFill>
+                <a:latin typeface="Spoqa Han Sans Neo" pitchFamily="34" charset="0"/>
+                <a:ea typeface="Spoqa Han Sans Neo" pitchFamily="34" charset="-122"/>
+                <a:cs typeface="Spoqa Han Sans Neo" pitchFamily="34" charset="-120"/>
+              </a:rPr>
+              <a:t>4.69%</a:t>
+            </a:r>
+            <a:endParaRPr lang="en-US" sz="1500" dirty="0"/>
+          </a:p>
+        </p:txBody>
+      </p:sp>
+      <p:sp>
+        <p:nvSpPr>
+          <p:cNvPr id="19" name="Shape 16"/>
+          <p:cNvSpPr/>
+          <p:nvPr/>
+        </p:nvSpPr>
+        <p:spPr>
+          <a:xfrm>
+            <a:off x="7498080" y="3675888"/>
+            <a:ext cx="4187952" cy="566928"/>
+          </a:xfrm>
+          <a:prstGeom prst="roundRect">
+            <a:avLst>
+              <a:gd name="adj" fmla="val 6452"/>
             </a:avLst>
           </a:prstGeom>
           <a:solidFill>
@@ -11722,50 +11963,30 @@
       </p:sp>
       <p:sp>
         <p:nvSpPr>
-          <p:cNvPr id="14" name="Shape 11"/>
-          <p:cNvSpPr/>
-          <p:nvPr/>
-        </p:nvSpPr>
-        <p:spPr>
-          <a:xfrm>
-            <a:off x="7662672" y="2660904"/>
-            <a:ext cx="128016" cy="182880"/>
-          </a:xfrm>
-          <a:prstGeom prst="rect">
-            <a:avLst/>
-          </a:prstGeom>
-          <a:solidFill>
-            <a:srgbClr val="043B72"/>
-          </a:solidFill>
-          <a:ln/>
-        </p:spPr>
-      </p:sp>
-      <p:sp>
-        <p:nvSpPr>
-          <p:cNvPr id="15" name="Text 12"/>
-          <p:cNvSpPr/>
-          <p:nvPr/>
-        </p:nvSpPr>
-        <p:spPr>
-          <a:xfrm>
-            <a:off x="7918704" y="2532888"/>
-            <a:ext cx="1737360" cy="438912"/>
-          </a:xfrm>
-          <a:prstGeom prst="rect">
-            <a:avLst/>
-          </a:prstGeom>
-          <a:noFill/>
-          <a:ln/>
-        </p:spPr>
-        <p:txBody>
-          <a:bodyPr wrap="square" lIns="0" tIns="0" rIns="0" bIns="0" rtlCol="0" anchor="ctr"/>
-          <a:lstStyle/>
-          <a:p>
-            <a:pPr indent="0" marL="0">
-              <a:buNone/>
-            </a:pPr>
-            <a:r>
-              <a:rPr lang="en-US" sz="1200" b="1" dirty="0">
+          <p:cNvPr id="20" name="Text 17"/>
+          <p:cNvSpPr/>
+          <p:nvPr/>
+        </p:nvSpPr>
+        <p:spPr>
+          <a:xfrm>
+            <a:off x="7680960" y="3675888"/>
+            <a:ext cx="1371600" cy="566928"/>
+          </a:xfrm>
+          <a:prstGeom prst="rect">
+            <a:avLst/>
+          </a:prstGeom>
+          <a:noFill/>
+          <a:ln/>
+        </p:spPr>
+        <p:txBody>
+          <a:bodyPr wrap="square" lIns="0" tIns="0" rIns="0" bIns="0" rtlCol="0" anchor="ctr"/>
+          <a:lstStyle/>
+          <a:p>
+            <a:pPr indent="0" marL="0">
+              <a:buNone/>
+            </a:pPr>
+            <a:r>
+              <a:rPr lang="en-US" sz="1300" b="1" dirty="0">
                 <a:solidFill>
                   <a:srgbClr val="1A1A1A"/>
                 </a:solidFill>
@@ -11773,34 +11994,34 @@
                 <a:ea typeface="Spoqa Han Sans Neo" pitchFamily="34" charset="-122"/>
                 <a:cs typeface="Spoqa Han Sans Neo" pitchFamily="34" charset="-120"/>
               </a:rPr>
-              <a:t>미국 Fed</a:t>
-            </a:r>
-            <a:endParaRPr lang="en-US" sz="1200" dirty="0"/>
-          </a:p>
-        </p:txBody>
-      </p:sp>
-      <p:sp>
-        <p:nvSpPr>
-          <p:cNvPr id="16" name="Text 13"/>
-          <p:cNvSpPr/>
-          <p:nvPr/>
-        </p:nvSpPr>
-        <p:spPr>
-          <a:xfrm>
-            <a:off x="9692640" y="2532888"/>
-            <a:ext cx="1371600" cy="438912"/>
-          </a:xfrm>
-          <a:prstGeom prst="rect">
-            <a:avLst/>
-          </a:prstGeom>
-          <a:noFill/>
-          <a:ln/>
-        </p:spPr>
-        <p:txBody>
-          <a:bodyPr wrap="square" lIns="0" tIns="0" rIns="0" bIns="0" rtlCol="0" anchor="ctr"/>
-          <a:lstStyle/>
-          <a:p>
-            <a:pPr algn="r" indent="0" marL="0">
+              <a:t>유로존</a:t>
+            </a:r>
+            <a:endParaRPr lang="en-US" sz="1300" dirty="0"/>
+          </a:p>
+        </p:txBody>
+      </p:sp>
+      <p:sp>
+        <p:nvSpPr>
+          <p:cNvPr id="21" name="Text 18"/>
+          <p:cNvSpPr/>
+          <p:nvPr/>
+        </p:nvSpPr>
+        <p:spPr>
+          <a:xfrm>
+            <a:off x="8961120" y="3675888"/>
+            <a:ext cx="1234440" cy="566928"/>
+          </a:xfrm>
+          <a:prstGeom prst="rect">
+            <a:avLst/>
+          </a:prstGeom>
+          <a:noFill/>
+          <a:ln/>
+        </p:spPr>
+        <p:txBody>
+          <a:bodyPr wrap="square" lIns="0" tIns="0" rIns="0" bIns="0" rtlCol="0" anchor="ctr"/>
+          <a:lstStyle/>
+          <a:p>
+            <a:pPr algn="ctr" indent="0" marL="0">
               <a:buNone/>
             </a:pPr>
             <a:r>
@@ -11812,7 +12033,7 @@
                 <a:ea typeface="Spoqa Han Sans Neo" pitchFamily="34" charset="-122"/>
                 <a:cs typeface="Spoqa Han Sans Neo" pitchFamily="34" charset="-120"/>
               </a:rPr>
-              <a:t>3.63%</a:t>
+              <a:t>2.25%</a:t>
             </a:r>
             <a:endParaRPr lang="en-US" sz="1500" dirty="0"/>
           </a:p>
@@ -11820,14 +12041,14 @@
       </p:sp>
       <p:sp>
         <p:nvSpPr>
-          <p:cNvPr id="17" name="Text 14"/>
-          <p:cNvSpPr/>
-          <p:nvPr/>
-        </p:nvSpPr>
-        <p:spPr>
-          <a:xfrm>
-            <a:off x="11201400" y="2532888"/>
-            <a:ext cx="365760" cy="438912"/>
+          <p:cNvPr id="22" name="Text 19"/>
+          <p:cNvSpPr/>
+          <p:nvPr/>
+        </p:nvSpPr>
+        <p:spPr>
+          <a:xfrm>
+            <a:off x="10241280" y="3675888"/>
+            <a:ext cx="1325880" cy="566928"/>
           </a:xfrm>
           <a:prstGeom prst="rect">
             <a:avLst/>
@@ -11843,38 +12064,38 @@
               <a:buNone/>
             </a:pPr>
             <a:r>
-              <a:rPr lang="en-US" sz="1200" b="1" dirty="0">
-                <a:solidFill>
-                  <a:srgbClr val="043B72"/>
-                </a:solidFill>
-                <a:latin typeface="Spoqa Han Sans Neo" pitchFamily="34" charset="0"/>
-                <a:ea typeface="Spoqa Han Sans Neo" pitchFamily="34" charset="-122"/>
-                <a:cs typeface="Spoqa Han Sans Neo" pitchFamily="34" charset="-120"/>
-              </a:rPr>
-              <a:t>=</a:t>
-            </a:r>
-            <a:endParaRPr lang="en-US" sz="1200" dirty="0"/>
-          </a:p>
-        </p:txBody>
-      </p:sp>
-      <p:sp>
-        <p:nvSpPr>
-          <p:cNvPr id="18" name="Shape 15"/>
-          <p:cNvSpPr/>
-          <p:nvPr/>
-        </p:nvSpPr>
-        <p:spPr>
-          <a:xfrm>
-            <a:off x="7498080" y="3035808"/>
-            <a:ext cx="4187952" cy="438912"/>
+              <a:rPr lang="en-US" sz="1500" b="1" dirty="0">
+                <a:solidFill>
+                  <a:srgbClr val="F58220"/>
+                </a:solidFill>
+                <a:latin typeface="Spoqa Han Sans Neo" pitchFamily="34" charset="0"/>
+                <a:ea typeface="Spoqa Han Sans Neo" pitchFamily="34" charset="-122"/>
+                <a:cs typeface="Spoqa Han Sans Neo" pitchFamily="34" charset="-120"/>
+              </a:rPr>
+              <a:t>2.95%</a:t>
+            </a:r>
+            <a:endParaRPr lang="en-US" sz="1500" dirty="0"/>
+          </a:p>
+        </p:txBody>
+      </p:sp>
+      <p:sp>
+        <p:nvSpPr>
+          <p:cNvPr id="23" name="Shape 20"/>
+          <p:cNvSpPr/>
+          <p:nvPr/>
+        </p:nvSpPr>
+        <p:spPr>
+          <a:xfrm>
+            <a:off x="7498080" y="4315968"/>
+            <a:ext cx="4187952" cy="566928"/>
           </a:xfrm>
           <a:prstGeom prst="roundRect">
             <a:avLst>
-              <a:gd name="adj" fmla="val 8333"/>
+              <a:gd name="adj" fmla="val 6452"/>
             </a:avLst>
           </a:prstGeom>
           <a:solidFill>
-            <a:srgbClr val="F7F8FA"/>
+            <a:srgbClr val="FFFFFF"/>
           </a:solidFill>
           <a:ln w="9525">
             <a:solidFill>
@@ -11886,50 +12107,30 @@
       </p:sp>
       <p:sp>
         <p:nvSpPr>
-          <p:cNvPr id="19" name="Shape 16"/>
-          <p:cNvSpPr/>
-          <p:nvPr/>
-        </p:nvSpPr>
-        <p:spPr>
-          <a:xfrm>
-            <a:off x="7662672" y="3163824"/>
-            <a:ext cx="128016" cy="182880"/>
-          </a:xfrm>
-          <a:prstGeom prst="rect">
-            <a:avLst/>
-          </a:prstGeom>
-          <a:solidFill>
-            <a:srgbClr val="0086B8"/>
-          </a:solidFill>
-          <a:ln/>
-        </p:spPr>
-      </p:sp>
-      <p:sp>
-        <p:nvSpPr>
-          <p:cNvPr id="20" name="Text 17"/>
-          <p:cNvSpPr/>
-          <p:nvPr/>
-        </p:nvSpPr>
-        <p:spPr>
-          <a:xfrm>
-            <a:off x="7918704" y="3035808"/>
-            <a:ext cx="1737360" cy="438912"/>
-          </a:xfrm>
-          <a:prstGeom prst="rect">
-            <a:avLst/>
-          </a:prstGeom>
-          <a:noFill/>
-          <a:ln/>
-        </p:spPr>
-        <p:txBody>
-          <a:bodyPr wrap="square" lIns="0" tIns="0" rIns="0" bIns="0" rtlCol="0" anchor="ctr"/>
-          <a:lstStyle/>
-          <a:p>
-            <a:pPr indent="0" marL="0">
-              <a:buNone/>
-            </a:pPr>
-            <a:r>
-              <a:rPr lang="en-US" sz="1200" b="1" dirty="0">
+          <p:cNvPr id="24" name="Text 21"/>
+          <p:cNvSpPr/>
+          <p:nvPr/>
+        </p:nvSpPr>
+        <p:spPr>
+          <a:xfrm>
+            <a:off x="7680960" y="4315968"/>
+            <a:ext cx="1371600" cy="566928"/>
+          </a:xfrm>
+          <a:prstGeom prst="rect">
+            <a:avLst/>
+          </a:prstGeom>
+          <a:noFill/>
+          <a:ln/>
+        </p:spPr>
+        <p:txBody>
+          <a:bodyPr wrap="square" lIns="0" tIns="0" rIns="0" bIns="0" rtlCol="0" anchor="ctr"/>
+          <a:lstStyle/>
+          <a:p>
+            <a:pPr indent="0" marL="0">
+              <a:buNone/>
+            </a:pPr>
+            <a:r>
+              <a:rPr lang="en-US" sz="1300" b="1" dirty="0">
                 <a:solidFill>
                   <a:srgbClr val="1A1A1A"/>
                 </a:solidFill>
@@ -11937,46 +12138,46 @@
                 <a:ea typeface="Spoqa Han Sans Neo" pitchFamily="34" charset="-122"/>
                 <a:cs typeface="Spoqa Han Sans Neo" pitchFamily="34" charset="-120"/>
               </a:rPr>
-              <a:t>유로존 ECB</a:t>
-            </a:r>
-            <a:endParaRPr lang="en-US" sz="1200" dirty="0"/>
-          </a:p>
-        </p:txBody>
-      </p:sp>
-      <p:sp>
-        <p:nvSpPr>
-          <p:cNvPr id="21" name="Text 18"/>
-          <p:cNvSpPr/>
-          <p:nvPr/>
-        </p:nvSpPr>
-        <p:spPr>
-          <a:xfrm>
-            <a:off x="9692640" y="3035808"/>
-            <a:ext cx="1371600" cy="438912"/>
-          </a:xfrm>
-          <a:prstGeom prst="rect">
-            <a:avLst/>
-          </a:prstGeom>
-          <a:noFill/>
-          <a:ln/>
-        </p:spPr>
-        <p:txBody>
-          <a:bodyPr wrap="square" lIns="0" tIns="0" rIns="0" bIns="0" rtlCol="0" anchor="ctr"/>
-          <a:lstStyle/>
-          <a:p>
-            <a:pPr algn="r" indent="0" marL="0">
+              <a:t>일본</a:t>
+            </a:r>
+            <a:endParaRPr lang="en-US" sz="1300" dirty="0"/>
+          </a:p>
+        </p:txBody>
+      </p:sp>
+      <p:sp>
+        <p:nvSpPr>
+          <p:cNvPr id="25" name="Text 22"/>
+          <p:cNvSpPr/>
+          <p:nvPr/>
+        </p:nvSpPr>
+        <p:spPr>
+          <a:xfrm>
+            <a:off x="8961120" y="4315968"/>
+            <a:ext cx="1234440" cy="566928"/>
+          </a:xfrm>
+          <a:prstGeom prst="rect">
+            <a:avLst/>
+          </a:prstGeom>
+          <a:noFill/>
+          <a:ln/>
+        </p:spPr>
+        <p:txBody>
+          <a:bodyPr wrap="square" lIns="0" tIns="0" rIns="0" bIns="0" rtlCol="0" anchor="ctr"/>
+          <a:lstStyle/>
+          <a:p>
+            <a:pPr algn="ctr" indent="0" marL="0">
               <a:buNone/>
             </a:pPr>
             <a:r>
               <a:rPr lang="en-US" sz="1500" b="1" dirty="0">
                 <a:solidFill>
-                  <a:srgbClr val="0086B8"/>
-                </a:solidFill>
-                <a:latin typeface="Spoqa Han Sans Neo" pitchFamily="34" charset="0"/>
-                <a:ea typeface="Spoqa Han Sans Neo" pitchFamily="34" charset="-122"/>
-                <a:cs typeface="Spoqa Han Sans Neo" pitchFamily="34" charset="-120"/>
-              </a:rPr>
-              <a:t>2.25%</a:t>
+                  <a:srgbClr val="043B72"/>
+                </a:solidFill>
+                <a:latin typeface="Spoqa Han Sans Neo" pitchFamily="34" charset="0"/>
+                <a:ea typeface="Spoqa Han Sans Neo" pitchFamily="34" charset="-122"/>
+                <a:cs typeface="Spoqa Han Sans Neo" pitchFamily="34" charset="-120"/>
+              </a:rPr>
+              <a:t>1.00%</a:t>
             </a:r>
             <a:endParaRPr lang="en-US" sz="1500" dirty="0"/>
           </a:p>
@@ -11984,14 +12185,14 @@
       </p:sp>
       <p:sp>
         <p:nvSpPr>
-          <p:cNvPr id="22" name="Text 19"/>
-          <p:cNvSpPr/>
-          <p:nvPr/>
-        </p:nvSpPr>
-        <p:spPr>
-          <a:xfrm>
-            <a:off x="11201400" y="3035808"/>
-            <a:ext cx="365760" cy="438912"/>
+          <p:cNvPr id="26" name="Text 23"/>
+          <p:cNvSpPr/>
+          <p:nvPr/>
+        </p:nvSpPr>
+        <p:spPr>
+          <a:xfrm>
+            <a:off x="10241280" y="4315968"/>
+            <a:ext cx="1325880" cy="566928"/>
           </a:xfrm>
           <a:prstGeom prst="rect">
             <a:avLst/>
@@ -12007,525 +12208,34 @@
               <a:buNone/>
             </a:pPr>
             <a:r>
-              <a:rPr lang="en-US" sz="1200" b="1" dirty="0">
-                <a:solidFill>
-                  <a:srgbClr val="0086B8"/>
-                </a:solidFill>
-                <a:latin typeface="Spoqa Han Sans Neo" pitchFamily="34" charset="0"/>
-                <a:ea typeface="Spoqa Han Sans Neo" pitchFamily="34" charset="-122"/>
-                <a:cs typeface="Spoqa Han Sans Neo" pitchFamily="34" charset="-120"/>
-              </a:rPr>
-              <a:t>=</a:t>
-            </a:r>
-            <a:endParaRPr lang="en-US" sz="1200" dirty="0"/>
-          </a:p>
-        </p:txBody>
-      </p:sp>
-      <p:sp>
-        <p:nvSpPr>
-          <p:cNvPr id="23" name="Shape 20"/>
-          <p:cNvSpPr/>
-          <p:nvPr/>
-        </p:nvSpPr>
-        <p:spPr>
-          <a:xfrm>
-            <a:off x="7498080" y="3538728"/>
-            <a:ext cx="4187952" cy="438912"/>
+              <a:rPr lang="en-US" sz="1500" b="1" dirty="0">
+                <a:solidFill>
+                  <a:srgbClr val="F58220"/>
+                </a:solidFill>
+                <a:latin typeface="Spoqa Han Sans Neo" pitchFamily="34" charset="0"/>
+                <a:ea typeface="Spoqa Han Sans Neo" pitchFamily="34" charset="-122"/>
+                <a:cs typeface="Spoqa Han Sans Neo" pitchFamily="34" charset="-120"/>
+              </a:rPr>
+              <a:t>2.78%</a:t>
+            </a:r>
+            <a:endParaRPr lang="en-US" sz="1500" dirty="0"/>
+          </a:p>
+        </p:txBody>
+      </p:sp>
+      <p:sp>
+        <p:nvSpPr>
+          <p:cNvPr id="27" name="Shape 24"/>
+          <p:cNvSpPr/>
+          <p:nvPr/>
+        </p:nvSpPr>
+        <p:spPr>
+          <a:xfrm>
+            <a:off x="7498080" y="5074920"/>
+            <a:ext cx="4187952" cy="932688"/>
           </a:xfrm>
           <a:prstGeom prst="roundRect">
             <a:avLst>
-              <a:gd name="adj" fmla="val 8333"/>
-            </a:avLst>
-          </a:prstGeom>
-          <a:solidFill>
-            <a:srgbClr val="F7F8FA"/>
-          </a:solidFill>
-          <a:ln w="9525">
-            <a:solidFill>
-              <a:srgbClr val="CDCECB"/>
-            </a:solidFill>
-            <a:prstDash val="solid"/>
-          </a:ln>
-        </p:spPr>
-      </p:sp>
-      <p:sp>
-        <p:nvSpPr>
-          <p:cNvPr id="24" name="Shape 21"/>
-          <p:cNvSpPr/>
-          <p:nvPr/>
-        </p:nvSpPr>
-        <p:spPr>
-          <a:xfrm>
-            <a:off x="7662672" y="3666744"/>
-            <a:ext cx="128016" cy="182880"/>
-          </a:xfrm>
-          <a:prstGeom prst="rect">
-            <a:avLst/>
-          </a:prstGeom>
-          <a:solidFill>
-            <a:srgbClr val="CB6015"/>
-          </a:solidFill>
-          <a:ln/>
-        </p:spPr>
-      </p:sp>
-      <p:sp>
-        <p:nvSpPr>
-          <p:cNvPr id="25" name="Text 22"/>
-          <p:cNvSpPr/>
-          <p:nvPr/>
-        </p:nvSpPr>
-        <p:spPr>
-          <a:xfrm>
-            <a:off x="7918704" y="3538728"/>
-            <a:ext cx="1737360" cy="438912"/>
-          </a:xfrm>
-          <a:prstGeom prst="rect">
-            <a:avLst/>
-          </a:prstGeom>
-          <a:noFill/>
-          <a:ln/>
-        </p:spPr>
-        <p:txBody>
-          <a:bodyPr wrap="square" lIns="0" tIns="0" rIns="0" bIns="0" rtlCol="0" anchor="ctr"/>
-          <a:lstStyle/>
-          <a:p>
-            <a:pPr indent="0" marL="0">
-              <a:buNone/>
-            </a:pPr>
-            <a:r>
-              <a:rPr lang="en-US" sz="1200" b="1" dirty="0">
-                <a:solidFill>
-                  <a:srgbClr val="1A1A1A"/>
-                </a:solidFill>
-                <a:latin typeface="Spoqa Han Sans Neo" pitchFamily="34" charset="0"/>
-                <a:ea typeface="Spoqa Han Sans Neo" pitchFamily="34" charset="-122"/>
-                <a:cs typeface="Spoqa Han Sans Neo" pitchFamily="34" charset="-120"/>
-              </a:rPr>
-              <a:t>일본 BOJ</a:t>
-            </a:r>
-            <a:endParaRPr lang="en-US" sz="1200" dirty="0"/>
-          </a:p>
-        </p:txBody>
-      </p:sp>
-      <p:sp>
-        <p:nvSpPr>
-          <p:cNvPr id="26" name="Text 23"/>
-          <p:cNvSpPr/>
-          <p:nvPr/>
-        </p:nvSpPr>
-        <p:spPr>
-          <a:xfrm>
-            <a:off x="9692640" y="3538728"/>
-            <a:ext cx="1371600" cy="438912"/>
-          </a:xfrm>
-          <a:prstGeom prst="rect">
-            <a:avLst/>
-          </a:prstGeom>
-          <a:noFill/>
-          <a:ln/>
-        </p:spPr>
-        <p:txBody>
-          <a:bodyPr wrap="square" lIns="0" tIns="0" rIns="0" bIns="0" rtlCol="0" anchor="ctr"/>
-          <a:lstStyle/>
-          <a:p>
-            <a:pPr algn="r" indent="0" marL="0">
-              <a:buNone/>
-            </a:pPr>
-            <a:r>
-              <a:rPr lang="en-US" sz="1500" b="1" dirty="0">
-                <a:solidFill>
-                  <a:srgbClr val="CB6015"/>
-                </a:solidFill>
-                <a:latin typeface="Spoqa Han Sans Neo" pitchFamily="34" charset="0"/>
-                <a:ea typeface="Spoqa Han Sans Neo" pitchFamily="34" charset="-122"/>
-                <a:cs typeface="Spoqa Han Sans Neo" pitchFamily="34" charset="-120"/>
-              </a:rPr>
-              <a:t>1.00%</a:t>
-            </a:r>
-            <a:endParaRPr lang="en-US" sz="1500" dirty="0"/>
-          </a:p>
-        </p:txBody>
-      </p:sp>
-      <p:sp>
-        <p:nvSpPr>
-          <p:cNvPr id="27" name="Text 24"/>
-          <p:cNvSpPr/>
-          <p:nvPr/>
-        </p:nvSpPr>
-        <p:spPr>
-          <a:xfrm>
-            <a:off x="11201400" y="3538728"/>
-            <a:ext cx="365760" cy="438912"/>
-          </a:xfrm>
-          <a:prstGeom prst="rect">
-            <a:avLst/>
-          </a:prstGeom>
-          <a:noFill/>
-          <a:ln/>
-        </p:spPr>
-        <p:txBody>
-          <a:bodyPr wrap="square" lIns="0" tIns="0" rIns="0" bIns="0" rtlCol="0" anchor="ctr"/>
-          <a:lstStyle/>
-          <a:p>
-            <a:pPr algn="ctr" indent="0" marL="0">
-              <a:buNone/>
-            </a:pPr>
-            <a:r>
-              <a:rPr lang="en-US" sz="1200" b="1" dirty="0">
-                <a:solidFill>
-                  <a:srgbClr val="CB6015"/>
-                </a:solidFill>
-                <a:latin typeface="Spoqa Han Sans Neo" pitchFamily="34" charset="0"/>
-                <a:ea typeface="Spoqa Han Sans Neo" pitchFamily="34" charset="-122"/>
-                <a:cs typeface="Spoqa Han Sans Neo" pitchFamily="34" charset="-120"/>
-              </a:rPr>
-              <a:t>▲</a:t>
-            </a:r>
-            <a:endParaRPr lang="en-US" sz="1200" dirty="0"/>
-          </a:p>
-        </p:txBody>
-      </p:sp>
-      <p:sp>
-        <p:nvSpPr>
-          <p:cNvPr id="28" name="Text 25"/>
-          <p:cNvSpPr/>
-          <p:nvPr/>
-        </p:nvSpPr>
-        <p:spPr>
-          <a:xfrm>
-            <a:off x="7498080" y="4114800"/>
-            <a:ext cx="4206240" cy="292608"/>
-          </a:xfrm>
-          <a:prstGeom prst="rect">
-            <a:avLst/>
-          </a:prstGeom>
-          <a:noFill/>
-          <a:ln/>
-        </p:spPr>
-        <p:txBody>
-          <a:bodyPr wrap="square" lIns="0" tIns="0" rIns="0" bIns="0" rtlCol="0" anchor="ctr"/>
-          <a:lstStyle/>
-          <a:p>
-            <a:pPr indent="0" marL="0">
-              <a:buNone/>
-            </a:pPr>
-            <a:r>
-              <a:rPr lang="en-US" sz="1200" b="1" dirty="0">
-                <a:solidFill>
-                  <a:srgbClr val="6C6C6C"/>
-                </a:solidFill>
-                <a:latin typeface="Spoqa Han Sans Neo" pitchFamily="34" charset="0"/>
-                <a:ea typeface="Spoqa Han Sans Neo" pitchFamily="34" charset="-122"/>
-                <a:cs typeface="Spoqa Han Sans Neo" pitchFamily="34" charset="-120"/>
-              </a:rPr>
-              <a:t>시장금리 — 국채 10년물</a:t>
-            </a:r>
-            <a:endParaRPr lang="en-US" sz="1200" dirty="0"/>
-          </a:p>
-        </p:txBody>
-      </p:sp>
-      <p:sp>
-        <p:nvSpPr>
-          <p:cNvPr id="29" name="Shape 26"/>
-          <p:cNvSpPr/>
-          <p:nvPr/>
-        </p:nvSpPr>
-        <p:spPr>
-          <a:xfrm>
-            <a:off x="7498080" y="4434840"/>
-            <a:ext cx="4187952" cy="566928"/>
-          </a:xfrm>
-          <a:prstGeom prst="roundRect">
-            <a:avLst>
-              <a:gd name="adj" fmla="val 6452"/>
-            </a:avLst>
-          </a:prstGeom>
-          <a:solidFill>
-            <a:srgbClr val="FFFFFF"/>
-          </a:solidFill>
-          <a:ln w="12700">
-            <a:solidFill>
-              <a:srgbClr val="CDCECB"/>
-            </a:solidFill>
-            <a:prstDash val="solid"/>
-          </a:ln>
-        </p:spPr>
-      </p:sp>
-      <p:sp>
-        <p:nvSpPr>
-          <p:cNvPr id="30" name="Text 27"/>
-          <p:cNvSpPr/>
-          <p:nvPr/>
-        </p:nvSpPr>
-        <p:spPr>
-          <a:xfrm>
-            <a:off x="7680960" y="4507992"/>
-            <a:ext cx="2286000" cy="274320"/>
-          </a:xfrm>
-          <a:prstGeom prst="rect">
-            <a:avLst/>
-          </a:prstGeom>
-          <a:noFill/>
-          <a:ln/>
-        </p:spPr>
-        <p:txBody>
-          <a:bodyPr wrap="square" lIns="0" tIns="0" rIns="0" bIns="0" rtlCol="0" anchor="ctr"/>
-          <a:lstStyle/>
-          <a:p>
-            <a:pPr indent="0" marL="0">
-              <a:buNone/>
-            </a:pPr>
-            <a:r>
-              <a:rPr lang="en-US" sz="1250" b="1" dirty="0">
-                <a:solidFill>
-                  <a:srgbClr val="1A1A1A"/>
-                </a:solidFill>
-                <a:latin typeface="Spoqa Han Sans Neo" pitchFamily="34" charset="0"/>
-                <a:ea typeface="Spoqa Han Sans Neo" pitchFamily="34" charset="-122"/>
-                <a:cs typeface="Spoqa Han Sans Neo" pitchFamily="34" charset="-120"/>
-              </a:rPr>
-              <a:t>한국 국고채</a:t>
-            </a:r>
-            <a:endParaRPr lang="en-US" sz="1250" dirty="0"/>
-          </a:p>
-        </p:txBody>
-      </p:sp>
-      <p:sp>
-        <p:nvSpPr>
-          <p:cNvPr id="31" name="Text 28"/>
-          <p:cNvSpPr/>
-          <p:nvPr/>
-        </p:nvSpPr>
-        <p:spPr>
-          <a:xfrm>
-            <a:off x="7680960" y="4754880"/>
-            <a:ext cx="2286000" cy="219456"/>
-          </a:xfrm>
-          <a:prstGeom prst="rect">
-            <a:avLst/>
-          </a:prstGeom>
-          <a:noFill/>
-          <a:ln/>
-        </p:spPr>
-        <p:txBody>
-          <a:bodyPr wrap="square" lIns="0" tIns="0" rIns="0" bIns="0" rtlCol="0" anchor="ctr"/>
-          <a:lstStyle/>
-          <a:p>
-            <a:pPr indent="0" marL="0">
-              <a:buNone/>
-            </a:pPr>
-            <a:r>
-              <a:rPr lang="en-US" sz="900" dirty="0">
-                <a:solidFill>
-                  <a:srgbClr val="6C6C6C"/>
-                </a:solidFill>
-                <a:latin typeface="Spoqa Han Sans Neo" pitchFamily="34" charset="0"/>
-                <a:ea typeface="Spoqa Han Sans Neo" pitchFamily="34" charset="-122"/>
-                <a:cs typeface="Spoqa Han Sans Neo" pitchFamily="34" charset="-120"/>
-              </a:rPr>
-              <a:t>3년 3.76% · 3년來 최고</a:t>
-            </a:r>
-            <a:endParaRPr lang="en-US" sz="900" dirty="0"/>
-          </a:p>
-        </p:txBody>
-      </p:sp>
-      <p:sp>
-        <p:nvSpPr>
-          <p:cNvPr id="32" name="Text 29"/>
-          <p:cNvSpPr/>
-          <p:nvPr/>
-        </p:nvSpPr>
-        <p:spPr>
-          <a:xfrm>
-            <a:off x="9966960" y="4434840"/>
-            <a:ext cx="1554480" cy="566928"/>
-          </a:xfrm>
-          <a:prstGeom prst="rect">
-            <a:avLst/>
-          </a:prstGeom>
-          <a:noFill/>
-          <a:ln/>
-        </p:spPr>
-        <p:txBody>
-          <a:bodyPr wrap="square" lIns="0" tIns="0" rIns="0" bIns="0" rtlCol="0" anchor="ctr"/>
-          <a:lstStyle/>
-          <a:p>
-            <a:pPr algn="r" indent="0" marL="0">
-              <a:buNone/>
-            </a:pPr>
-            <a:r>
-              <a:rPr lang="en-US" sz="1800" b="1" dirty="0">
-                <a:solidFill>
-                  <a:srgbClr val="F58220"/>
-                </a:solidFill>
-                <a:latin typeface="Spoqa Han Sans Neo" pitchFamily="34" charset="0"/>
-                <a:ea typeface="Spoqa Han Sans Neo" pitchFamily="34" charset="-122"/>
-                <a:cs typeface="Spoqa Han Sans Neo" pitchFamily="34" charset="-120"/>
-              </a:rPr>
-              <a:t>4.40%</a:t>
-            </a:r>
-            <a:endParaRPr lang="en-US" sz="1800" dirty="0"/>
-          </a:p>
-        </p:txBody>
-      </p:sp>
-      <p:sp>
-        <p:nvSpPr>
-          <p:cNvPr id="33" name="Shape 30"/>
-          <p:cNvSpPr/>
-          <p:nvPr/>
-        </p:nvSpPr>
-        <p:spPr>
-          <a:xfrm>
-            <a:off x="7498080" y="5093208"/>
-            <a:ext cx="4187952" cy="566928"/>
-          </a:xfrm>
-          <a:prstGeom prst="roundRect">
-            <a:avLst>
-              <a:gd name="adj" fmla="val 6452"/>
-            </a:avLst>
-          </a:prstGeom>
-          <a:solidFill>
-            <a:srgbClr val="FFFFFF"/>
-          </a:solidFill>
-          <a:ln w="12700">
-            <a:solidFill>
-              <a:srgbClr val="CDCECB"/>
-            </a:solidFill>
-            <a:prstDash val="solid"/>
-          </a:ln>
-        </p:spPr>
-      </p:sp>
-      <p:sp>
-        <p:nvSpPr>
-          <p:cNvPr id="34" name="Text 31"/>
-          <p:cNvSpPr/>
-          <p:nvPr/>
-        </p:nvSpPr>
-        <p:spPr>
-          <a:xfrm>
-            <a:off x="7680960" y="5166360"/>
-            <a:ext cx="2286000" cy="274320"/>
-          </a:xfrm>
-          <a:prstGeom prst="rect">
-            <a:avLst/>
-          </a:prstGeom>
-          <a:noFill/>
-          <a:ln/>
-        </p:spPr>
-        <p:txBody>
-          <a:bodyPr wrap="square" lIns="0" tIns="0" rIns="0" bIns="0" rtlCol="0" anchor="ctr"/>
-          <a:lstStyle/>
-          <a:p>
-            <a:pPr indent="0" marL="0">
-              <a:buNone/>
-            </a:pPr>
-            <a:r>
-              <a:rPr lang="en-US" sz="1250" b="1" dirty="0">
-                <a:solidFill>
-                  <a:srgbClr val="1A1A1A"/>
-                </a:solidFill>
-                <a:latin typeface="Spoqa Han Sans Neo" pitchFamily="34" charset="0"/>
-                <a:ea typeface="Spoqa Han Sans Neo" pitchFamily="34" charset="-122"/>
-                <a:cs typeface="Spoqa Han Sans Neo" pitchFamily="34" charset="-120"/>
-              </a:rPr>
-              <a:t>미국 국채</a:t>
-            </a:r>
-            <a:endParaRPr lang="en-US" sz="1250" dirty="0"/>
-          </a:p>
-        </p:txBody>
-      </p:sp>
-      <p:sp>
-        <p:nvSpPr>
-          <p:cNvPr id="35" name="Text 32"/>
-          <p:cNvSpPr/>
-          <p:nvPr/>
-        </p:nvSpPr>
-        <p:spPr>
-          <a:xfrm>
-            <a:off x="7680960" y="5413248"/>
-            <a:ext cx="2286000" cy="219456"/>
-          </a:xfrm>
-          <a:prstGeom prst="rect">
-            <a:avLst/>
-          </a:prstGeom>
-          <a:noFill/>
-          <a:ln/>
-        </p:spPr>
-        <p:txBody>
-          <a:bodyPr wrap="square" lIns="0" tIns="0" rIns="0" bIns="0" rtlCol="0" anchor="ctr"/>
-          <a:lstStyle/>
-          <a:p>
-            <a:pPr indent="0" marL="0">
-              <a:buNone/>
-            </a:pPr>
-            <a:r>
-              <a:rPr lang="en-US" sz="900" dirty="0">
-                <a:solidFill>
-                  <a:srgbClr val="6C6C6C"/>
-                </a:solidFill>
-                <a:latin typeface="Spoqa Han Sans Neo" pitchFamily="34" charset="0"/>
-                <a:ea typeface="Spoqa Han Sans Neo" pitchFamily="34" charset="-122"/>
-                <a:cs typeface="Spoqa Han Sans Neo" pitchFamily="34" charset="-120"/>
-              </a:rPr>
-              <a:t>2년 4.33%</a:t>
-            </a:r>
-            <a:endParaRPr lang="en-US" sz="900" dirty="0"/>
-          </a:p>
-        </p:txBody>
-      </p:sp>
-      <p:sp>
-        <p:nvSpPr>
-          <p:cNvPr id="36" name="Text 33"/>
-          <p:cNvSpPr/>
-          <p:nvPr/>
-        </p:nvSpPr>
-        <p:spPr>
-          <a:xfrm>
-            <a:off x="9966960" y="5093208"/>
-            <a:ext cx="1554480" cy="566928"/>
-          </a:xfrm>
-          <a:prstGeom prst="rect">
-            <a:avLst/>
-          </a:prstGeom>
-          <a:noFill/>
-          <a:ln/>
-        </p:spPr>
-        <p:txBody>
-          <a:bodyPr wrap="square" lIns="0" tIns="0" rIns="0" bIns="0" rtlCol="0" anchor="ctr"/>
-          <a:lstStyle/>
-          <a:p>
-            <a:pPr algn="r" indent="0" marL="0">
-              <a:buNone/>
-            </a:pPr>
-            <a:r>
-              <a:rPr lang="en-US" sz="1800" b="1" dirty="0">
-                <a:solidFill>
-                  <a:srgbClr val="043B72"/>
-                </a:solidFill>
-                <a:latin typeface="Spoqa Han Sans Neo" pitchFamily="34" charset="0"/>
-                <a:ea typeface="Spoqa Han Sans Neo" pitchFamily="34" charset="-122"/>
-                <a:cs typeface="Spoqa Han Sans Neo" pitchFamily="34" charset="-120"/>
-              </a:rPr>
-              <a:t>4.69%</a:t>
-            </a:r>
-            <a:endParaRPr lang="en-US" sz="1800" dirty="0"/>
-          </a:p>
-        </p:txBody>
-      </p:sp>
-      <p:sp>
-        <p:nvSpPr>
-          <p:cNvPr id="37" name="Shape 34"/>
-          <p:cNvSpPr/>
-          <p:nvPr/>
-        </p:nvSpPr>
-        <p:spPr>
-          <a:xfrm>
-            <a:off x="7498080" y="5806440"/>
-            <a:ext cx="4187952" cy="411480"/>
-          </a:xfrm>
-          <a:prstGeom prst="roundRect">
-            <a:avLst>
-              <a:gd name="adj" fmla="val 8889"/>
+              <a:gd name="adj" fmla="val 4902"/>
             </a:avLst>
           </a:prstGeom>
           <a:solidFill>
@@ -12543,30 +12253,30 @@
       </p:sp>
       <p:sp>
         <p:nvSpPr>
-          <p:cNvPr id="38" name="Text 35"/>
-          <p:cNvSpPr/>
-          <p:nvPr/>
-        </p:nvSpPr>
-        <p:spPr>
-          <a:xfrm>
-            <a:off x="7635240" y="5806440"/>
-            <a:ext cx="3931920" cy="411480"/>
-          </a:xfrm>
-          <a:prstGeom prst="rect">
-            <a:avLst/>
-          </a:prstGeom>
-          <a:noFill/>
-          <a:ln/>
-        </p:spPr>
-        <p:txBody>
-          <a:bodyPr wrap="square" lIns="0" tIns="0" rIns="0" bIns="0" rtlCol="0" anchor="ctr"/>
-          <a:lstStyle/>
-          <a:p>
-            <a:pPr indent="0" marL="0">
-              <a:buNone/>
-            </a:pPr>
-            <a:r>
-              <a:rPr lang="en-US" sz="1050" b="1" dirty="0">
+          <p:cNvPr id="28" name="Text 25"/>
+          <p:cNvSpPr/>
+          <p:nvPr/>
+        </p:nvSpPr>
+        <p:spPr>
+          <a:xfrm>
+            <a:off x="7699248" y="5175504"/>
+            <a:ext cx="3840480" cy="292608"/>
+          </a:xfrm>
+          <a:prstGeom prst="rect">
+            <a:avLst/>
+          </a:prstGeom>
+          <a:noFill/>
+          <a:ln/>
+        </p:spPr>
+        <p:txBody>
+          <a:bodyPr wrap="square" lIns="0" tIns="0" rIns="0" bIns="0" rtlCol="0" anchor="ctr"/>
+          <a:lstStyle/>
+          <a:p>
+            <a:pPr indent="0" marL="0">
+              <a:buNone/>
+            </a:pPr>
+            <a:r>
+              <a:rPr lang="en-US" sz="1200" b="1" dirty="0">
                 <a:solidFill>
                   <a:srgbClr val="CB6015"/>
                 </a:solidFill>
@@ -12574,7 +12284,49 @@
                 <a:ea typeface="Spoqa Han Sans Neo" pitchFamily="34" charset="-122"/>
                 <a:cs typeface="Spoqa Han Sans Neo" pitchFamily="34" charset="-120"/>
               </a:rPr>
-              <a:t>금리↑ = 성장주 할인율↑(역풍) · AI 실적 = 순풍</a:t>
+              <a:t>시장금리 &gt; 정책금리</a:t>
+            </a:r>
+            <a:endParaRPr lang="en-US" sz="1200" dirty="0"/>
+          </a:p>
+        </p:txBody>
+      </p:sp>
+      <p:sp>
+        <p:nvSpPr>
+          <p:cNvPr id="29" name="Text 26"/>
+          <p:cNvSpPr/>
+          <p:nvPr/>
+        </p:nvSpPr>
+        <p:spPr>
+          <a:xfrm>
+            <a:off x="7699248" y="5468112"/>
+            <a:ext cx="3840480" cy="530352"/>
+          </a:xfrm>
+          <a:prstGeom prst="rect">
+            <a:avLst/>
+          </a:prstGeom>
+          <a:noFill/>
+          <a:ln/>
+        </p:spPr>
+        <p:txBody>
+          <a:bodyPr wrap="square" lIns="0" tIns="0" rIns="0" bIns="0" rtlCol="0" anchor="ctr"/>
+          <a:lstStyle/>
+          <a:p>
+            <a:pPr indent="0" marL="0">
+              <a:lnSpc>
+                <a:spcPts val="1300"/>
+              </a:lnSpc>
+              <a:buNone/>
+            </a:pPr>
+            <a:r>
+              <a:rPr lang="en-US" sz="1050" dirty="0">
+                <a:solidFill>
+                  <a:srgbClr val="3D3D3D"/>
+                </a:solidFill>
+                <a:latin typeface="Spoqa Han Sans Neo" pitchFamily="34" charset="0"/>
+                <a:ea typeface="Spoqa Han Sans Neo" pitchFamily="34" charset="-122"/>
+                <a:cs typeface="Spoqa Han Sans Neo" pitchFamily="34" charset="-120"/>
+              </a:rPr>
+              <a:t>국채(시장)금리가 정책금리보다 높다 = 긴축·기간프리미엄 반영.  금리↑ → 성장주 할인율↑(역풍).</a:t>
             </a:r>
             <a:endParaRPr lang="en-US" sz="1050" dirty="0"/>
           </a:p>
@@ -12582,7 +12334,7 @@
       </p:sp>
       <p:sp>
         <p:nvSpPr>
-          <p:cNvPr id="39" name="Text 36"/>
+          <p:cNvPr id="30" name="Text 27"/>
           <p:cNvSpPr/>
           <p:nvPr/>
         </p:nvSpPr>
@@ -12613,7 +12365,7 @@
                 <a:ea typeface="Spoqa Han Sans Neo" pitchFamily="34" charset="-122"/>
                 <a:cs typeface="Spoqa Han Sans Neo" pitchFamily="34" charset="-120"/>
               </a:rPr>
-              <a:t>자료: 한국은행·Fed·ECB·BOJ(정책금리), TradingEconomics·Advisor Perspectives(국채금리), 2026.07. 시장금리는 7월 중순~하순치.</a:t>
+              <a:t>자료: 각국 중앙은행(정책금리), TradingEconomics·Investing·Advisor Perspectives(국채 10Y), 2026.07. 시장금리 근사치.</a:t>
             </a:r>
             <a:endParaRPr lang="en-US" sz="850" dirty="0"/>
           </a:p>
@@ -12621,7 +12373,7 @@
       </p:sp>
       <p:sp>
         <p:nvSpPr>
-          <p:cNvPr id="40" name="Text 37"/>
+          <p:cNvPr id="31" name="Text 28"/>
           <p:cNvSpPr/>
           <p:nvPr/>
         </p:nvSpPr>

--- a/반도체_투자_세미나_20260727.pptx
+++ b/반도체_투자_세미나_20260727.pptx
@@ -11443,7 +11443,7 @@
         </p:nvGraphicFramePr>
         <p:xfrm>
           <a:off x="457200" y="1783080"/>
-          <a:ext cx="6903720" cy="3977640"/>
+          <a:ext cx="6126480" cy="3977640"/>
         </p:xfrm>
         <a:graphic xmlns:a="http://schemas.openxmlformats.org/drawingml/2006/main">
           <a:graphicData uri="http://schemas.openxmlformats.org/drawingml/2006/chart">
@@ -11460,7 +11460,7 @@
         <p:spPr>
           <a:xfrm>
             <a:off x="502920" y="5742432"/>
-            <a:ext cx="6858000" cy="274320"/>
+            <a:ext cx="5943600" cy="274320"/>
           </a:xfrm>
           <a:prstGeom prst="rect">
             <a:avLst/>
@@ -11498,8 +11498,8 @@
         </p:nvSpPr>
         <p:spPr>
           <a:xfrm>
-            <a:off x="7498080" y="1719072"/>
-            <a:ext cx="4206240" cy="292608"/>
+            <a:off x="6675120" y="1691640"/>
+            <a:ext cx="5029200" cy="292608"/>
           </a:xfrm>
           <a:prstGeom prst="rect">
             <a:avLst/>
@@ -11523,7 +11523,7 @@
                 <a:ea typeface="Spoqa Han Sans Neo" pitchFamily="34" charset="-122"/>
                 <a:cs typeface="Spoqa Han Sans Neo" pitchFamily="34" charset="-120"/>
               </a:rPr>
-              <a:t>정책금리 vs 시장금리 (2026.7)</a:t>
+              <a:t>정책 vs 시장금리 (2026.7)</a:t>
             </a:r>
             <a:endParaRPr lang="en-US" sz="1250" dirty="0"/>
           </a:p>
@@ -11537,24 +11537,24 @@
         </p:nvSpPr>
         <p:spPr>
           <a:xfrm>
-            <a:off x="7680960" y="2084832"/>
-            <a:ext cx="1280160" cy="274320"/>
-          </a:xfrm>
-          <a:prstGeom prst="rect">
-            <a:avLst/>
-          </a:prstGeom>
-          <a:noFill/>
-          <a:ln/>
-        </p:spPr>
-        <p:txBody>
-          <a:bodyPr wrap="square" lIns="0" tIns="0" rIns="0" bIns="0" rtlCol="0" anchor="ctr"/>
-          <a:lstStyle/>
-          <a:p>
-            <a:pPr indent="0" marL="0">
-              <a:buNone/>
-            </a:pPr>
-            <a:r>
-              <a:rPr lang="en-US" sz="1000" b="1" dirty="0">
+            <a:off x="6858000" y="2066544"/>
+            <a:ext cx="1234440" cy="274320"/>
+          </a:xfrm>
+          <a:prstGeom prst="rect">
+            <a:avLst/>
+          </a:prstGeom>
+          <a:noFill/>
+          <a:ln/>
+        </p:spPr>
+        <p:txBody>
+          <a:bodyPr wrap="square" lIns="0" tIns="0" rIns="0" bIns="0" rtlCol="0" anchor="ctr"/>
+          <a:lstStyle/>
+          <a:p>
+            <a:pPr indent="0" marL="0">
+              <a:buNone/>
+            </a:pPr>
+            <a:r>
+              <a:rPr lang="en-US" sz="950" b="1" dirty="0">
                 <a:solidFill>
                   <a:srgbClr val="6C6C6C"/>
                 </a:solidFill>
@@ -11564,7 +11564,7 @@
               </a:rPr>
               <a:t>국가</a:t>
             </a:r>
-            <a:endParaRPr lang="en-US" sz="1000" dirty="0"/>
+            <a:endParaRPr lang="en-US" sz="950" dirty="0"/>
           </a:p>
         </p:txBody>
       </p:sp>
@@ -11576,8 +11576,8 @@
         </p:nvSpPr>
         <p:spPr>
           <a:xfrm>
-            <a:off x="9006840" y="2084832"/>
-            <a:ext cx="1188720" cy="274320"/>
+            <a:off x="8092440" y="2066544"/>
+            <a:ext cx="1097280" cy="274320"/>
           </a:xfrm>
           <a:prstGeom prst="rect">
             <a:avLst/>
@@ -11593,7 +11593,7 @@
               <a:buNone/>
             </a:pPr>
             <a:r>
-              <a:rPr lang="en-US" sz="1000" b="1" dirty="0">
+              <a:rPr lang="en-US" sz="950" b="1" dirty="0">
                 <a:solidFill>
                   <a:srgbClr val="043B72"/>
                 </a:solidFill>
@@ -11601,9 +11601,9 @@
                 <a:ea typeface="Spoqa Han Sans Neo" pitchFamily="34" charset="-122"/>
                 <a:cs typeface="Spoqa Han Sans Neo" pitchFamily="34" charset="-120"/>
               </a:rPr>
-              <a:t>정책금리</a:t>
-            </a:r>
-            <a:endParaRPr lang="en-US" sz="1000" dirty="0"/>
+              <a:t>정책</a:t>
+            </a:r>
+            <a:endParaRPr lang="en-US" sz="950" dirty="0"/>
           </a:p>
         </p:txBody>
       </p:sp>
@@ -11615,8 +11615,8 @@
         </p:nvSpPr>
         <p:spPr>
           <a:xfrm>
-            <a:off x="10287000" y="2084832"/>
-            <a:ext cx="1280160" cy="274320"/>
+            <a:off x="9189720" y="2066544"/>
+            <a:ext cx="1143000" cy="274320"/>
           </a:xfrm>
           <a:prstGeom prst="rect">
             <a:avLst/>
@@ -11632,7 +11632,46 @@
               <a:buNone/>
             </a:pPr>
             <a:r>
-              <a:rPr lang="en-US" sz="1000" b="1" dirty="0">
+              <a:rPr lang="en-US" sz="950" b="1" dirty="0">
+                <a:solidFill>
+                  <a:srgbClr val="0086B8"/>
+                </a:solidFill>
+                <a:latin typeface="Spoqa Han Sans Neo" pitchFamily="34" charset="0"/>
+                <a:ea typeface="Spoqa Han Sans Neo" pitchFamily="34" charset="-122"/>
+                <a:cs typeface="Spoqa Han Sans Neo" pitchFamily="34" charset="-120"/>
+              </a:rPr>
+              <a:t>단기*</a:t>
+            </a:r>
+            <a:endParaRPr lang="en-US" sz="950" dirty="0"/>
+          </a:p>
+        </p:txBody>
+      </p:sp>
+      <p:sp>
+        <p:nvSpPr>
+          <p:cNvPr id="11" name="Text 8"/>
+          <p:cNvSpPr/>
+          <p:nvPr/>
+        </p:nvSpPr>
+        <p:spPr>
+          <a:xfrm>
+            <a:off x="10332720" y="2066544"/>
+            <a:ext cx="1234440" cy="274320"/>
+          </a:xfrm>
+          <a:prstGeom prst="rect">
+            <a:avLst/>
+          </a:prstGeom>
+          <a:noFill/>
+          <a:ln/>
+        </p:spPr>
+        <p:txBody>
+          <a:bodyPr wrap="square" lIns="0" tIns="0" rIns="0" bIns="0" rtlCol="0" anchor="ctr"/>
+          <a:lstStyle/>
+          <a:p>
+            <a:pPr algn="ctr" indent="0" marL="0">
+              <a:buNone/>
+            </a:pPr>
+            <a:r>
+              <a:rPr lang="en-US" sz="950" b="1" dirty="0">
                 <a:solidFill>
                   <a:srgbClr val="F58220"/>
                 </a:solidFill>
@@ -11640,22 +11679,22 @@
                 <a:ea typeface="Spoqa Han Sans Neo" pitchFamily="34" charset="-122"/>
                 <a:cs typeface="Spoqa Han Sans Neo" pitchFamily="34" charset="-120"/>
               </a:rPr>
-              <a:t>시장(국채10Y)</a:t>
-            </a:r>
-            <a:endParaRPr lang="en-US" sz="1000" dirty="0"/>
-          </a:p>
-        </p:txBody>
-      </p:sp>
-      <p:sp>
-        <p:nvSpPr>
-          <p:cNvPr id="11" name="Shape 8"/>
-          <p:cNvSpPr/>
-          <p:nvPr/>
-        </p:nvSpPr>
-        <p:spPr>
-          <a:xfrm>
-            <a:off x="7498080" y="2395728"/>
-            <a:ext cx="4187952" cy="566928"/>
+              <a:t>장기(10Y)</a:t>
+            </a:r>
+            <a:endParaRPr lang="en-US" sz="950" dirty="0"/>
+          </a:p>
+        </p:txBody>
+      </p:sp>
+      <p:sp>
+        <p:nvSpPr>
+          <p:cNvPr id="12" name="Shape 9"/>
+          <p:cNvSpPr/>
+          <p:nvPr/>
+        </p:nvSpPr>
+        <p:spPr>
+          <a:xfrm>
+            <a:off x="6675120" y="2377440"/>
+            <a:ext cx="5010912" cy="566928"/>
           </a:xfrm>
           <a:prstGeom prst="roundRect">
             <a:avLst>
@@ -11675,30 +11714,30 @@
       </p:sp>
       <p:sp>
         <p:nvSpPr>
-          <p:cNvPr id="12" name="Text 9"/>
-          <p:cNvSpPr/>
-          <p:nvPr/>
-        </p:nvSpPr>
-        <p:spPr>
-          <a:xfrm>
-            <a:off x="7680960" y="2395728"/>
-            <a:ext cx="1371600" cy="566928"/>
-          </a:xfrm>
-          <a:prstGeom prst="rect">
-            <a:avLst/>
-          </a:prstGeom>
-          <a:noFill/>
-          <a:ln/>
-        </p:spPr>
-        <p:txBody>
-          <a:bodyPr wrap="square" lIns="0" tIns="0" rIns="0" bIns="0" rtlCol="0" anchor="ctr"/>
-          <a:lstStyle/>
-          <a:p>
-            <a:pPr indent="0" marL="0">
-              <a:buNone/>
-            </a:pPr>
-            <a:r>
-              <a:rPr lang="en-US" sz="1300" b="1" dirty="0">
+          <p:cNvPr id="13" name="Text 10"/>
+          <p:cNvSpPr/>
+          <p:nvPr/>
+        </p:nvSpPr>
+        <p:spPr>
+          <a:xfrm>
+            <a:off x="6858000" y="2377440"/>
+            <a:ext cx="1234440" cy="566928"/>
+          </a:xfrm>
+          <a:prstGeom prst="rect">
+            <a:avLst/>
+          </a:prstGeom>
+          <a:noFill/>
+          <a:ln/>
+        </p:spPr>
+        <p:txBody>
+          <a:bodyPr wrap="square" lIns="0" tIns="0" rIns="0" bIns="0" rtlCol="0" anchor="ctr"/>
+          <a:lstStyle/>
+          <a:p>
+            <a:pPr indent="0" marL="0">
+              <a:buNone/>
+            </a:pPr>
+            <a:r>
+              <a:rPr lang="en-US" sz="1250" b="1" dirty="0">
                 <a:solidFill>
                   <a:srgbClr val="1A1A1A"/>
                 </a:solidFill>
@@ -11708,19 +11747,97 @@
               </a:rPr>
               <a:t>한국</a:t>
             </a:r>
-            <a:endParaRPr lang="en-US" sz="1300" dirty="0"/>
-          </a:p>
-        </p:txBody>
-      </p:sp>
-      <p:sp>
-        <p:nvSpPr>
-          <p:cNvPr id="13" name="Text 10"/>
-          <p:cNvSpPr/>
-          <p:nvPr/>
-        </p:nvSpPr>
-        <p:spPr>
-          <a:xfrm>
-            <a:off x="8961120" y="2395728"/>
+            <a:endParaRPr lang="en-US" sz="1250" dirty="0"/>
+          </a:p>
+        </p:txBody>
+      </p:sp>
+      <p:sp>
+        <p:nvSpPr>
+          <p:cNvPr id="14" name="Text 11"/>
+          <p:cNvSpPr/>
+          <p:nvPr/>
+        </p:nvSpPr>
+        <p:spPr>
+          <a:xfrm>
+            <a:off x="8092440" y="2377440"/>
+            <a:ext cx="1097280" cy="566928"/>
+          </a:xfrm>
+          <a:prstGeom prst="rect">
+            <a:avLst/>
+          </a:prstGeom>
+          <a:noFill/>
+          <a:ln/>
+        </p:spPr>
+        <p:txBody>
+          <a:bodyPr wrap="square" lIns="0" tIns="0" rIns="0" bIns="0" rtlCol="0" anchor="ctr"/>
+          <a:lstStyle/>
+          <a:p>
+            <a:pPr algn="ctr" indent="0" marL="0">
+              <a:buNone/>
+            </a:pPr>
+            <a:r>
+              <a:rPr lang="en-US" sz="1400" b="1" dirty="0">
+                <a:solidFill>
+                  <a:srgbClr val="043B72"/>
+                </a:solidFill>
+                <a:latin typeface="Spoqa Han Sans Neo" pitchFamily="34" charset="0"/>
+                <a:ea typeface="Spoqa Han Sans Neo" pitchFamily="34" charset="-122"/>
+                <a:cs typeface="Spoqa Han Sans Neo" pitchFamily="34" charset="-120"/>
+              </a:rPr>
+              <a:t>2.75%</a:t>
+            </a:r>
+            <a:endParaRPr lang="en-US" sz="1400" dirty="0"/>
+          </a:p>
+        </p:txBody>
+      </p:sp>
+      <p:sp>
+        <p:nvSpPr>
+          <p:cNvPr id="15" name="Text 12"/>
+          <p:cNvSpPr/>
+          <p:nvPr/>
+        </p:nvSpPr>
+        <p:spPr>
+          <a:xfrm>
+            <a:off x="9189720" y="2377440"/>
+            <a:ext cx="1143000" cy="566928"/>
+          </a:xfrm>
+          <a:prstGeom prst="rect">
+            <a:avLst/>
+          </a:prstGeom>
+          <a:noFill/>
+          <a:ln/>
+        </p:spPr>
+        <p:txBody>
+          <a:bodyPr wrap="square" lIns="0" tIns="0" rIns="0" bIns="0" rtlCol="0" anchor="ctr"/>
+          <a:lstStyle/>
+          <a:p>
+            <a:pPr algn="ctr" indent="0" marL="0">
+              <a:buNone/>
+            </a:pPr>
+            <a:r>
+              <a:rPr lang="en-US" sz="1400" b="1" dirty="0">
+                <a:solidFill>
+                  <a:srgbClr val="0086B8"/>
+                </a:solidFill>
+                <a:latin typeface="Spoqa Han Sans Neo" pitchFamily="34" charset="0"/>
+                <a:ea typeface="Spoqa Han Sans Neo" pitchFamily="34" charset="-122"/>
+                <a:cs typeface="Spoqa Han Sans Neo" pitchFamily="34" charset="-120"/>
+              </a:rPr>
+              <a:t>3.76%</a:t>
+            </a:r>
+            <a:endParaRPr lang="en-US" sz="1400" dirty="0"/>
+          </a:p>
+        </p:txBody>
+      </p:sp>
+      <p:sp>
+        <p:nvSpPr>
+          <p:cNvPr id="16" name="Text 13"/>
+          <p:cNvSpPr/>
+          <p:nvPr/>
+        </p:nvSpPr>
+        <p:spPr>
+          <a:xfrm>
+            <a:off x="10332720" y="2377440"/>
             <a:ext cx="1234440" cy="566928"/>
           </a:xfrm>
           <a:prstGeom prst="rect">
@@ -11737,46 +11854,7 @@
               <a:buNone/>
             </a:pPr>
             <a:r>
-              <a:rPr lang="en-US" sz="1500" b="1" dirty="0">
-                <a:solidFill>
-                  <a:srgbClr val="043B72"/>
-                </a:solidFill>
-                <a:latin typeface="Spoqa Han Sans Neo" pitchFamily="34" charset="0"/>
-                <a:ea typeface="Spoqa Han Sans Neo" pitchFamily="34" charset="-122"/>
-                <a:cs typeface="Spoqa Han Sans Neo" pitchFamily="34" charset="-120"/>
-              </a:rPr>
-              <a:t>2.75%</a:t>
-            </a:r>
-            <a:endParaRPr lang="en-US" sz="1500" dirty="0"/>
-          </a:p>
-        </p:txBody>
-      </p:sp>
-      <p:sp>
-        <p:nvSpPr>
-          <p:cNvPr id="14" name="Text 11"/>
-          <p:cNvSpPr/>
-          <p:nvPr/>
-        </p:nvSpPr>
-        <p:spPr>
-          <a:xfrm>
-            <a:off x="10241280" y="2395728"/>
-            <a:ext cx="1325880" cy="566928"/>
-          </a:xfrm>
-          <a:prstGeom prst="rect">
-            <a:avLst/>
-          </a:prstGeom>
-          <a:noFill/>
-          <a:ln/>
-        </p:spPr>
-        <p:txBody>
-          <a:bodyPr wrap="square" lIns="0" tIns="0" rIns="0" bIns="0" rtlCol="0" anchor="ctr"/>
-          <a:lstStyle/>
-          <a:p>
-            <a:pPr algn="ctr" indent="0" marL="0">
-              <a:buNone/>
-            </a:pPr>
-            <a:r>
-              <a:rPr lang="en-US" sz="1500" b="1" dirty="0">
+              <a:rPr lang="en-US" sz="1400" b="1" dirty="0">
                 <a:solidFill>
                   <a:srgbClr val="F58220"/>
                 </a:solidFill>
@@ -11786,20 +11864,20 @@
               </a:rPr>
               <a:t>4.40%</a:t>
             </a:r>
-            <a:endParaRPr lang="en-US" sz="1500" dirty="0"/>
-          </a:p>
-        </p:txBody>
-      </p:sp>
-      <p:sp>
-        <p:nvSpPr>
-          <p:cNvPr id="15" name="Shape 12"/>
-          <p:cNvSpPr/>
-          <p:nvPr/>
-        </p:nvSpPr>
-        <p:spPr>
-          <a:xfrm>
-            <a:off x="7498080" y="3035808"/>
-            <a:ext cx="4187952" cy="566928"/>
+            <a:endParaRPr lang="en-US" sz="1400" dirty="0"/>
+          </a:p>
+        </p:txBody>
+      </p:sp>
+      <p:sp>
+        <p:nvSpPr>
+          <p:cNvPr id="17" name="Shape 14"/>
+          <p:cNvSpPr/>
+          <p:nvPr/>
+        </p:nvSpPr>
+        <p:spPr>
+          <a:xfrm>
+            <a:off x="6675120" y="3017520"/>
+            <a:ext cx="5010912" cy="566928"/>
           </a:xfrm>
           <a:prstGeom prst="roundRect">
             <a:avLst>
@@ -11819,30 +11897,30 @@
       </p:sp>
       <p:sp>
         <p:nvSpPr>
-          <p:cNvPr id="16" name="Text 13"/>
-          <p:cNvSpPr/>
-          <p:nvPr/>
-        </p:nvSpPr>
-        <p:spPr>
-          <a:xfrm>
-            <a:off x="7680960" y="3035808"/>
-            <a:ext cx="1371600" cy="566928"/>
-          </a:xfrm>
-          <a:prstGeom prst="rect">
-            <a:avLst/>
-          </a:prstGeom>
-          <a:noFill/>
-          <a:ln/>
-        </p:spPr>
-        <p:txBody>
-          <a:bodyPr wrap="square" lIns="0" tIns="0" rIns="0" bIns="0" rtlCol="0" anchor="ctr"/>
-          <a:lstStyle/>
-          <a:p>
-            <a:pPr indent="0" marL="0">
-              <a:buNone/>
-            </a:pPr>
-            <a:r>
-              <a:rPr lang="en-US" sz="1300" b="1" dirty="0">
+          <p:cNvPr id="18" name="Text 15"/>
+          <p:cNvSpPr/>
+          <p:nvPr/>
+        </p:nvSpPr>
+        <p:spPr>
+          <a:xfrm>
+            <a:off x="6858000" y="3017520"/>
+            <a:ext cx="1234440" cy="566928"/>
+          </a:xfrm>
+          <a:prstGeom prst="rect">
+            <a:avLst/>
+          </a:prstGeom>
+          <a:noFill/>
+          <a:ln/>
+        </p:spPr>
+        <p:txBody>
+          <a:bodyPr wrap="square" lIns="0" tIns="0" rIns="0" bIns="0" rtlCol="0" anchor="ctr"/>
+          <a:lstStyle/>
+          <a:p>
+            <a:pPr indent="0" marL="0">
+              <a:buNone/>
+            </a:pPr>
+            <a:r>
+              <a:rPr lang="en-US" sz="1250" b="1" dirty="0">
                 <a:solidFill>
                   <a:srgbClr val="1A1A1A"/>
                 </a:solidFill>
@@ -11852,19 +11930,97 @@
               </a:rPr>
               <a:t>미국</a:t>
             </a:r>
-            <a:endParaRPr lang="en-US" sz="1300" dirty="0"/>
-          </a:p>
-        </p:txBody>
-      </p:sp>
-      <p:sp>
-        <p:nvSpPr>
-          <p:cNvPr id="17" name="Text 14"/>
-          <p:cNvSpPr/>
-          <p:nvPr/>
-        </p:nvSpPr>
-        <p:spPr>
-          <a:xfrm>
-            <a:off x="8961120" y="3035808"/>
+            <a:endParaRPr lang="en-US" sz="1250" dirty="0"/>
+          </a:p>
+        </p:txBody>
+      </p:sp>
+      <p:sp>
+        <p:nvSpPr>
+          <p:cNvPr id="19" name="Text 16"/>
+          <p:cNvSpPr/>
+          <p:nvPr/>
+        </p:nvSpPr>
+        <p:spPr>
+          <a:xfrm>
+            <a:off x="8092440" y="3017520"/>
+            <a:ext cx="1097280" cy="566928"/>
+          </a:xfrm>
+          <a:prstGeom prst="rect">
+            <a:avLst/>
+          </a:prstGeom>
+          <a:noFill/>
+          <a:ln/>
+        </p:spPr>
+        <p:txBody>
+          <a:bodyPr wrap="square" lIns="0" tIns="0" rIns="0" bIns="0" rtlCol="0" anchor="ctr"/>
+          <a:lstStyle/>
+          <a:p>
+            <a:pPr algn="ctr" indent="0" marL="0">
+              <a:buNone/>
+            </a:pPr>
+            <a:r>
+              <a:rPr lang="en-US" sz="1400" b="1" dirty="0">
+                <a:solidFill>
+                  <a:srgbClr val="043B72"/>
+                </a:solidFill>
+                <a:latin typeface="Spoqa Han Sans Neo" pitchFamily="34" charset="0"/>
+                <a:ea typeface="Spoqa Han Sans Neo" pitchFamily="34" charset="-122"/>
+                <a:cs typeface="Spoqa Han Sans Neo" pitchFamily="34" charset="-120"/>
+              </a:rPr>
+              <a:t>3.63%</a:t>
+            </a:r>
+            <a:endParaRPr lang="en-US" sz="1400" dirty="0"/>
+          </a:p>
+        </p:txBody>
+      </p:sp>
+      <p:sp>
+        <p:nvSpPr>
+          <p:cNvPr id="20" name="Text 17"/>
+          <p:cNvSpPr/>
+          <p:nvPr/>
+        </p:nvSpPr>
+        <p:spPr>
+          <a:xfrm>
+            <a:off x="9189720" y="3017520"/>
+            <a:ext cx="1143000" cy="566928"/>
+          </a:xfrm>
+          <a:prstGeom prst="rect">
+            <a:avLst/>
+          </a:prstGeom>
+          <a:noFill/>
+          <a:ln/>
+        </p:spPr>
+        <p:txBody>
+          <a:bodyPr wrap="square" lIns="0" tIns="0" rIns="0" bIns="0" rtlCol="0" anchor="ctr"/>
+          <a:lstStyle/>
+          <a:p>
+            <a:pPr algn="ctr" indent="0" marL="0">
+              <a:buNone/>
+            </a:pPr>
+            <a:r>
+              <a:rPr lang="en-US" sz="1400" b="1" dirty="0">
+                <a:solidFill>
+                  <a:srgbClr val="0086B8"/>
+                </a:solidFill>
+                <a:latin typeface="Spoqa Han Sans Neo" pitchFamily="34" charset="0"/>
+                <a:ea typeface="Spoqa Han Sans Neo" pitchFamily="34" charset="-122"/>
+                <a:cs typeface="Spoqa Han Sans Neo" pitchFamily="34" charset="-120"/>
+              </a:rPr>
+              <a:t>4.33%</a:t>
+            </a:r>
+            <a:endParaRPr lang="en-US" sz="1400" dirty="0"/>
+          </a:p>
+        </p:txBody>
+      </p:sp>
+      <p:sp>
+        <p:nvSpPr>
+          <p:cNvPr id="21" name="Text 18"/>
+          <p:cNvSpPr/>
+          <p:nvPr/>
+        </p:nvSpPr>
+        <p:spPr>
+          <a:xfrm>
+            <a:off x="10332720" y="3017520"/>
             <a:ext cx="1234440" cy="566928"/>
           </a:xfrm>
           <a:prstGeom prst="rect">
@@ -11881,46 +12037,7 @@
               <a:buNone/>
             </a:pPr>
             <a:r>
-              <a:rPr lang="en-US" sz="1500" b="1" dirty="0">
-                <a:solidFill>
-                  <a:srgbClr val="043B72"/>
-                </a:solidFill>
-                <a:latin typeface="Spoqa Han Sans Neo" pitchFamily="34" charset="0"/>
-                <a:ea typeface="Spoqa Han Sans Neo" pitchFamily="34" charset="-122"/>
-                <a:cs typeface="Spoqa Han Sans Neo" pitchFamily="34" charset="-120"/>
-              </a:rPr>
-              <a:t>3.63%</a:t>
-            </a:r>
-            <a:endParaRPr lang="en-US" sz="1500" dirty="0"/>
-          </a:p>
-        </p:txBody>
-      </p:sp>
-      <p:sp>
-        <p:nvSpPr>
-          <p:cNvPr id="18" name="Text 15"/>
-          <p:cNvSpPr/>
-          <p:nvPr/>
-        </p:nvSpPr>
-        <p:spPr>
-          <a:xfrm>
-            <a:off x="10241280" y="3035808"/>
-            <a:ext cx="1325880" cy="566928"/>
-          </a:xfrm>
-          <a:prstGeom prst="rect">
-            <a:avLst/>
-          </a:prstGeom>
-          <a:noFill/>
-          <a:ln/>
-        </p:spPr>
-        <p:txBody>
-          <a:bodyPr wrap="square" lIns="0" tIns="0" rIns="0" bIns="0" rtlCol="0" anchor="ctr"/>
-          <a:lstStyle/>
-          <a:p>
-            <a:pPr algn="ctr" indent="0" marL="0">
-              <a:buNone/>
-            </a:pPr>
-            <a:r>
-              <a:rPr lang="en-US" sz="1500" b="1" dirty="0">
+              <a:rPr lang="en-US" sz="1400" b="1" dirty="0">
                 <a:solidFill>
                   <a:srgbClr val="F58220"/>
                 </a:solidFill>
@@ -11930,20 +12047,20 @@
               </a:rPr>
               <a:t>4.69%</a:t>
             </a:r>
-            <a:endParaRPr lang="en-US" sz="1500" dirty="0"/>
-          </a:p>
-        </p:txBody>
-      </p:sp>
-      <p:sp>
-        <p:nvSpPr>
-          <p:cNvPr id="19" name="Shape 16"/>
-          <p:cNvSpPr/>
-          <p:nvPr/>
-        </p:nvSpPr>
-        <p:spPr>
-          <a:xfrm>
-            <a:off x="7498080" y="3675888"/>
-            <a:ext cx="4187952" cy="566928"/>
+            <a:endParaRPr lang="en-US" sz="1400" dirty="0"/>
+          </a:p>
+        </p:txBody>
+      </p:sp>
+      <p:sp>
+        <p:nvSpPr>
+          <p:cNvPr id="22" name="Shape 19"/>
+          <p:cNvSpPr/>
+          <p:nvPr/>
+        </p:nvSpPr>
+        <p:spPr>
+          <a:xfrm>
+            <a:off x="6675120" y="3657600"/>
+            <a:ext cx="5010912" cy="566928"/>
           </a:xfrm>
           <a:prstGeom prst="roundRect">
             <a:avLst>
@@ -11963,30 +12080,30 @@
       </p:sp>
       <p:sp>
         <p:nvSpPr>
-          <p:cNvPr id="20" name="Text 17"/>
-          <p:cNvSpPr/>
-          <p:nvPr/>
-        </p:nvSpPr>
-        <p:spPr>
-          <a:xfrm>
-            <a:off x="7680960" y="3675888"/>
-            <a:ext cx="1371600" cy="566928"/>
-          </a:xfrm>
-          <a:prstGeom prst="rect">
-            <a:avLst/>
-          </a:prstGeom>
-          <a:noFill/>
-          <a:ln/>
-        </p:spPr>
-        <p:txBody>
-          <a:bodyPr wrap="square" lIns="0" tIns="0" rIns="0" bIns="0" rtlCol="0" anchor="ctr"/>
-          <a:lstStyle/>
-          <a:p>
-            <a:pPr indent="0" marL="0">
-              <a:buNone/>
-            </a:pPr>
-            <a:r>
-              <a:rPr lang="en-US" sz="1300" b="1" dirty="0">
+          <p:cNvPr id="23" name="Text 20"/>
+          <p:cNvSpPr/>
+          <p:nvPr/>
+        </p:nvSpPr>
+        <p:spPr>
+          <a:xfrm>
+            <a:off x="6858000" y="3657600"/>
+            <a:ext cx="1234440" cy="566928"/>
+          </a:xfrm>
+          <a:prstGeom prst="rect">
+            <a:avLst/>
+          </a:prstGeom>
+          <a:noFill/>
+          <a:ln/>
+        </p:spPr>
+        <p:txBody>
+          <a:bodyPr wrap="square" lIns="0" tIns="0" rIns="0" bIns="0" rtlCol="0" anchor="ctr"/>
+          <a:lstStyle/>
+          <a:p>
+            <a:pPr indent="0" marL="0">
+              <a:buNone/>
+            </a:pPr>
+            <a:r>
+              <a:rPr lang="en-US" sz="1250" b="1" dirty="0">
                 <a:solidFill>
                   <a:srgbClr val="1A1A1A"/>
                 </a:solidFill>
@@ -11996,19 +12113,97 @@
               </a:rPr>
               <a:t>유로존</a:t>
             </a:r>
-            <a:endParaRPr lang="en-US" sz="1300" dirty="0"/>
-          </a:p>
-        </p:txBody>
-      </p:sp>
-      <p:sp>
-        <p:nvSpPr>
-          <p:cNvPr id="21" name="Text 18"/>
-          <p:cNvSpPr/>
-          <p:nvPr/>
-        </p:nvSpPr>
-        <p:spPr>
-          <a:xfrm>
-            <a:off x="8961120" y="3675888"/>
+            <a:endParaRPr lang="en-US" sz="1250" dirty="0"/>
+          </a:p>
+        </p:txBody>
+      </p:sp>
+      <p:sp>
+        <p:nvSpPr>
+          <p:cNvPr id="24" name="Text 21"/>
+          <p:cNvSpPr/>
+          <p:nvPr/>
+        </p:nvSpPr>
+        <p:spPr>
+          <a:xfrm>
+            <a:off x="8092440" y="3657600"/>
+            <a:ext cx="1097280" cy="566928"/>
+          </a:xfrm>
+          <a:prstGeom prst="rect">
+            <a:avLst/>
+          </a:prstGeom>
+          <a:noFill/>
+          <a:ln/>
+        </p:spPr>
+        <p:txBody>
+          <a:bodyPr wrap="square" lIns="0" tIns="0" rIns="0" bIns="0" rtlCol="0" anchor="ctr"/>
+          <a:lstStyle/>
+          <a:p>
+            <a:pPr algn="ctr" indent="0" marL="0">
+              <a:buNone/>
+            </a:pPr>
+            <a:r>
+              <a:rPr lang="en-US" sz="1400" b="1" dirty="0">
+                <a:solidFill>
+                  <a:srgbClr val="043B72"/>
+                </a:solidFill>
+                <a:latin typeface="Spoqa Han Sans Neo" pitchFamily="34" charset="0"/>
+                <a:ea typeface="Spoqa Han Sans Neo" pitchFamily="34" charset="-122"/>
+                <a:cs typeface="Spoqa Han Sans Neo" pitchFamily="34" charset="-120"/>
+              </a:rPr>
+              <a:t>2.25%</a:t>
+            </a:r>
+            <a:endParaRPr lang="en-US" sz="1400" dirty="0"/>
+          </a:p>
+        </p:txBody>
+      </p:sp>
+      <p:sp>
+        <p:nvSpPr>
+          <p:cNvPr id="25" name="Text 22"/>
+          <p:cNvSpPr/>
+          <p:nvPr/>
+        </p:nvSpPr>
+        <p:spPr>
+          <a:xfrm>
+            <a:off x="9189720" y="3657600"/>
+            <a:ext cx="1143000" cy="566928"/>
+          </a:xfrm>
+          <a:prstGeom prst="rect">
+            <a:avLst/>
+          </a:prstGeom>
+          <a:noFill/>
+          <a:ln/>
+        </p:spPr>
+        <p:txBody>
+          <a:bodyPr wrap="square" lIns="0" tIns="0" rIns="0" bIns="0" rtlCol="0" anchor="ctr"/>
+          <a:lstStyle/>
+          <a:p>
+            <a:pPr algn="ctr" indent="0" marL="0">
+              <a:buNone/>
+            </a:pPr>
+            <a:r>
+              <a:rPr lang="en-US" sz="1400" b="1" dirty="0">
+                <a:solidFill>
+                  <a:srgbClr val="0086B8"/>
+                </a:solidFill>
+                <a:latin typeface="Spoqa Han Sans Neo" pitchFamily="34" charset="0"/>
+                <a:ea typeface="Spoqa Han Sans Neo" pitchFamily="34" charset="-122"/>
+                <a:cs typeface="Spoqa Han Sans Neo" pitchFamily="34" charset="-120"/>
+              </a:rPr>
+              <a:t>2.88%</a:t>
+            </a:r>
+            <a:endParaRPr lang="en-US" sz="1400" dirty="0"/>
+          </a:p>
+        </p:txBody>
+      </p:sp>
+      <p:sp>
+        <p:nvSpPr>
+          <p:cNvPr id="26" name="Text 23"/>
+          <p:cNvSpPr/>
+          <p:nvPr/>
+        </p:nvSpPr>
+        <p:spPr>
+          <a:xfrm>
+            <a:off x="10332720" y="3657600"/>
             <a:ext cx="1234440" cy="566928"/>
           </a:xfrm>
           <a:prstGeom prst="rect">
@@ -12025,46 +12220,7 @@
               <a:buNone/>
             </a:pPr>
             <a:r>
-              <a:rPr lang="en-US" sz="1500" b="1" dirty="0">
-                <a:solidFill>
-                  <a:srgbClr val="043B72"/>
-                </a:solidFill>
-                <a:latin typeface="Spoqa Han Sans Neo" pitchFamily="34" charset="0"/>
-                <a:ea typeface="Spoqa Han Sans Neo" pitchFamily="34" charset="-122"/>
-                <a:cs typeface="Spoqa Han Sans Neo" pitchFamily="34" charset="-120"/>
-              </a:rPr>
-              <a:t>2.25%</a:t>
-            </a:r>
-            <a:endParaRPr lang="en-US" sz="1500" dirty="0"/>
-          </a:p>
-        </p:txBody>
-      </p:sp>
-      <p:sp>
-        <p:nvSpPr>
-          <p:cNvPr id="22" name="Text 19"/>
-          <p:cNvSpPr/>
-          <p:nvPr/>
-        </p:nvSpPr>
-        <p:spPr>
-          <a:xfrm>
-            <a:off x="10241280" y="3675888"/>
-            <a:ext cx="1325880" cy="566928"/>
-          </a:xfrm>
-          <a:prstGeom prst="rect">
-            <a:avLst/>
-          </a:prstGeom>
-          <a:noFill/>
-          <a:ln/>
-        </p:spPr>
-        <p:txBody>
-          <a:bodyPr wrap="square" lIns="0" tIns="0" rIns="0" bIns="0" rtlCol="0" anchor="ctr"/>
-          <a:lstStyle/>
-          <a:p>
-            <a:pPr algn="ctr" indent="0" marL="0">
-              <a:buNone/>
-            </a:pPr>
-            <a:r>
-              <a:rPr lang="en-US" sz="1500" b="1" dirty="0">
+              <a:rPr lang="en-US" sz="1400" b="1" dirty="0">
                 <a:solidFill>
                   <a:srgbClr val="F58220"/>
                 </a:solidFill>
@@ -12074,20 +12230,20 @@
               </a:rPr>
               <a:t>2.95%</a:t>
             </a:r>
-            <a:endParaRPr lang="en-US" sz="1500" dirty="0"/>
-          </a:p>
-        </p:txBody>
-      </p:sp>
-      <p:sp>
-        <p:nvSpPr>
-          <p:cNvPr id="23" name="Shape 20"/>
-          <p:cNvSpPr/>
-          <p:nvPr/>
-        </p:nvSpPr>
-        <p:spPr>
-          <a:xfrm>
-            <a:off x="7498080" y="4315968"/>
-            <a:ext cx="4187952" cy="566928"/>
+            <a:endParaRPr lang="en-US" sz="1400" dirty="0"/>
+          </a:p>
+        </p:txBody>
+      </p:sp>
+      <p:sp>
+        <p:nvSpPr>
+          <p:cNvPr id="27" name="Shape 24"/>
+          <p:cNvSpPr/>
+          <p:nvPr/>
+        </p:nvSpPr>
+        <p:spPr>
+          <a:xfrm>
+            <a:off x="6675120" y="4297680"/>
+            <a:ext cx="5010912" cy="566928"/>
           </a:xfrm>
           <a:prstGeom prst="roundRect">
             <a:avLst>
@@ -12107,30 +12263,30 @@
       </p:sp>
       <p:sp>
         <p:nvSpPr>
-          <p:cNvPr id="24" name="Text 21"/>
-          <p:cNvSpPr/>
-          <p:nvPr/>
-        </p:nvSpPr>
-        <p:spPr>
-          <a:xfrm>
-            <a:off x="7680960" y="4315968"/>
-            <a:ext cx="1371600" cy="566928"/>
-          </a:xfrm>
-          <a:prstGeom prst="rect">
-            <a:avLst/>
-          </a:prstGeom>
-          <a:noFill/>
-          <a:ln/>
-        </p:spPr>
-        <p:txBody>
-          <a:bodyPr wrap="square" lIns="0" tIns="0" rIns="0" bIns="0" rtlCol="0" anchor="ctr"/>
-          <a:lstStyle/>
-          <a:p>
-            <a:pPr indent="0" marL="0">
-              <a:buNone/>
-            </a:pPr>
-            <a:r>
-              <a:rPr lang="en-US" sz="1300" b="1" dirty="0">
+          <p:cNvPr id="28" name="Text 25"/>
+          <p:cNvSpPr/>
+          <p:nvPr/>
+        </p:nvSpPr>
+        <p:spPr>
+          <a:xfrm>
+            <a:off x="6858000" y="4297680"/>
+            <a:ext cx="1234440" cy="566928"/>
+          </a:xfrm>
+          <a:prstGeom prst="rect">
+            <a:avLst/>
+          </a:prstGeom>
+          <a:noFill/>
+          <a:ln/>
+        </p:spPr>
+        <p:txBody>
+          <a:bodyPr wrap="square" lIns="0" tIns="0" rIns="0" bIns="0" rtlCol="0" anchor="ctr"/>
+          <a:lstStyle/>
+          <a:p>
+            <a:pPr indent="0" marL="0">
+              <a:buNone/>
+            </a:pPr>
+            <a:r>
+              <a:rPr lang="en-US" sz="1250" b="1" dirty="0">
                 <a:solidFill>
                   <a:srgbClr val="1A1A1A"/>
                 </a:solidFill>
@@ -12140,19 +12296,97 @@
               </a:rPr>
               <a:t>일본</a:t>
             </a:r>
-            <a:endParaRPr lang="en-US" sz="1300" dirty="0"/>
-          </a:p>
-        </p:txBody>
-      </p:sp>
-      <p:sp>
-        <p:nvSpPr>
-          <p:cNvPr id="25" name="Text 22"/>
-          <p:cNvSpPr/>
-          <p:nvPr/>
-        </p:nvSpPr>
-        <p:spPr>
-          <a:xfrm>
-            <a:off x="8961120" y="4315968"/>
+            <a:endParaRPr lang="en-US" sz="1250" dirty="0"/>
+          </a:p>
+        </p:txBody>
+      </p:sp>
+      <p:sp>
+        <p:nvSpPr>
+          <p:cNvPr id="29" name="Text 26"/>
+          <p:cNvSpPr/>
+          <p:nvPr/>
+        </p:nvSpPr>
+        <p:spPr>
+          <a:xfrm>
+            <a:off x="8092440" y="4297680"/>
+            <a:ext cx="1097280" cy="566928"/>
+          </a:xfrm>
+          <a:prstGeom prst="rect">
+            <a:avLst/>
+          </a:prstGeom>
+          <a:noFill/>
+          <a:ln/>
+        </p:spPr>
+        <p:txBody>
+          <a:bodyPr wrap="square" lIns="0" tIns="0" rIns="0" bIns="0" rtlCol="0" anchor="ctr"/>
+          <a:lstStyle/>
+          <a:p>
+            <a:pPr algn="ctr" indent="0" marL="0">
+              <a:buNone/>
+            </a:pPr>
+            <a:r>
+              <a:rPr lang="en-US" sz="1400" b="1" dirty="0">
+                <a:solidFill>
+                  <a:srgbClr val="043B72"/>
+                </a:solidFill>
+                <a:latin typeface="Spoqa Han Sans Neo" pitchFamily="34" charset="0"/>
+                <a:ea typeface="Spoqa Han Sans Neo" pitchFamily="34" charset="-122"/>
+                <a:cs typeface="Spoqa Han Sans Neo" pitchFamily="34" charset="-120"/>
+              </a:rPr>
+              <a:t>1.00%</a:t>
+            </a:r>
+            <a:endParaRPr lang="en-US" sz="1400" dirty="0"/>
+          </a:p>
+        </p:txBody>
+      </p:sp>
+      <p:sp>
+        <p:nvSpPr>
+          <p:cNvPr id="30" name="Text 27"/>
+          <p:cNvSpPr/>
+          <p:nvPr/>
+        </p:nvSpPr>
+        <p:spPr>
+          <a:xfrm>
+            <a:off x="9189720" y="4297680"/>
+            <a:ext cx="1143000" cy="566928"/>
+          </a:xfrm>
+          <a:prstGeom prst="rect">
+            <a:avLst/>
+          </a:prstGeom>
+          <a:noFill/>
+          <a:ln/>
+        </p:spPr>
+        <p:txBody>
+          <a:bodyPr wrap="square" lIns="0" tIns="0" rIns="0" bIns="0" rtlCol="0" anchor="ctr"/>
+          <a:lstStyle/>
+          <a:p>
+            <a:pPr algn="ctr" indent="0" marL="0">
+              <a:buNone/>
+            </a:pPr>
+            <a:r>
+              <a:rPr lang="en-US" sz="1400" b="1" dirty="0">
+                <a:solidFill>
+                  <a:srgbClr val="0086B8"/>
+                </a:solidFill>
+                <a:latin typeface="Spoqa Han Sans Neo" pitchFamily="34" charset="0"/>
+                <a:ea typeface="Spoqa Han Sans Neo" pitchFamily="34" charset="-122"/>
+                <a:cs typeface="Spoqa Han Sans Neo" pitchFamily="34" charset="-120"/>
+              </a:rPr>
+              <a:t>1.5%</a:t>
+            </a:r>
+            <a:endParaRPr lang="en-US" sz="1400" dirty="0"/>
+          </a:p>
+        </p:txBody>
+      </p:sp>
+      <p:sp>
+        <p:nvSpPr>
+          <p:cNvPr id="31" name="Text 28"/>
+          <p:cNvSpPr/>
+          <p:nvPr/>
+        </p:nvSpPr>
+        <p:spPr>
+          <a:xfrm>
+            <a:off x="10332720" y="4297680"/>
             <a:ext cx="1234440" cy="566928"/>
           </a:xfrm>
           <a:prstGeom prst="rect">
@@ -12169,46 +12403,7 @@
               <a:buNone/>
             </a:pPr>
             <a:r>
-              <a:rPr lang="en-US" sz="1500" b="1" dirty="0">
-                <a:solidFill>
-                  <a:srgbClr val="043B72"/>
-                </a:solidFill>
-                <a:latin typeface="Spoqa Han Sans Neo" pitchFamily="34" charset="0"/>
-                <a:ea typeface="Spoqa Han Sans Neo" pitchFamily="34" charset="-122"/>
-                <a:cs typeface="Spoqa Han Sans Neo" pitchFamily="34" charset="-120"/>
-              </a:rPr>
-              <a:t>1.00%</a:t>
-            </a:r>
-            <a:endParaRPr lang="en-US" sz="1500" dirty="0"/>
-          </a:p>
-        </p:txBody>
-      </p:sp>
-      <p:sp>
-        <p:nvSpPr>
-          <p:cNvPr id="26" name="Text 23"/>
-          <p:cNvSpPr/>
-          <p:nvPr/>
-        </p:nvSpPr>
-        <p:spPr>
-          <a:xfrm>
-            <a:off x="10241280" y="4315968"/>
-            <a:ext cx="1325880" cy="566928"/>
-          </a:xfrm>
-          <a:prstGeom prst="rect">
-            <a:avLst/>
-          </a:prstGeom>
-          <a:noFill/>
-          <a:ln/>
-        </p:spPr>
-        <p:txBody>
-          <a:bodyPr wrap="square" lIns="0" tIns="0" rIns="0" bIns="0" rtlCol="0" anchor="ctr"/>
-          <a:lstStyle/>
-          <a:p>
-            <a:pPr algn="ctr" indent="0" marL="0">
-              <a:buNone/>
-            </a:pPr>
-            <a:r>
-              <a:rPr lang="en-US" sz="1500" b="1" dirty="0">
+              <a:rPr lang="en-US" sz="1400" b="1" dirty="0">
                 <a:solidFill>
                   <a:srgbClr val="F58220"/>
                 </a:solidFill>
@@ -12218,24 +12413,24 @@
               </a:rPr>
               <a:t>2.78%</a:t>
             </a:r>
-            <a:endParaRPr lang="en-US" sz="1500" dirty="0"/>
-          </a:p>
-        </p:txBody>
-      </p:sp>
-      <p:sp>
-        <p:nvSpPr>
-          <p:cNvPr id="27" name="Shape 24"/>
-          <p:cNvSpPr/>
-          <p:nvPr/>
-        </p:nvSpPr>
-        <p:spPr>
-          <a:xfrm>
-            <a:off x="7498080" y="5074920"/>
-            <a:ext cx="4187952" cy="932688"/>
+            <a:endParaRPr lang="en-US" sz="1400" dirty="0"/>
+          </a:p>
+        </p:txBody>
+      </p:sp>
+      <p:sp>
+        <p:nvSpPr>
+          <p:cNvPr id="32" name="Shape 29"/>
+          <p:cNvSpPr/>
+          <p:nvPr/>
+        </p:nvSpPr>
+        <p:spPr>
+          <a:xfrm>
+            <a:off x="6675120" y="5029200"/>
+            <a:ext cx="5010912" cy="960120"/>
           </a:xfrm>
           <a:prstGeom prst="roundRect">
             <a:avLst>
-              <a:gd name="adj" fmla="val 4902"/>
+              <a:gd name="adj" fmla="val 4762"/>
             </a:avLst>
           </a:prstGeom>
           <a:solidFill>
@@ -12253,30 +12448,30 @@
       </p:sp>
       <p:sp>
         <p:nvSpPr>
-          <p:cNvPr id="28" name="Text 25"/>
-          <p:cNvSpPr/>
-          <p:nvPr/>
-        </p:nvSpPr>
-        <p:spPr>
-          <a:xfrm>
-            <a:off x="7699248" y="5175504"/>
-            <a:ext cx="3840480" cy="292608"/>
-          </a:xfrm>
-          <a:prstGeom prst="rect">
-            <a:avLst/>
-          </a:prstGeom>
-          <a:noFill/>
-          <a:ln/>
-        </p:spPr>
-        <p:txBody>
-          <a:bodyPr wrap="square" lIns="0" tIns="0" rIns="0" bIns="0" rtlCol="0" anchor="ctr"/>
-          <a:lstStyle/>
-          <a:p>
-            <a:pPr indent="0" marL="0">
-              <a:buNone/>
-            </a:pPr>
-            <a:r>
-              <a:rPr lang="en-US" sz="1200" b="1" dirty="0">
+          <p:cNvPr id="33" name="Text 30"/>
+          <p:cNvSpPr/>
+          <p:nvPr/>
+        </p:nvSpPr>
+        <p:spPr>
+          <a:xfrm>
+            <a:off x="6858000" y="5120640"/>
+            <a:ext cx="4663440" cy="292608"/>
+          </a:xfrm>
+          <a:prstGeom prst="rect">
+            <a:avLst/>
+          </a:prstGeom>
+          <a:noFill/>
+          <a:ln/>
+        </p:spPr>
+        <p:txBody>
+          <a:bodyPr wrap="square" lIns="0" tIns="0" rIns="0" bIns="0" rtlCol="0" anchor="ctr"/>
+          <a:lstStyle/>
+          <a:p>
+            <a:pPr indent="0" marL="0">
+              <a:buNone/>
+            </a:pPr>
+            <a:r>
+              <a:rPr lang="en-US" sz="1150" b="1" dirty="0">
                 <a:solidFill>
                   <a:srgbClr val="CB6015"/>
                 </a:solidFill>
@@ -12284,22 +12479,22 @@
                 <a:ea typeface="Spoqa Han Sans Neo" pitchFamily="34" charset="-122"/>
                 <a:cs typeface="Spoqa Han Sans Neo" pitchFamily="34" charset="-120"/>
               </a:rPr>
-              <a:t>시장금리 &gt; 정책금리</a:t>
-            </a:r>
-            <a:endParaRPr lang="en-US" sz="1200" dirty="0"/>
-          </a:p>
-        </p:txBody>
-      </p:sp>
-      <p:sp>
-        <p:nvSpPr>
-          <p:cNvPr id="29" name="Text 26"/>
-          <p:cNvSpPr/>
-          <p:nvPr/>
-        </p:nvSpPr>
-        <p:spPr>
-          <a:xfrm>
-            <a:off x="7699248" y="5468112"/>
-            <a:ext cx="3840480" cy="530352"/>
+              <a:t>장기 &gt; 단기 &gt; 정책금리 = 우상향 곡선</a:t>
+            </a:r>
+            <a:endParaRPr lang="en-US" sz="1150" dirty="0"/>
+          </a:p>
+        </p:txBody>
+      </p:sp>
+      <p:sp>
+        <p:nvSpPr>
+          <p:cNvPr id="34" name="Text 31"/>
+          <p:cNvSpPr/>
+          <p:nvPr/>
+        </p:nvSpPr>
+        <p:spPr>
+          <a:xfrm>
+            <a:off x="6858000" y="5413248"/>
+            <a:ext cx="4663440" cy="502920"/>
           </a:xfrm>
           <a:prstGeom prst="rect">
             <a:avLst/>
@@ -12326,7 +12521,7 @@
                 <a:ea typeface="Spoqa Han Sans Neo" pitchFamily="34" charset="-122"/>
                 <a:cs typeface="Spoqa Han Sans Neo" pitchFamily="34" charset="-120"/>
               </a:rPr>
-              <a:t>국채(시장)금리가 정책금리보다 높다 = 긴축·기간프리미엄 반영.  금리↑ → 성장주 할인율↑(역풍).</a:t>
+              <a:t>시장은 '고금리 장기화'를 반영.  금리↑ → 성장주 할인율↑(역풍).</a:t>
             </a:r>
             <a:endParaRPr lang="en-US" sz="1050" dirty="0"/>
           </a:p>
@@ -12334,7 +12529,7 @@
       </p:sp>
       <p:sp>
         <p:nvSpPr>
-          <p:cNvPr id="30" name="Text 27"/>
+          <p:cNvPr id="35" name="Text 32"/>
           <p:cNvSpPr/>
           <p:nvPr/>
         </p:nvSpPr>
@@ -12365,7 +12560,7 @@
                 <a:ea typeface="Spoqa Han Sans Neo" pitchFamily="34" charset="-122"/>
                 <a:cs typeface="Spoqa Han Sans Neo" pitchFamily="34" charset="-120"/>
               </a:rPr>
-              <a:t>자료: 각국 중앙은행(정책금리), TradingEconomics·Investing·Advisor Perspectives(국채 10Y), 2026.07. 시장금리 근사치.</a:t>
+              <a:t>자료: 각국 중앙은행(정책), TradingEconomics·Investing·Advisor Perspectives(국채), 2026.07.  *단기=한국 3년·그 외 2년물, 일부 근사.</a:t>
             </a:r>
             <a:endParaRPr lang="en-US" sz="850" dirty="0"/>
           </a:p>
@@ -12373,7 +12568,7 @@
       </p:sp>
       <p:sp>
         <p:nvSpPr>
-          <p:cNvPr id="31" name="Text 28"/>
+          <p:cNvPr id="36" name="Text 33"/>
           <p:cNvSpPr/>
           <p:nvPr/>
         </p:nvSpPr>
